--- a/presos/Graph_RAG_Interview_Deck.pptx
+++ b/presos/Graph_RAG_Interview_Deck.pptx
@@ -947,27 +947,32 @@
           <a:lstStyle/>
           <a:p>
             <a:r>
-              <a:t>The symptom: asked something the corpus could not answer, the system described what the corpus did contain and presented that as an answer. Faithful to its sources, and no answer to the question.</a:t>
-            </a:r>
-          </a:p>
-          <a:p>
-            <a:r>
-              <a:t>AB-01 — the obiter question — now returns: "The corpus contains only party filings, subpoenas, motions, and deposition transcripts, but no judicial opinions or obiter dicta." That is the exact question four previous attempts failed on.</a:t>
-            </a:r>
-          </a:p>
-          <a:p>
-            <a:r>
-              <a:t>An instruction a model can ignore becomes a rule it cannot, once it moves into code. That is the same lesson as pinning minItems/maxItems in the dedup schema, and as schema-constrained entity types. It is the single most transferable idea in the whole build.</a:t>
-            </a:r>
-          </a:p>
-          <a:p>
-            <a:r>
-              <a:t>The correctness fix and the demo fix turned out to be the same change. Streaming the answer after a cheap verdict means retrieval paints at 63ms instead of the page sitting blank for 68 seconds.</a:t>
-            </a:r>
-          </a:p>
-          <a:p>
-            <a:r>
-              <a:t>I introduced two defects doing it and had to measure my way back out: an over-strict first prompt refused the baseline sanity question, and the model twice claimed sufficiency with zero relevant sources. Both are in the commit history.</a:t>
+              <a:t>The numbers. Five questions the documents cannot answer, run through all three strategies — fifteen runs. Before the split, it answered all fifteen. After both fixes, it declines eleven. And every single refusal across the full 105-run set was checked by hand against the corpus: none of them was wrong.</a:t>
+            </a:r>
+          </a:p>
+          <a:p>
+            <a:r>
+              <a:t>What the old version was really doing. Asked which judge signed the January 2024 order, it wrote about adverse inference instructions. Asked what the errata sheet said, it wrote about a passport stamp. Both times: confident, fluent, all eight sources cited, and about a different question. The citation counts in the old results measured nothing at all.</a:t>
+            </a:r>
+          </a:p>
+          <a:p>
+            <a:r>
+              <a:t>Why the second bug is the interesting one. My first instinct was that the past tense broke it — "who were" failed, "who are" worked. That was wrong. Holding the retrieved passages fixed, both wordings give the same verdict; changing the wording only moved the query embedding, which swapped three of the eight passages. The tense was never the cause. Blaming the user's phrasing would have shipped the bug.</a:t>
+            </a:r>
+          </a:p>
+          <a:p>
+            <a:r>
+              <a:t>Cost. Eight small calls instead of one large one. It came out faster — the same passages are read either way, but each call now writes a handful of tokens instead of a paragraph.</a:t>
+            </a:r>
+          </a:p>
+          <a:p>
+            <a:r>
+              <a:t>An instruction a model can ignore becomes a rule it cannot, once it moves into code. Both fixes are the same move, and it is the same lesson as pinning minItems/maxItems in the dedup schema. It is the single most transferable idea in the build.</a:t>
+            </a:r>
+          </a:p>
+          <a:p>
+            <a:r>
+              <a:t>Still broken, if asked. Two of the five still get answered. "What sentence did the court impose on Jeffrey Epstein?" produces two different sentences from two strategies, so at least one is invented — and the phrase it quotes appears nowhere in the corpus. "What did Prince Andrew say in his deposition?" describes what he did not say in a deposition that never happened. The documents hold a great deal about both subjects, which is why per-passage judging says yes. That is answer relevance, a different problem from absence.</a:t>
             </a:r>
           </a:p>
         </p:txBody>
@@ -5872,7 +5877,7 @@
                 </a:solidFill>
                 <a:latin typeface="Helvetica Neue"/>
               </a:rPr>
-              <a:t>•  Decide first, then write. Built and measured: the system now declines to answer when it should, 4–5 times out of 5, up from 0.</a:t>
+              <a:t>•  Decide first, then write. Built and measured: it now declines when it should in 11 of 15 runs, up from 0, with no wrong refusals in 105.</a:t>
             </a:r>
           </a:p>
           <a:p>
@@ -7266,7 +7271,7 @@
                 </a:solidFill>
                 <a:latin typeface="Georgia"/>
               </a:rPr>
-              <a:t>Saying "I don't know": decide first, then write</a:t>
+              <a:t>Saying "I don't know" — two bugs, pulling opposite ways</a:t>
             </a:r>
           </a:p>
         </p:txBody>
@@ -7324,7 +7329,7 @@
         <p:spPr>
           <a:xfrm>
             <a:off x="566928" y="1600200"/>
-            <a:ext cx="11057839" cy="3144011"/>
+            <a:ext cx="11057839" cy="4786883"/>
           </a:xfrm>
           <a:prstGeom prst="rect">
             <a:avLst/>
@@ -7342,6 +7347,25 @@
                 <a:spcPts val="0"/>
               </a:spcBef>
               <a:spcAft>
+                <a:spcPts val="400"/>
+              </a:spcAft>
+            </a:pPr>
+            <a:r>
+              <a:rPr sz="1400" b="0" i="0">
+                <a:solidFill>
+                  <a:srgbClr val="4A5158"/>
+                </a:solidFill>
+                <a:latin typeface="Helvetica Neue"/>
+              </a:rPr>
+              <a:t>Fixing the first one caused the second. Only measurement found it.</a:t>
+            </a:r>
+          </a:p>
+          <a:p>
+            <a:pPr>
+              <a:spcBef>
+                <a:spcPts val="1200"/>
+              </a:spcBef>
+              <a:spcAft>
                 <a:spcPts val="200"/>
               </a:spcAft>
             </a:pPr>
@@ -7352,7 +7376,7 @@
                 </a:solidFill>
                 <a:latin typeface="Helvetica Neue"/>
               </a:rPr>
-              <a:t>WHY FOUR PROMPT FIXES FAILED</a:t>
+              <a:t>FIRST: IT ANSWERED EVERYTHING</a:t>
             </a:r>
           </a:p>
           <a:p>
@@ -7371,7 +7395,45 @@
                 </a:solidFill>
                 <a:latin typeface="Helvetica Neue"/>
               </a:rPr>
-              <a:t>The prompt already forbade guessing. The cause was structural: one model, in one pass, was both judging whether it had enough evidence and writing the answer. Producing something is the easier path.</a:t>
+              <a:t>Asked something the documents could not answer, it described what they did contain and offered that as the answer. Four prompt rewrites failed — the prompt already forbade it.</a:t>
+            </a:r>
+          </a:p>
+          <a:p>
+            <a:pPr>
+              <a:spcBef>
+                <a:spcPts val="700"/>
+              </a:spcBef>
+              <a:spcAft>
+                <a:spcPts val="400"/>
+              </a:spcAft>
+            </a:pPr>
+            <a:r>
+              <a:rPr sz="1200" b="0" i="0">
+                <a:solidFill>
+                  <a:srgbClr val="14171B"/>
+                </a:solidFill>
+                <a:latin typeface="Helvetica Neue"/>
+              </a:rPr>
+              <a:t>The cause was structural: one model, in one pass, both decided whether it had enough evidence and wrote the answer. Writing something is the easier path.</a:t>
+            </a:r>
+          </a:p>
+          <a:p>
+            <a:pPr>
+              <a:spcBef>
+                <a:spcPts val="200"/>
+              </a:spcBef>
+              <a:spcAft>
+                <a:spcPts val="600"/>
+              </a:spcAft>
+            </a:pPr>
+            <a:r>
+              <a:rPr sz="1100" b="0" i="0">
+                <a:solidFill>
+                  <a:srgbClr val="1E3A5F"/>
+                </a:solidFill>
+                <a:latin typeface="Helvetica Neue"/>
+              </a:rPr>
+              <a:t>→  Fixed — split the two. Step 1 decides, and its reply format has no field big enough to hold prose. Step 2 writes, and runs only if step 1 said yes.</a:t>
             </a:r>
           </a:p>
           <a:p>
@@ -7390,7 +7452,7 @@
                 </a:solidFill>
                 <a:latin typeface="Helvetica Neue"/>
               </a:rPr>
-              <a:t>THE FIX</a:t>
+              <a:t>THEN: IT REFUSED THINGS IT COULD ANSWER</a:t>
             </a:r>
           </a:p>
           <a:p>
@@ -7409,7 +7471,7 @@
                 </a:solidFill>
                 <a:latin typeface="Helvetica Neue"/>
               </a:rPr>
-              <a:t>Step 1 judges, and its answer format has no field long enough to hold prose. Step 2 writes, and only if step 1 said yes.</a:t>
+              <a:t>"Who were the defense attorneys in this case?" was declined. The answer was sitting in the top result: "MS. BORJA: Mary Borja for Defendant, Alan Dershowitz."</a:t>
             </a:r>
           </a:p>
           <a:p>
@@ -7428,13 +7490,32 @@
                 </a:solidFill>
                 <a:latin typeface="Helvetica Neue"/>
               </a:rPr>
-              <a:t>When step 1 still claimed it had enough evidence while marking every source irrelevant, that rule moved out of the prompt and into code.</a:t>
-            </a:r>
-          </a:p>
-          <a:p>
-            <a:pPr>
-              <a:spcBef>
+              <a:t>Step 1 read all eight passages in one call and gave a yes/no for each. That looks independent. It is not — remove one unrelated passage and the verdict on the top result flipped to yes. Swap in a different one and it flipped back.</a:t>
+            </a:r>
+          </a:p>
+          <a:p>
+            <a:pPr>
+              <a:spcBef>
+                <a:spcPts val="200"/>
+              </a:spcBef>
+              <a:spcAft>
                 <a:spcPts val="600"/>
+              </a:spcAft>
+            </a:pPr>
+            <a:r>
+              <a:rPr sz="1100" b="0" i="0">
+                <a:solidFill>
+                  <a:srgbClr val="1E3A5F"/>
+                </a:solidFill>
+                <a:latin typeface="Helvetica Neue"/>
+              </a:rPr>
+              <a:t>→  Fixed — one passage per call, each call seeing exactly one passage. The set stops being a variable.</a:t>
+            </a:r>
+          </a:p>
+          <a:p>
+            <a:pPr>
+              <a:spcBef>
+                <a:spcPts val="600"/>
               </a:spcBef>
               <a:spcAft>
                 <a:spcPts val="200"/>
@@ -7447,7 +7528,7 @@
                 </a:solidFill>
                 <a:latin typeface="Georgia"/>
               </a:rPr>
-              <a:t>0 / 5   </a:t>
+              <a:t>0 / 15   </a:t>
             </a:r>
             <a:r>
               <a:rPr sz="1000" b="0" i="0">
@@ -7456,7 +7537,7 @@
                 </a:solidFill>
                 <a:latin typeface="Helvetica Neue"/>
               </a:rPr>
-              <a:t>BEFORE</a:t>
+              <a:t>REFUSED BEFORE</a:t>
             </a:r>
           </a:p>
           <a:p>
@@ -7475,7 +7556,7 @@
                 </a:solidFill>
                 <a:latin typeface="Georgia"/>
               </a:rPr>
-              <a:t>4–5 / 5   </a:t>
+              <a:t>11 / 15   </a:t>
             </a:r>
             <a:r>
               <a:rPr sz="1000" b="0" i="0">
@@ -7484,7 +7565,7 @@
                 </a:solidFill>
                 <a:latin typeface="Helvetica Neue"/>
               </a:rPr>
-              <a:t>AFTER</a:t>
+              <a:t>REFUSED AFTER</a:t>
             </a:r>
           </a:p>
           <a:p>
@@ -7499,11 +7580,11 @@
             <a:r>
               <a:rPr sz="2000" b="1" i="0">
                 <a:solidFill>
-                  <a:srgbClr val="A6382C"/>
+                  <a:srgbClr val="1E3A5F"/>
                 </a:solidFill>
                 <a:latin typeface="Georgia"/>
               </a:rPr>
-              <a:t>68.7s   </a:t>
+              <a:t>0   </a:t>
             </a:r>
             <a:r>
               <a:rPr sz="1000" b="0" i="0">
@@ -7512,7 +7593,7 @@
                 </a:solidFill>
                 <a:latin typeface="Helvetica Neue"/>
               </a:rPr>
-              <a:t>WAS A BLANK SCREEN</a:t>
+              <a:t>WRONG REFUSALS IN 105 RUNS</a:t>
             </a:r>
           </a:p>
           <a:p>
@@ -7531,7 +7612,7 @@
                 </a:solidFill>
                 <a:latin typeface="Georgia"/>
               </a:rPr>
-              <a:t>63ms   </a:t>
+              <a:t>49s   </a:t>
             </a:r>
             <a:r>
               <a:rPr sz="1000" b="0" i="0">
@@ -7540,7 +7621,7 @@
                 </a:solidFill>
                 <a:latin typeface="Helvetica Neue"/>
               </a:rPr>
-              <a:t>NOW TO FIRST RESULT</a:t>
+              <a:t>DOWN FROM 63S</a:t>
             </a:r>
           </a:p>
         </p:txBody>

--- a/presos/Graph_RAG_Interview_Deck.pptx
+++ b/presos/Graph_RAG_Interview_Deck.pptx
@@ -19,8 +19,6 @@
     <p:sldId id="267" r:id="rId19"/>
     <p:sldId id="268" r:id="rId20"/>
     <p:sldId id="269" r:id="rId21"/>
-    <p:sldId id="270" r:id="rId22"/>
-    <p:sldId id="271" r:id="rId23"/>
   </p:sldIdLst>
   <p:sldSz cx="12191695" cy="6858000" type="screen4x3"/>
   <p:notesSz cx="6858000" cy="9144000"/>
@@ -597,17 +595,37 @@
           <a:lstStyle/>
           <a:p>
             <a:r>
-              <a:t>On the subset rule: Palm Beach PD ⊂ Royal Palm Beach PD is two municipalities, and New Mexico ⊂ Santa Fe, New Mexico is a state and a city. For persons the extra token elaborates; for places it discriminates. Telling those apart needs to know that "Royal" makes a different town while "Jeffrey" does not make a different person — world knowledge a token rule does not have.</a:t>
-            </a:r>
-          </a:p>
-          <a:p>
-            <a:r>
-              <a:t>On co-mention: Step 4 already measured this. The embedding channel kept nominating Ghislaine Maxwell as a dedup candidate for Jeffrey Epstein purely because they co-occur constantly. A two-hop traversal over that relation would pull in a large fraction of the graph.</a:t>
-            </a:r>
-          </a:p>
-          <a:p>
-            <a:r>
-              <a:t>The last point is the one to dwell on if the panel is legal- or compliance-minded. The asymmetry between a false merge and a missed merge is not a tuning preference — it is a statement about who gets harmed when the system is wrong.</a:t>
+              <a:t>1. SOUTHERN DISTRICT OF NEW YORK scored 0.517 against its own title case, nowhere near the 0.85 threshold. Combined with capping an unsorted candidate list, true matches were crowded out by weaker partial ones. It failed in the safe direction — missed merges, never false ones — but fragmented the graph badly. A 200-chunk test could not surface it, because the defect only appears at entity density.</a:t>
+            </a:r>
+          </a:p>
+          <a:p>
+            <a:r>
+              <a:t>2. The flag table held both "Ms. Maxwell" ↔ "Maxwell" and "baron Robert Maxwell" ↔ "Maxwell" — identical surface shape, opposite correct answers. The fix was to change the question from pairs to partitions: judge a whole name family at once, using mention counts, document spread and roles.</a:t>
+            </a:r>
+          </a:p>
+          <a:p>
+            <a:r>
+              <a:t>3. Found by reading prompt_eval_count and noticing it was suspiciously round — exactly 4096 on every call. A real token count is never a round power of two. Confirmed by re-running the identical prompt with a larger context, which reported the true 4,235. Nothing in any log said a word.</a:t>
+            </a:r>
+          </a:p>
+          <a:p>
+            <a:r>
+              <a:t>The direction of the cut is the part worth telling. I first assumed the tail of the last passage was lost, then tested it: a prompt with markers at both ends, run at 4096, came back seeing only the last marker. Ollama truncates from the front and does not protect the system message. So the tokens dropped were not evidence — they were the opening of the instructions, the part that says to use only the supplied sources. The system prompt on the path that produced every eval row measures 322 tokens, so a 139-token overrun removes roughly its first 40%.</a:t>
+            </a:r>
+          </a:p>
+          <a:p>
+            <a:r>
+              <a:t>4. Roughly 3B parameters are active per token in a 30B-A3B model. It is a 30B download, not 30B of thinking. I also tested a prompt amendment that made both models worse, and abandoned it rather than iterating.</a:t>
+            </a:r>
+          </a:p>
+          <a:p>
+            <a:r>
+              <a:t>On the human in the middle — worth saying out loud, because a panel looking at an AI-assisted project will be wondering. Not one of these four defects was raised by the model. Each surfaced because I was reading real output: a prompt_eval_count that was suspiciously round, a merged name I recognised as two different people, an entity count that did not match what I knew about the corpus. An LLM is a fast, tireless implementer that will build the wrong thing with complete confidence. Deciding what to build, what to measure, and when to distrust a passing result stayed on my side of the loop — and that is the part of the skill set this project actually grew.</a:t>
+            </a:r>
+          </a:p>
+          <a:p>
+            <a:r>
+              <a:t>If the panel only remembers one thing from this slide, it should be the method: measure real output at real scale, because every one of these was invisible in a small test.</a:t>
             </a:r>
           </a:p>
         </p:txBody>
@@ -677,22 +695,22 @@
           <a:lstStyle/>
           <a:p>
             <a:r>
-              <a:t>Lead with the LanceDB line out loud. It is short, it sounds like a decision rather than a wish list, and it demonstrates product knowledge — it says I know what 3.12 shipped and I would restructure my own work around it.</a:t>
-            </a:r>
-          </a:p>
-          <a:p>
-            <a:r>
-              <a:t>On the human loop: identity decisions and answer correctness are judgment calls in a legal corpus. The design should route them to a person rather than pretend the model settles them. That is a position, not a shortfall — and it is what "human intervention where warranted" actually means in practice.</a:t>
-            </a:r>
-          </a:p>
-          <a:p>
-            <a:r>
-              <a:t>On re-ingest: this is the question I would ask a candidate, so I would rather raise it than be caught by it. The cost scales with mentions because every mention runs a candidate search and possibly an LLM judgment. Batch re-resolution per partition is the direction I would explore, but I have not built it.</a:t>
-            </a:r>
-          </a:p>
-          <a:p>
-            <a:r>
-              <a:t>If asked about their Importer's own answer here: their pipeline has no documented resolution or deduplication stage at all — the only entity-merging prompt combines descriptions of entities already treated as identical. Worth raising as a question rather than a criticism, and better framed on their turf: how does the Importer handle k8s versus Kubernetes?</a:t>
+              <a:t>If asked why rank fusion rather than combining the scores — the four channels return numbers that are not comparable. Vector gives a similarity of 0.42. Lexical gives a keyword score of 14.7, unbounded, and it shifts with query length. Density gives a raw count, like nine chunks. Graph gives a hop distance. To fuse by score you would first have to put all four on one scale, then decide how much each one counts: final = 0.5·vector + 0.2·lexical + 0.2·density + 0.1·graph. Those four numbers are the invention. There is no principled source for them here, because fitting weights honestly needs labelled data — a set of questions with known-correct passages to optimise against. This project deliberately has none. So in practice they would be guessed, then nudged while watching five or six questions, which is tuning to those five or six questions rather than to the problem. Rank fusion sidesteps it.</a:t>
+            </a:r>
+          </a:p>
+          <a:p>
+            <a:r>
+              <a:t>Every channel searches the whole corpus. This is deliberately not retrieve-then-rerank: a reranker can only reorder what stage one returned, so anything ranked badly first is unrecoverable. The obiter case proves the point — those chunks sit at #329–#2970 by cosine, so a bi-encoder-then-rerank design would never surface them.</a:t>
+            </a:r>
+          </a:p>
+          <a:p>
+            <a:r>
+              <a:t>On reserved slots: the first version fused all channels equally. It fixed the obiter question and simultaneously broke "who is Alfredo Rodriguez" — the deposition that answers it, #3 by plain cosine, fell out of the top 8 entirely because density ranks that document #12 and outvoted the channel that was right. Equal-weight fusion is only sound when channels are independent, and these are inversely correlated by construction.</a:t>
+            </a:r>
+          </a:p>
+          <a:p>
+            <a:r>
+              <a:t>The graph channel abstains rather than falling back when a question anchors on nothing. Falling back would feed the vector ranking into RRF a second time under a different name — doubling vector's weight on exactly the questions where graph contributes nothing.</a:t>
             </a:r>
           </a:p>
         </p:txBody>
@@ -762,37 +780,32 @@
           <a:lstStyle/>
           <a:p>
             <a:r>
-              <a:t>1. SOUTHERN DISTRICT OF NEW YORK scored 0.517 against its own title case, nowhere near the 0.85 threshold. Combined with capping an unsorted candidate list, true matches were crowded out by weaker partial ones. It failed in the safe direction — missed merges, never false ones — but fragmented the graph badly. A 200-chunk test could not surface it, because the defect only appears at entity density.</a:t>
-            </a:r>
-          </a:p>
-          <a:p>
-            <a:r>
-              <a:t>2. The flag table held both "Ms. Maxwell" ↔ "Maxwell" and "baron Robert Maxwell" ↔ "Maxwell" — identical surface shape, opposite correct answers. The fix was to change the question from pairs to partitions: judge a whole name family at once, using mention counts, document spread and roles.</a:t>
-            </a:r>
-          </a:p>
-          <a:p>
-            <a:r>
-              <a:t>3. Found by reading prompt_eval_count and noticing it was suspiciously round — exactly 4096 on every call. A real token count is never a round power of two. Confirmed by re-running the identical prompt with a larger context, which reported the true 4,235. Nothing in any log said a word.</a:t>
-            </a:r>
-          </a:p>
-          <a:p>
-            <a:r>
-              <a:t>The direction of the cut is the part worth telling. I first assumed the tail of the last passage was lost, then tested it: a prompt with markers at both ends, run at 4096, came back seeing only the last marker. Ollama truncates from the front and does not protect the system message. So the tokens dropped were not evidence — they were the opening of the instructions, the part that says to use only the supplied sources. The system prompt on the path that produced every eval row measures 322 tokens, so a 139-token overrun removes roughly its first 40%.</a:t>
-            </a:r>
-          </a:p>
-          <a:p>
-            <a:r>
-              <a:t>4. Roughly 3B parameters are active per token in a 30B-A3B model. It is a 30B download, not 30B of thinking. I also tested a prompt amendment that made both models worse, and abandoned it rather than iterating.</a:t>
-            </a:r>
-          </a:p>
-          <a:p>
-            <a:r>
-              <a:t>On the human in the middle — worth saying out loud, because a panel looking at an AI-assisted project will be wondering. Not one of these four defects was raised by the model. Each surfaced because I was reading real output: a prompt_eval_count that was suspiciously round, a merged name I recognised as two different people, an entity count that did not match what I knew about the corpus. An LLM is a fast, tireless implementer that will build the wrong thing with complete confidence. Deciding what to build, what to measure, and when to distrust a passing result stayed on my side of the loop — and that is the part of the skill set this project actually grew.</a:t>
-            </a:r>
-          </a:p>
-          <a:p>
-            <a:r>
-              <a:t>If the panel only remembers one thing from this slide, it should be the method: measure real output at real scale, because every one of these was invisible in a small test.</a:t>
+              <a:t>The numbers. Five questions the documents cannot answer, run through all three strategies — fifteen runs. Before the split, it answered all fifteen. After both fixes, it declines eleven. And every single refusal across the full 105-run set was checked by hand against the corpus: none of them was wrong.</a:t>
+            </a:r>
+          </a:p>
+          <a:p>
+            <a:r>
+              <a:t>What the old version was really doing. Asked which judge signed the January 2024 order, it wrote about adverse inference instructions. Asked what the errata sheet said, it wrote about a passport stamp. Both times: confident, fluent, all eight sources cited, and about a different question. The citation counts in the old results measured nothing at all.</a:t>
+            </a:r>
+          </a:p>
+          <a:p>
+            <a:r>
+              <a:t>Why the second bug is the interesting one. My first instinct was that the past tense broke it — "who were" failed, "who are" worked. That was wrong. Holding the retrieved passages fixed, both wordings give the same verdict; changing the wording only moved the query embedding, which swapped three of the eight passages. The tense was never the cause. Blaming the user's phrasing would have shipped the bug.</a:t>
+            </a:r>
+          </a:p>
+          <a:p>
+            <a:r>
+              <a:t>Cost. Eight small calls instead of one large one. It came out faster — the same passages are read either way, but each call now writes a handful of tokens instead of a paragraph.</a:t>
+            </a:r>
+          </a:p>
+          <a:p>
+            <a:r>
+              <a:t>An instruction a model can ignore becomes a rule it cannot, once it moves into code. Both fixes are the same move, and it is the same lesson as pinning minItems/maxItems in the dedup schema. It is the single most transferable idea in the build.</a:t>
+            </a:r>
+          </a:p>
+          <a:p>
+            <a:r>
+              <a:t>Still broken, if asked. Two of the five still get answered. "What sentence did the court impose on Jeffrey Epstein?" produces two different sentences from two strategies, so at least one is invented — and the phrase it quotes appears nowhere in the corpus. "What did Prince Andrew say in his deposition?" describes what he did not say in a deposition that never happened. The documents hold a great deal about both subjects, which is why per-passage judging says yes. That is answer relevance, a different problem from absence.</a:t>
             </a:r>
           </a:p>
         </p:txBody>
@@ -862,22 +875,17 @@
           <a:lstStyle/>
           <a:p>
             <a:r>
-              <a:t>If asked why rank fusion rather than combining the scores — the four channels return numbers that are not comparable. Vector gives a similarity of 0.42. Lexical gives a keyword score of 14.7, unbounded, and it shifts with query length. Density gives a raw count, like nine chunks. Graph gives a hop distance. To fuse by score you would first have to put all four on one scale, then decide how much each one counts: final = 0.5·vector + 0.2·lexical + 0.2·density + 0.1·graph. Those four numbers are the invention. There is no principled source for them here, because fitting weights honestly needs labelled data — a set of questions with known-correct passages to optimise against. This project deliberately has none. So in practice they would be guessed, then nudged while watching five or six questions, which is tuning to those five or six questions rather than to the problem. Rank fusion sidesteps it.</a:t>
-            </a:r>
-          </a:p>
-          <a:p>
-            <a:r>
-              <a:t>Every channel searches the whole corpus. This is deliberately not retrieve-then-rerank: a reranker can only reorder what stage one returned, so anything ranked badly first is unrecoverable. The obiter case proves the point — those chunks sit at #329–#2970 by cosine, so a bi-encoder-then-rerank design would never surface them.</a:t>
-            </a:r>
-          </a:p>
-          <a:p>
-            <a:r>
-              <a:t>On reserved slots: the first version fused all channels equally. It fixed the obiter question and simultaneously broke "who is Alfredo Rodriguez" — the deposition that answers it, #3 by plain cosine, fell out of the top 8 entirely because density ranks that document #12 and outvoted the channel that was right. Equal-weight fusion is only sound when channels are independent, and these are inversely correlated by construction.</a:t>
-            </a:r>
-          </a:p>
-          <a:p>
-            <a:r>
-              <a:t>The graph channel abstains rather than falling back when a question anchors on nothing. Falling back would feed the vector ranking into RRF a second time under a different name — doubling vector's weight on exactly the questions where graph contributes nothing.</a:t>
+              <a:t>Pre-registration is the methodological point worth making. Several of my predictions were wrong — I expected graph to dominate the counting stratum and it fell back on four of five. Being wrong about a frozen hypothesis is a result; being right about a hypothesis formed afterwards is a story.</a:t>
+            </a:r>
+          </a:p>
+          <a:p>
+            <a:r>
+              <a:t>The 35 gold answers are standing human work, not an automation gap waiting on a better model. In a legal setting that is the right shape: the machine narrows 3,338 passages to eight and shows its working; a person decides whether the answer is right.</a:t>
+            </a:r>
+          </a:p>
+          <a:p>
+            <a:r>
+              <a:t>The cheap next step is an answer-in-context rate: for extractive questions, check whether the expected answer string appears in the retrieved text. One label per question instead of thousands, and it splits the error — string present but answer wrong is a generation bug, string absent is a retrieval bug.</a:t>
             </a:r>
           </a:p>
         </p:txBody>
@@ -947,181 +955,6 @@
           <a:lstStyle/>
           <a:p>
             <a:r>
-              <a:t>The numbers. Five questions the documents cannot answer, run through all three strategies — fifteen runs. Before the split, it answered all fifteen. After both fixes, it declines eleven. And every single refusal across the full 105-run set was checked by hand against the corpus: none of them was wrong.</a:t>
-            </a:r>
-          </a:p>
-          <a:p>
-            <a:r>
-              <a:t>What the old version was really doing. Asked which judge signed the January 2024 order, it wrote about adverse inference instructions. Asked what the errata sheet said, it wrote about a passport stamp. Both times: confident, fluent, all eight sources cited, and about a different question. The citation counts in the old results measured nothing at all.</a:t>
-            </a:r>
-          </a:p>
-          <a:p>
-            <a:r>
-              <a:t>Why the second bug is the interesting one. My first instinct was that the past tense broke it — "who were" failed, "who are" worked. That was wrong. Holding the retrieved passages fixed, both wordings give the same verdict; changing the wording only moved the query embedding, which swapped three of the eight passages. The tense was never the cause. Blaming the user's phrasing would have shipped the bug.</a:t>
-            </a:r>
-          </a:p>
-          <a:p>
-            <a:r>
-              <a:t>Cost. Eight small calls instead of one large one. It came out faster — the same passages are read either way, but each call now writes a handful of tokens instead of a paragraph.</a:t>
-            </a:r>
-          </a:p>
-          <a:p>
-            <a:r>
-              <a:t>An instruction a model can ignore becomes a rule it cannot, once it moves into code. Both fixes are the same move, and it is the same lesson as pinning minItems/maxItems in the dedup schema. It is the single most transferable idea in the build.</a:t>
-            </a:r>
-          </a:p>
-          <a:p>
-            <a:r>
-              <a:t>Still broken, if asked. Two of the five still get answered. "What sentence did the court impose on Jeffrey Epstein?" produces two different sentences from two strategies, so at least one is invented — and the phrase it quotes appears nowhere in the corpus. "What did Prince Andrew say in his deposition?" describes what he did not say in a deposition that never happened. The documents hold a great deal about both subjects, which is why per-passage judging says yes. That is answer relevance, a different problem from absence.</a:t>
-            </a:r>
-          </a:p>
-        </p:txBody>
-      </p:sp>
-      <p:sp>
-        <p:nvSpPr>
-          <p:cNvPr id="4" name="Slide Number Placeholder 3"/>
-          <p:cNvSpPr>
-            <a:spLocks noGrp="1"/>
-          </p:cNvSpPr>
-          <p:nvPr>
-            <p:ph type="sldNum" idx="5" sz="quarter"/>
-          </p:nvPr>
-        </p:nvSpPr>
-        <p:spPr/>
-      </p:sp>
-    </p:spTree>
-  </p:cSld>
-  <p:clrMapOvr>
-    <a:masterClrMapping/>
-  </p:clrMapOvr>
-</p:notes>
-</file>
-
-<file path=ppt/notesSlides/notesSlide15.xml><?xml version="1.0" encoding="utf-8"?>
-<p:notes xmlns:a="http://schemas.openxmlformats.org/drawingml/2006/main" xmlns:p="http://schemas.openxmlformats.org/presentationml/2006/main" xmlns:r="http://schemas.openxmlformats.org/officeDocument/2006/relationships">
-  <p:cSld>
-    <p:spTree>
-      <p:nvGrpSpPr>
-        <p:cNvPr id="1" name=""/>
-        <p:cNvGrpSpPr/>
-        <p:nvPr/>
-      </p:nvGrpSpPr>
-      <p:grpSpPr>
-        <a:xfrm>
-          <a:off x="0" y="0"/>
-          <a:ext cx="0" cy="0"/>
-          <a:chOff x="0" y="0"/>
-          <a:chExt cx="0" cy="0"/>
-        </a:xfrm>
-      </p:grpSpPr>
-      <p:sp>
-        <p:nvSpPr>
-          <p:cNvPr id="2" name="Slide Image Placeholder 1"/>
-          <p:cNvSpPr>
-            <a:spLocks noGrp="1"/>
-          </p:cNvSpPr>
-          <p:nvPr>
-            <p:ph type="sldImg" idx="2"/>
-          </p:nvPr>
-        </p:nvSpPr>
-        <p:spPr/>
-      </p:sp>
-      <p:sp>
-        <p:nvSpPr>
-          <p:cNvPr id="3" name="Notes Placeholder 2"/>
-          <p:cNvSpPr>
-            <a:spLocks noGrp="1"/>
-          </p:cNvSpPr>
-          <p:nvPr>
-            <p:ph type="body" idx="3" sz="quarter"/>
-          </p:nvPr>
-        </p:nvSpPr>
-        <p:spPr/>
-        <p:txBody>
-          <a:bodyPr/>
-          <a:lstStyle/>
-          <a:p>
-            <a:r>
-              <a:t>Pre-registration is the methodological point worth making. Several of my predictions were wrong — I expected graph to dominate the counting stratum and it fell back on four of five. Being wrong about a frozen hypothesis is a result; being right about a hypothesis formed afterwards is a story.</a:t>
-            </a:r>
-          </a:p>
-          <a:p>
-            <a:r>
-              <a:t>The 35 gold answers are standing human work, not an automation gap waiting on a better model. In a legal setting that is the right shape: the machine narrows 3,338 passages to eight and shows its working; a person decides whether the answer is right.</a:t>
-            </a:r>
-          </a:p>
-          <a:p>
-            <a:r>
-              <a:t>The cheap next step is an answer-in-context rate: for extractive questions, check whether the expected answer string appears in the retrieved text. One label per question instead of thousands, and it splits the error — string present but answer wrong is a generation bug, string absent is a retrieval bug.</a:t>
-            </a:r>
-          </a:p>
-        </p:txBody>
-      </p:sp>
-      <p:sp>
-        <p:nvSpPr>
-          <p:cNvPr id="4" name="Slide Number Placeholder 3"/>
-          <p:cNvSpPr>
-            <a:spLocks noGrp="1"/>
-          </p:cNvSpPr>
-          <p:nvPr>
-            <p:ph type="sldNum" idx="5" sz="quarter"/>
-          </p:nvPr>
-        </p:nvSpPr>
-        <p:spPr/>
-      </p:sp>
-    </p:spTree>
-  </p:cSld>
-  <p:clrMapOvr>
-    <a:masterClrMapping/>
-  </p:clrMapOvr>
-</p:notes>
-</file>
-
-<file path=ppt/notesSlides/notesSlide16.xml><?xml version="1.0" encoding="utf-8"?>
-<p:notes xmlns:a="http://schemas.openxmlformats.org/drawingml/2006/main" xmlns:p="http://schemas.openxmlformats.org/presentationml/2006/main" xmlns:r="http://schemas.openxmlformats.org/officeDocument/2006/relationships">
-  <p:cSld>
-    <p:spTree>
-      <p:nvGrpSpPr>
-        <p:cNvPr id="1" name=""/>
-        <p:cNvGrpSpPr/>
-        <p:nvPr/>
-      </p:nvGrpSpPr>
-      <p:grpSpPr>
-        <a:xfrm>
-          <a:off x="0" y="0"/>
-          <a:ext cx="0" cy="0"/>
-          <a:chOff x="0" y="0"/>
-          <a:chExt cx="0" cy="0"/>
-        </a:xfrm>
-      </p:grpSpPr>
-      <p:sp>
-        <p:nvSpPr>
-          <p:cNvPr id="2" name="Slide Image Placeholder 1"/>
-          <p:cNvSpPr>
-            <a:spLocks noGrp="1"/>
-          </p:cNvSpPr>
-          <p:nvPr>
-            <p:ph type="sldImg" idx="2"/>
-          </p:nvPr>
-        </p:nvSpPr>
-        <p:spPr/>
-      </p:sp>
-      <p:sp>
-        <p:nvSpPr>
-          <p:cNvPr id="3" name="Notes Placeholder 2"/>
-          <p:cNvSpPr>
-            <a:spLocks noGrp="1"/>
-          </p:cNvSpPr>
-          <p:nvPr>
-            <p:ph type="body" idx="3" sz="quarter"/>
-          </p:nvPr>
-        </p:nvSpPr>
-        <p:spPr/>
-        <p:txBody>
-          <a:bodyPr/>
-          <a:lstStyle/>
-          <a:p>
-            <a:r>
               <a:t>Distinguishing "Royal makes a different town" from "Jeffrey does not make a different person" is world knowledge a token rule does not have. The likely fix is a type-aware rule plus an LLM judgment for the place cases, which is the same two-layer pattern used everywhere else in this build.</a:t>
             </a:r>
           </a:p>
@@ -1282,22 +1115,22 @@
           <a:lstStyle/>
           <a:p>
             <a:r>
-              <a:t>The tell is in the defaults. enable_community_embeddings defaults to true while chunk and edge embeddings default to false. The community layer is the primary retrieval surface, not an add-on. That single fact demonstrates you have read the parameter reference rather than the landing page.</a:t>
-            </a:r>
-          </a:p>
-          <a:p>
-            <a:r>
-              <a:t>Relations become edges of three kinds — entity–entity, entity–chunk, chunk–document — which is what makes both entity-anchored and document-anchored retrieval possible from one graph.</a:t>
-            </a:r>
-          </a:p>
-          <a:p>
-            <a:r>
-              <a:t>On LLM hosting: Triton for self-hosted, or any OpenAI-compatible endpoint. My own build used local Ollama for exactly the reason their Triton path exists — the corpus could not go to a third-party API.</a:t>
-            </a:r>
-          </a:p>
-          <a:p>
-            <a:r>
-              <a:t>Source: GraphRAG Technical Overview and Import Parameter Reference, read first-hand 2026-08-26.</a:t>
+              <a:t>Say the two service names once and then stop using them. The panel will hear "Importer" and "Retriever" all day from their own people; what they want to know is whether a stranger can explain the split cleanly, and whether the split is the sensible one. It is — rebuilding a graph is slow and occasional, answering is fast and constant, and those two things should never share a deployment.</a:t>
+            </a:r>
+          </a:p>
+          <a:p>
+            <a:r>
+              <a:t>The four build steps are the same first move I made. Steps one and two are mine almost exactly. Steps three and four — clustering into topics and summarising each — are the part I do not have, and that is deliberate on their side, not an extra. Slide 06 is where that matters.</a:t>
+            </a:r>
+          </a:p>
+          <a:p>
+            <a:r>
+              <a:t>On "runs where the data lives": their self-hosted path uses Triton. Mine used Ollama on a laptop. Architecturally that is the same decision — local inference for data that cannot leave — made with much cheaper machinery. Worth saying, because it shows I understand why the option exists rather than just that it exists.</a:t>
+            </a:r>
+          </a:p>
+          <a:p>
+            <a:r>
+              <a:t>If someone pushes on cost, the honest line is that consolidating three systems into one saves licence and staffing money, and I have not measured it. Do not quote their TCO figures as if they were mine.</a:t>
             </a:r>
           </a:p>
         </p:txBody>
@@ -1367,22 +1200,22 @@
           <a:lstStyle/>
           <a:p>
             <a:r>
-              <a:t>The web interface exposes Instant and Deep only. A prospect evaluating through the UI alone will never see Global or Local — worth flagging to them as a product observation, and it is the kind of thing a solutions architect notices.</a:t>
-            </a:r>
-          </a:p>
-          <a:p>
-            <a:r>
-              <a:t>Global Search works map-reduce style over the AI-generated community reports. Their own docs call it resource-intensive but say it "often gives good responses for questions that require an understanding of the dataset as a whole."</a:t>
-            </a:r>
-          </a:p>
-          <a:p>
-            <a:r>
-              <a:t>My 11 of 35 fallbacks concentrate in two strata: aggregation and completeness counting. This is the gap in my design and the feature that closes it — say that plainly rather than hiding it. It shows I can position their product against my own work honestly.</a:t>
-            </a:r>
-          </a:p>
-          <a:p>
-            <a:r>
-              <a:t>Deep Search is worth a second look too: Local plus an LLM planner is an agentic loop over the graph, a different answer to multi-hop than my single-pass traversal.</a:t>
+              <a:t>Only Instant and Deep are exposed in the web interface. Global, Local and Custom are API-only, which is a real detail worth knowing — a prospect evaluating from the UI alone will not see the capability that most differentiates the product.</a:t>
+            </a:r>
+          </a:p>
+          <a:p>
+            <a:r>
+              <a:t>My 11-of-35 fallback number is the strongest thing on this slide, because it is a measurement of my own shortfall that their architecture answers. Concentrated in two categories: counting questions and aggregation questions. Both name nothing, so both have no entry point.</a:t>
+            </a:r>
+          </a:p>
+          <a:p>
+            <a:r>
+              <a:t>Deep Search is worth a second look — it is Local Search with a model planning its own steps. That is an agentic loop over the graph, and a different answer to multi-step questions than my single-pass traversal.</a:t>
+            </a:r>
+          </a:p>
+          <a:p>
+            <a:r>
+              <a:t>If asked which I would sell first: Instant, because it demos in one screen and needs no explanation. Global is the one that wins the second meeting.</a:t>
             </a:r>
           </a:p>
         </p:txBody>
@@ -1612,17 +1445,32 @@
           <a:lstStyle/>
           <a:p>
             <a:r>
-              <a:t>Why it is the honest case for a graph: this corpus is close to the worst case for naive retrieval. In a legal context, missing evidence you were entitled to find is the failure that matters — not a slightly worse ranking.</a:t>
-            </a:r>
-          </a:p>
-          <a:p>
-            <a:r>
-              <a:t>Both directions have to work. Recall without precision fabricates connections between real people, which in this corpus is a serious harm rather than a metric. That asymmetry drove nearly every design decision downstream.</a:t>
-            </a:r>
-          </a:p>
-          <a:p>
-            <a:r>
-              <a:t>If asked why not a synthetic or public benchmark corpus: because the interesting failures only appear in real prose. Every defect worth showing on slide 11 was found by auditing real output.</a:t>
+              <a:t>This is the slide the whole talk is built around. Do not rush it. The argument is not that they got something wrong. It is that whether you need identity resolution depends on your documents rather than on the database, so leaving it to the user is a reasonable call.</a:t>
+            </a:r>
+          </a:p>
+          <a:p>
+            <a:r>
+              <a:t>Why their design is right for their market. Good technical writing declares a name and then repeats the exact token — the name is the identifier. One authorial voice, usually to a style guide. And the entities are mostly concepts and products, which have no honorifics, no initials, no maiden names. My corpus inverts all three: multi-author and adversarial, quoted speech nested inside transcripts nested inside exhibits, and people whose names vary by register on purpose.</a:t>
+            </a:r>
+          </a:p>
+          <a:p>
+            <a:r>
+              <a:t>One detail worth mentioning if the conversation goes technical. Their settings include a knob for catching entities the model missed. There is nothing that asks whether it counted the same one twice. That tells you what they were solving for, and it is worth raising as an observation rather than a gotcha.</a:t>
+            </a:r>
+          </a:p>
+          <a:p>
+            <a:r>
+              <a:t>Two honesty checks, and say them before anyone else does. First, "we do resolution, they don't" is too clean and it is not true of me either — I resolved people. The same rule ran backwards on places, wrote 11 wrong links out of 14 in a trial, and I stopped it and scoped the pass to people. Place and organisation resolution is still not done. Second, deduplication is invisible when it works; you cannot screenshot two nodes that were secretly one person. Topic summaries demo beautifully. Product surface follows what demos, and that is not cynicism, it is how roadmaps get built.</a:t>
+            </a:r>
+          </a:p>
+          <a:p>
+            <a:r>
+              <a:t>The counter-case, if someone asks why not just merge aggressively. Jane Doe, Jane Doe 2, Jane Doe 3 are near-identical to any name-matching algorithm and are three different people. A system that merges them is worse than one that merges nothing, because it invents a connection between real people.</a:t>
+            </a:r>
+          </a:p>
+          <a:p>
+            <a:r>
+              <a:t>Where to land it: they publish a sameAs pattern already. Running that over the entity collection after import is where this work would go. Offer it as a use case for their product, not as something they are missing.</a:t>
             </a:r>
           </a:p>
         </p:txBody>
@@ -1692,22 +1540,32 @@
           <a:lstStyle/>
           <a:p>
             <a:r>
-              <a:t>The two design decisions on this slide are the ones I would defend hardest, and both come from the same instinct: never destroy the record of how something was written.</a:t>
-            </a:r>
-          </a:p>
-          <a:p>
-            <a:r>
-              <a:t>Putting role, textual evidence and confidence on je_mentioned_in rather than on the entity means the same person mentioned 1,480 times carries 1,480 independent pieces of evidence. Merging two nodes cannot blur them.</a:t>
-            </a:r>
-          </a:p>
-          <a:p>
-            <a:r>
-              <a:t>je_same_as asserts identity without collapsing it. This matters in a legal setting: a reviewer can see every surface form, and an incorrect link is one edge deletion rather than an unrecoverable merge.</a:t>
-            </a:r>
-          </a:p>
-          <a:p>
-            <a:r>
-              <a:t>If asked about the type enum: it originally lacked location and facility, so places were forced into organization or court. That cost a full re-extraction to fix — 505 entities, a quarter of the graph, now sit in the two types that did not exist.</a:t>
+              <a:t>Runbook. Start the server, open ask.html, and have the ArangoDB web UI already on a second tab with the named graph created. Do not run an eval beforehand — Ollama serialises generation and a queued request takes 75 seconds instead of a few.</a:t>
+            </a:r>
+          </a:p>
+          <a:p>
+            <a:r>
+              <a:t>Move 1 — "Who is Alfredo Rodriguez and what was his role in relation to Jeffrey Epstein?" on the graph strategy. Retrieval renders in ~60ms. Point at the coreference families before the answer arrives; that panel is the most interesting thing on screen.</a:t>
+            </a:r>
+          </a:p>
+          <a:p>
+            <a:r>
+              <a:t>Move 2 — "What is the obiter dicta in this case?" Two things to name out loud: the amber fallback banner (graph could not anchor, so it degraded to vector search — and it says so rather than taking credit), and then the refusal. Abstention failed four times before it worked; this is the hardest thing the system does.</a:t>
+            </a:r>
+          </a:p>
+          <a:p>
+            <a:r>
+              <a:t>Move 3 — je_entities/1348883 for Recarey; je_entities/1285748 for Jane Doe 2. Set the viewer's label attribute to name or every node shows a numeric key. Never click "load full graph" — 2,014 vertices and 19,009 edges will crawl.</a:t>
+            </a:r>
+          </a:p>
+          <a:p>
+            <a:r>
+              <a:t>Move 4 — the family-reach query is the punchline: it quantifies what coreference bought, in chunks.</a:t>
+            </a:r>
+          </a:p>
+          <a:p>
+            <a:r>
+              <a:t>Timing: aim for six minutes on moves 1–2, four on 3–4, leaving room for interruptions. Expect them.</a:t>
             </a:r>
           </a:p>
         </p:txBody>
@@ -1777,32 +1635,27 @@
           <a:lstStyle/>
           <a:p>
             <a:r>
-              <a:t>Runbook. Start the server, open ask.html, and have the ArangoDB web UI already on a second tab with the named graph created. Do not run an eval beforehand — Ollama serialises generation and a queued request takes 75 seconds instead of a few.</a:t>
-            </a:r>
-          </a:p>
-          <a:p>
-            <a:r>
-              <a:t>Move 1 — "Who is Alfredo Rodriguez and what was his role in relation to Jeffrey Epstein?" on the graph strategy. Retrieval renders in ~60ms. Point at the coreference families before the answer arrives; that panel is the most interesting thing on screen.</a:t>
-            </a:r>
-          </a:p>
-          <a:p>
-            <a:r>
-              <a:t>Move 2 — "What is the obiter dicta in this case?" Two things to name out loud: the amber fallback banner (graph could not anchor, so it degraded to vector search — and it says so rather than taking credit), and then the refusal. Abstention failed four times before it worked; this is the hardest thing the system does.</a:t>
-            </a:r>
-          </a:p>
-          <a:p>
-            <a:r>
-              <a:t>Move 3 — je_entities/1348883 for Recarey; je_entities/1285748 for Jane Doe 2. Set the viewer's label attribute to name or every node shows a numeric key. Never click "load full graph" — 2,014 vertices and 19,009 edges will crawl.</a:t>
-            </a:r>
-          </a:p>
-          <a:p>
-            <a:r>
-              <a:t>Move 4 — the family-reach query is the punchline: it quantifies what coreference bought, in chunks.</a:t>
-            </a:r>
-          </a:p>
-          <a:p>
-            <a:r>
-              <a:t>Timing: aim for six minutes on moves 1–2, four on 3–4, leaving room for interruptions. Expect them.</a:t>
+              <a:t>Correction I owe this slide. An earlier version of this deck said "SmartGraphs with partition_id". There is no such parameter — the real mechanism is smartGraphAttribute, and partition_id was my own placeholder name for the field I would nominate. Worth stating plainly if anyone knows the product well, because inventing a parameter name is exactly the kind of thing that costs credibility.</a:t>
+            </a:r>
+          </a:p>
+          <a:p>
+            <a:r>
+              <a:t>Two stores was the quick choice and it shows. A few passages exist in the graph with no matching row in LanceDB. That is not a hypothetical consistency risk; it already happened.</a:t>
+            </a:r>
+          </a:p>
+          <a:p>
+            <a:r>
+              <a:t>What I deliberately did not build: person-to-person edges. This is an index of who appears where, not a map of how people relate. The only link I could honestly derive is "mentioned in the same passage", which in a 190-filing docket says almost nothing.</a:t>
+            </a:r>
+          </a:p>
+          <a:p>
+            <a:r>
+              <a:t>Also on the list, lower down: a review screen for the 413 flagged pairs, and a second slower model to re-order the final shortlist — a cross-encoder reranker. There is no reranker in the system today; what it has is rank fusion, which is a different thing, and B1 covers it if anyone asks.</a:t>
+            </a:r>
+          </a:p>
+          <a:p>
+            <a:r>
+              <a:t>On the shard_count question. Ask it as a question. If the answer is "yes, that is a pre-release limit and it is going away", I have learned something. If the answer is "no, here is how", I have learned more. Either way it beats asserting a limitation at them.</a:t>
             </a:r>
           </a:p>
         </p:txBody>
@@ -5260,11 +5113,11 @@
             <a:r>
               <a:rPr sz="900" b="0" i="0">
                 <a:solidFill>
-                  <a:srgbClr val="1E3A5F"/>
+                  <a:srgbClr val="A6382C"/>
                 </a:solidFill>
                 <a:latin typeface="Menlo"/>
               </a:rPr>
-              <a:t>THE SOLUTION · TRADEOFFS</a:t>
+              <a:t>THE SOLUTION · CANDOUR</a:t>
             </a:r>
           </a:p>
         </p:txBody>
@@ -5306,7 +5159,7 @@
                 </a:solidFill>
                 <a:latin typeface="Georgia"/>
               </a:rPr>
-              <a:t>What I traded, and what it cost</a:t>
+              <a:t>Pitfalls learned along the way</a:t>
             </a:r>
           </a:p>
         </p:txBody>
@@ -5364,7 +5217,7 @@
         <p:spPr>
           <a:xfrm>
             <a:off x="566928" y="1600200"/>
-            <a:ext cx="11057839" cy="2716784"/>
+            <a:ext cx="11057839" cy="4700270"/>
           </a:xfrm>
           <a:prstGeom prst="rect">
             <a:avLst/>
@@ -5382,6 +5235,25 @@
                 <a:spcPts val="0"/>
               </a:spcBef>
               <a:spcAft>
+                <a:spcPts val="400"/>
+              </a:spcAft>
+            </a:pPr>
+            <a:r>
+              <a:rPr sz="1400" b="0" i="0">
+                <a:solidFill>
+                  <a:srgbClr val="4A5158"/>
+                </a:solidFill>
+                <a:latin typeface="Helvetica Neue"/>
+              </a:rPr>
+              <a:t>Each one taught me something I now carry into the next build and related projects.</a:t>
+            </a:r>
+          </a:p>
+          <a:p>
+            <a:pPr>
+              <a:spcBef>
+                <a:spcPts val="1200"/>
+              </a:spcBef>
+              <a:spcAft>
                 <a:spcPts val="200"/>
               </a:spcAft>
             </a:pPr>
@@ -5392,7 +5264,7 @@
                 </a:solidFill>
                 <a:latin typeface="Helvetica Neue"/>
               </a:rPr>
-              <a:t>TWO STORES INSTEAD OF ONE</a:t>
+              <a:t>1 · A LIBRARY DEFAULT COST 9.6% OF THE GRAPH</a:t>
             </a:r>
           </a:p>
           <a:p>
@@ -5411,7 +5283,26 @@
                 </a:solidFill>
                 <a:latin typeface="Helvetica Neue"/>
               </a:rPr>
-              <a:t>The graph sits in ArangoDB; the text and vectors sit in LanceDB. It was the quick choice, and it shows: a few passages exist in the graph with no matching row in LanceDB.</a:t>
+              <a:t>The name-matching library (Jaro-Winkler) defaults to case-sensitive. In documents full of ALL-CAPS captions, that produced 38 separate "Mr. Barton" nodes.</a:t>
+            </a:r>
+          </a:p>
+          <a:p>
+            <a:pPr>
+              <a:spcBef>
+                <a:spcPts val="200"/>
+              </a:spcBef>
+              <a:spcAft>
+                <a:spcPts val="600"/>
+              </a:spcAft>
+            </a:pPr>
+            <a:r>
+              <a:rPr sz="1100" b="0" i="0">
+                <a:solidFill>
+                  <a:srgbClr val="1E3A5F"/>
+                </a:solidFill>
+                <a:latin typeface="Helvetica Neue"/>
+              </a:rPr>
+              <a:t>→  Fixed — compare both names in the same case, and sort the candidate list by score before cutting it to five. Then re-ran the pass over every document.</a:t>
             </a:r>
           </a:p>
           <a:p>
@@ -5430,7 +5321,7 @@
                 </a:solidFill>
                 <a:latin typeface="Helvetica Neue"/>
               </a:rPr>
-              <a:t>NO PERSON-TO-PERSON LINKS</a:t>
+              <a:t>2 · TWO DIFFERENT MAXWELLS MERGED INTO ONE</a:t>
             </a:r>
           </a:p>
           <a:p>
@@ -5449,7 +5340,26 @@
                 </a:solidFill>
                 <a:latin typeface="Helvetica Neue"/>
               </a:rPr>
-              <a:t>This is an index of who appears where, not a map of how people relate. A second step would only mean "mentioned in the same passage", which here says very little.</a:t>
+              <a:t>Ghislaine and her father Robert. Comparing two names at a time cannot tell a fuller version of one name from a different person entirely.</a:t>
+            </a:r>
+          </a:p>
+          <a:p>
+            <a:pPr>
+              <a:spcBef>
+                <a:spcPts val="200"/>
+              </a:spcBef>
+              <a:spcAft>
+                <a:spcPts val="600"/>
+              </a:spcAft>
+            </a:pPr>
+            <a:r>
+              <a:rPr sz="1100" b="0" i="0">
+                <a:solidFill>
+                  <a:srgbClr val="1E3A5F"/>
+                </a:solidFill>
+                <a:latin typeface="Helvetica Neue"/>
+              </a:rPr>
+              <a:t>→  Fixed — judge the whole family of names at once instead of pair by pair, using how often each appears, how widely across documents, and in what role. Anything still uncertain is flagged, not merged.</a:t>
             </a:r>
           </a:p>
           <a:p>
@@ -5468,7 +5378,7 @@
                 </a:solidFill>
                 <a:latin typeface="Helvetica Neue"/>
               </a:rPr>
-              <a:t>SAME-PERSON LINKS FOR PEOPLE ONLY</a:t>
+              <a:t>3 · THE MODEL NEVER SAW THE TOP OF ITS OWN INSTRUCTIONS</a:t>
             </a:r>
           </a:p>
           <a:p>
@@ -5487,7 +5397,26 @@
                 </a:solidFill>
                 <a:latin typeface="Helvetica Neue"/>
               </a:rPr>
-              <a:t>The rule that works for people runs backwards for places. A trial run produced 11 wrong links out of 14. I stopped it and limited the pass to people.</a:t>
+              <a:t>Ollama silently cuts any prompt down to 4,096 tokens, without warning — and it cuts from the front. Mine were 4,235, so every test run lost the opening of its own system prompt, starting with "use only these sources".</a:t>
+            </a:r>
+          </a:p>
+          <a:p>
+            <a:pPr>
+              <a:spcBef>
+                <a:spcPts val="200"/>
+              </a:spcBef>
+              <a:spcAft>
+                <a:spcPts val="600"/>
+              </a:spcAft>
+            </a:pPr>
+            <a:r>
+              <a:rPr sz="1100" b="0" i="0">
+                <a:solidFill>
+                  <a:srgbClr val="1E3A5F"/>
+                </a:solidFill>
+                <a:latin typeface="Helvetica Neue"/>
+              </a:rPr>
+              <a:t>→  Fixed — set the context length explicitly to 8,192 in config rather than inheriting a default, and log the prompt length so the next cut is visible.</a:t>
             </a:r>
           </a:p>
           <a:p>
@@ -5506,7 +5435,7 @@
                 </a:solidFill>
                 <a:latin typeface="Helvetica Neue"/>
               </a:rPr>
-              <a:t>RATHER MISS A LINK THAN INVENT ONE</a:t>
+              <a:t>4 · BIGGER MODEL, WORSE RESULTS</a:t>
             </a:r>
           </a:p>
           <a:p>
@@ -5525,7 +5454,64 @@
                 </a:solidFill>
                 <a:latin typeface="Helvetica Neue"/>
               </a:rPr>
-              <a:t>413 refusals are queued for review. A wrong merge invents a connection between real people. A missed one only means we find less.</a:t>
+              <a:t>A 30-billion-parameter model of the mixture-of-experts kind scored 11/16. A plain 8-billion model scored 15/16, at the same speed.</a:t>
+            </a:r>
+          </a:p>
+          <a:p>
+            <a:pPr>
+              <a:spcBef>
+                <a:spcPts val="200"/>
+              </a:spcBef>
+              <a:spcAft>
+                <a:spcPts val="600"/>
+              </a:spcAft>
+            </a:pPr>
+            <a:r>
+              <a:rPr sz="1100" b="0" i="0">
+                <a:solidFill>
+                  <a:srgbClr val="1E3A5F"/>
+                </a:solidFill>
+                <a:latin typeface="Helvetica Neue"/>
+              </a:rPr>
+              <a:t>→  Settled — kept the smaller model, on the evidence. I also abandoned a prompt change that made both models worse, rather than trying to rescue it.</a:t>
+            </a:r>
+          </a:p>
+          <a:p>
+            <a:pPr>
+              <a:spcBef>
+                <a:spcPts val="700"/>
+              </a:spcBef>
+              <a:spcAft>
+                <a:spcPts val="400"/>
+              </a:spcAft>
+            </a:pPr>
+            <a:r>
+              <a:rPr sz="1200" b="0" i="1">
+                <a:solidFill>
+                  <a:srgbClr val="1E3A5F"/>
+                </a:solidFill>
+                <a:latin typeface="Helvetica Neue"/>
+              </a:rPr>
+              <a:t>Every one was found by auditing real output — not by reading code, and not by a test. Every one is fixed and re-measured.</a:t>
+            </a:r>
+          </a:p>
+          <a:p>
+            <a:pPr>
+              <a:spcBef>
+                <a:spcPts val="700"/>
+              </a:spcBef>
+              <a:spcAft>
+                <a:spcPts val="400"/>
+              </a:spcAft>
+            </a:pPr>
+            <a:r>
+              <a:rPr sz="1200" b="0" i="1">
+                <a:solidFill>
+                  <a:srgbClr val="1E3A5F"/>
+                </a:solidFill>
+                <a:latin typeface="Helvetica Neue"/>
+              </a:rPr>
+              <a:t>A human stayed in the middle of every step. Claude Code wrote most of the code. Every data structure, threshold and algorithm choice was argued out before it went in. Working the problem with the model rather than delegating it to the model is where the experience compounded.</a:t>
             </a:r>
           </a:p>
         </p:txBody>
@@ -5539,938 +5525,6 @@
 </file>
 
 <file path=ppt/slides/slide11.xml><?xml version="1.0" encoding="utf-8"?>
-<p:sld xmlns:a="http://schemas.openxmlformats.org/drawingml/2006/main" xmlns:p="http://schemas.openxmlformats.org/presentationml/2006/main" xmlns:r="http://schemas.openxmlformats.org/officeDocument/2006/relationships">
-  <p:cSld>
-    <p:bg>
-      <p:bgPr>
-        <a:solidFill>
-          <a:srgbClr val="FBFAF8"/>
-        </a:solidFill>
-        <a:effectLst/>
-      </p:bgPr>
-    </p:bg>
-    <p:spTree>
-      <p:nvGrpSpPr>
-        <p:cNvPr id="1" name=""/>
-        <p:cNvGrpSpPr/>
-        <p:nvPr/>
-      </p:nvGrpSpPr>
-      <p:grpSpPr/>
-      <p:sp>
-        <p:nvSpPr>
-          <p:cNvPr id="2" name="TextBox 1"/>
-          <p:cNvSpPr txBox="1"/>
-          <p:nvPr/>
-        </p:nvSpPr>
-        <p:spPr>
-          <a:xfrm>
-            <a:off x="10710367" y="274320"/>
-            <a:ext cx="914400" cy="274320"/>
-          </a:xfrm>
-          <a:prstGeom prst="rect">
-            <a:avLst/>
-          </a:prstGeom>
-          <a:noFill/>
-        </p:spPr>
-        <p:txBody>
-          <a:bodyPr wrap="square" lIns="0" rIns="0" tIns="0" bIns="0">
-            <a:spAutoFit/>
-          </a:bodyPr>
-          <a:lstStyle/>
-          <a:p>
-            <a:pPr algn="r">
-              <a:spcBef>
-                <a:spcPts val="0"/>
-              </a:spcBef>
-              <a:spcAft>
-                <a:spcPts val="0"/>
-              </a:spcAft>
-            </a:pPr>
-            <a:r>
-              <a:rPr sz="900" b="0" i="0">
-                <a:solidFill>
-                  <a:srgbClr val="838B93"/>
-                </a:solidFill>
-                <a:latin typeface="Menlo"/>
-              </a:rPr>
-              <a:t>10</a:t>
-            </a:r>
-          </a:p>
-        </p:txBody>
-      </p:sp>
-      <p:sp>
-        <p:nvSpPr>
-          <p:cNvPr id="3" name="TextBox 2"/>
-          <p:cNvSpPr txBox="1"/>
-          <p:nvPr/>
-        </p:nvSpPr>
-        <p:spPr>
-          <a:xfrm>
-            <a:off x="566928" y="566928"/>
-            <a:ext cx="11057839" cy="228600"/>
-          </a:xfrm>
-          <a:prstGeom prst="rect">
-            <a:avLst/>
-          </a:prstGeom>
-          <a:noFill/>
-        </p:spPr>
-        <p:txBody>
-          <a:bodyPr wrap="square" lIns="0" rIns="0" tIns="0" bIns="0">
-            <a:spAutoFit/>
-          </a:bodyPr>
-          <a:lstStyle/>
-          <a:p>
-            <a:pPr>
-              <a:spcBef>
-                <a:spcPts val="0"/>
-              </a:spcBef>
-              <a:spcAft>
-                <a:spcPts val="0"/>
-              </a:spcAft>
-            </a:pPr>
-            <a:r>
-              <a:rPr sz="900" b="0" i="0">
-                <a:solidFill>
-                  <a:srgbClr val="1E3A5F"/>
-                </a:solidFill>
-                <a:latin typeface="Menlo"/>
-              </a:rPr>
-              <a:t>THE SOLUTION · PRODUCTION</a:t>
-            </a:r>
-          </a:p>
-        </p:txBody>
-      </p:sp>
-      <p:sp>
-        <p:nvSpPr>
-          <p:cNvPr id="4" name="TextBox 3"/>
-          <p:cNvSpPr txBox="1"/>
-          <p:nvPr/>
-        </p:nvSpPr>
-        <p:spPr>
-          <a:xfrm>
-            <a:off x="566928" y="841248"/>
-            <a:ext cx="11057839" cy="502920"/>
-          </a:xfrm>
-          <a:prstGeom prst="rect">
-            <a:avLst/>
-          </a:prstGeom>
-          <a:noFill/>
-        </p:spPr>
-        <p:txBody>
-          <a:bodyPr wrap="square" lIns="0" rIns="0" tIns="0" bIns="0">
-            <a:spAutoFit/>
-          </a:bodyPr>
-          <a:lstStyle/>
-          <a:p>
-            <a:pPr>
-              <a:spcBef>
-                <a:spcPts val="0"/>
-              </a:spcBef>
-              <a:spcAft>
-                <a:spcPts val="0"/>
-              </a:spcAft>
-            </a:pPr>
-            <a:r>
-              <a:rPr sz="2600" b="1" i="0">
-                <a:solidFill>
-                  <a:srgbClr val="14171B"/>
-                </a:solidFill>
-                <a:latin typeface="Georgia"/>
-              </a:rPr>
-              <a:t>What I'd change to run this at scale</a:t>
-            </a:r>
-          </a:p>
-        </p:txBody>
-      </p:sp>
-      <p:sp>
-        <p:nvSpPr>
-          <p:cNvPr id="5" name="Rectangle 4"/>
-          <p:cNvSpPr/>
-          <p:nvPr/>
-        </p:nvSpPr>
-        <p:spPr>
-          <a:xfrm>
-            <a:off x="566928" y="1417320"/>
-            <a:ext cx="11057839" cy="9525"/>
-          </a:xfrm>
-          <a:prstGeom prst="rect">
-            <a:avLst/>
-          </a:prstGeom>
-          <a:solidFill>
-            <a:srgbClr val="D8D5CD"/>
-          </a:solidFill>
-          <a:ln>
-            <a:noFill/>
-          </a:ln>
-          <a:effectLst/>
-        </p:spPr>
-        <p:style>
-          <a:lnRef idx="1">
-            <a:schemeClr val="accent1"/>
-          </a:lnRef>
-          <a:fillRef idx="3">
-            <a:schemeClr val="accent1"/>
-          </a:fillRef>
-          <a:effectRef idx="2">
-            <a:schemeClr val="accent1"/>
-          </a:effectRef>
-          <a:fontRef idx="minor">
-            <a:schemeClr val="lt1"/>
-          </a:fontRef>
-        </p:style>
-        <p:txBody>
-          <a:bodyPr rtlCol="0" anchor="ctr"/>
-          <a:lstStyle/>
-          <a:p>
-            <a:pPr algn="ctr"/>
-          </a:p>
-        </p:txBody>
-      </p:sp>
-      <p:sp>
-        <p:nvSpPr>
-          <p:cNvPr id="6" name="TextBox 5"/>
-          <p:cNvSpPr txBox="1"/>
-          <p:nvPr/>
-        </p:nvSpPr>
-        <p:spPr>
-          <a:xfrm>
-            <a:off x="566928" y="1600200"/>
-            <a:ext cx="11057839" cy="3338068"/>
-          </a:xfrm>
-          <a:prstGeom prst="rect">
-            <a:avLst/>
-          </a:prstGeom>
-          <a:noFill/>
-        </p:spPr>
-        <p:txBody>
-          <a:bodyPr wrap="square" lIns="0" rIns="0" tIns="0" bIns="0">
-            <a:spAutoFit/>
-          </a:bodyPr>
-          <a:lstStyle/>
-          <a:p>
-            <a:pPr>
-              <a:spcBef>
-                <a:spcPts val="0"/>
-              </a:spcBef>
-              <a:spcAft>
-                <a:spcPts val="400"/>
-              </a:spcAft>
-            </a:pPr>
-            <a:r>
-              <a:rPr sz="1200" b="0" i="1">
-                <a:solidFill>
-                  <a:srgbClr val="1E3A5F"/>
-                </a:solidFill>
-                <a:latin typeface="Helvetica Neue"/>
-              </a:rPr>
-              <a:t>First, I'd delete LanceDB. ArangoDB 3.12 has a native vector index. Two stores collapse into one, an entire class of consistency bug disappears, and a join across two systems becomes a single lookup.</a:t>
-            </a:r>
-          </a:p>
-          <a:p>
-            <a:pPr>
-              <a:spcBef>
-                <a:spcPts val="1200"/>
-              </a:spcBef>
-              <a:spcAft>
-                <a:spcPts val="200"/>
-              </a:spcAft>
-            </a:pPr>
-            <a:r>
-              <a:rPr sz="1100" b="1" i="0">
-                <a:solidFill>
-                  <a:srgbClr val="4A5158"/>
-                </a:solidFill>
-                <a:latin typeface="Helvetica Neue"/>
-              </a:rPr>
-              <a:t>CLUSTER AND SHAPE</a:t>
-            </a:r>
-          </a:p>
-          <a:p>
-            <a:pPr>
-              <a:spcBef>
-                <a:spcPts val="300"/>
-              </a:spcBef>
-              <a:spcAft>
-                <a:spcPts val="300"/>
-              </a:spcAft>
-            </a:pPr>
-            <a:r>
-              <a:rPr sz="1200" b="0" i="0">
-                <a:solidFill>
-                  <a:srgbClr val="14171B"/>
-                </a:solidFill>
-                <a:latin typeface="Helvetica Neue"/>
-              </a:rPr>
-              <a:t>•  SmartGraphs with partition_id, so graph queries stay on a single shard.</a:t>
-            </a:r>
-          </a:p>
-          <a:p>
-            <a:pPr>
-              <a:spcBef>
-                <a:spcPts val="300"/>
-              </a:spcBef>
-              <a:spcAft>
-                <a:spcPts val="300"/>
-              </a:spcAft>
-            </a:pPr>
-            <a:r>
-              <a:rPr sz="1200" b="0" i="0">
-                <a:solidFill>
-                  <a:srgbClr val="14171B"/>
-                </a:solidFill>
-                <a:latin typeface="Helvetica Neue"/>
-              </a:rPr>
-              <a:t>•  Satellite collections keep the entity index on every node.</a:t>
-            </a:r>
-          </a:p>
-          <a:p>
-            <a:pPr>
-              <a:spcBef>
-                <a:spcPts val="300"/>
-              </a:spcBef>
-              <a:spcAft>
-                <a:spcPts val="300"/>
-              </a:spcAft>
-            </a:pPr>
-            <a:r>
-              <a:rPr sz="1200" b="0" i="0">
-                <a:solidFill>
-                  <a:srgbClr val="14171B"/>
-                </a:solidFill>
-                <a:latin typeface="Helvetica Neue"/>
-              </a:rPr>
-              <a:t>•  Partition by legal matter, which is also the customer boundary.</a:t>
-            </a:r>
-          </a:p>
-          <a:p>
-            <a:pPr>
-              <a:spcBef>
-                <a:spcPts val="1200"/>
-              </a:spcBef>
-              <a:spcAft>
-                <a:spcPts val="200"/>
-              </a:spcAft>
-            </a:pPr>
-            <a:r>
-              <a:rPr sz="1100" b="1" i="0">
-                <a:solidFill>
-                  <a:srgbClr val="4A5158"/>
-                </a:solidFill>
-                <a:latin typeface="Helvetica Neue"/>
-              </a:rPr>
-              <a:t>CORRECTNESS BEFORE FEATURES</a:t>
-            </a:r>
-          </a:p>
-          <a:p>
-            <a:pPr>
-              <a:spcBef>
-                <a:spcPts val="300"/>
-              </a:spcBef>
-              <a:spcAft>
-                <a:spcPts val="300"/>
-              </a:spcAft>
-            </a:pPr>
-            <a:r>
-              <a:rPr sz="1200" b="0" i="0">
-                <a:solidFill>
-                  <a:srgbClr val="14171B"/>
-                </a:solidFill>
-                <a:latin typeface="Helvetica Neue"/>
-              </a:rPr>
-              <a:t>•  Decide first, then write. Built and measured: it now declines when it should in 11 of 15 runs, up from 0, with no wrong refusals in 105.</a:t>
-            </a:r>
-          </a:p>
-          <a:p>
-            <a:pPr>
-              <a:spcBef>
-                <a:spcPts val="300"/>
-              </a:spcBef>
-              <a:spcAft>
-                <a:spcPts val="300"/>
-              </a:spcAft>
-            </a:pPr>
-            <a:r>
-              <a:rPr sz="1200" b="0" i="0">
-                <a:solidFill>
-                  <a:srgbClr val="14171B"/>
-                </a:solidFill>
-                <a:latin typeface="Helvetica Neue"/>
-              </a:rPr>
-              <a:t>•  A human review step, budgeted and staffed.</a:t>
-            </a:r>
-          </a:p>
-          <a:p>
-            <a:pPr>
-              <a:spcBef>
-                <a:spcPts val="300"/>
-              </a:spcBef>
-              <a:spcAft>
-                <a:spcPts val="300"/>
-              </a:spcAft>
-            </a:pPr>
-            <a:r>
-              <a:rPr sz="1200" b="0" i="0">
-                <a:solidFill>
-                  <a:srgbClr val="14171B"/>
-                </a:solidFill>
-                <a:latin typeface="Helvetica Neue"/>
-              </a:rPr>
-              <a:t>•  A review screen for the 413 flagged pairs.</a:t>
-            </a:r>
-          </a:p>
-          <a:p>
-            <a:pPr>
-              <a:spcBef>
-                <a:spcPts val="300"/>
-              </a:spcBef>
-              <a:spcAft>
-                <a:spcPts val="300"/>
-              </a:spcAft>
-            </a:pPr>
-            <a:r>
-              <a:rPr sz="1200" b="0" i="0">
-                <a:solidFill>
-                  <a:srgbClr val="14171B"/>
-                </a:solidFill>
-                <a:latin typeface="Helvetica Neue"/>
-              </a:rPr>
-              <a:t>•  A second, slower model to re-order the final shortlist (a cross-encoder reranker).</a:t>
-            </a:r>
-          </a:p>
-          <a:p>
-            <a:pPr>
-              <a:spcBef>
-                <a:spcPts val="700"/>
-              </a:spcBef>
-              <a:spcAft>
-                <a:spcPts val="400"/>
-              </a:spcAft>
-            </a:pPr>
-            <a:r>
-              <a:rPr sz="1200" b="0" i="0">
-                <a:solidFill>
-                  <a:srgbClr val="A6382C"/>
-                </a:solidFill>
-                <a:latin typeface="Helvetica Neue"/>
-              </a:rPr>
-              <a:t>Unsolved: adding new documents without rebuilding. Matching names across all 190 filings took 19 hours, and that cost grows with the number of mentions, not the number of documents. Adding one filing without redoing the whole graph is the hard problem.</a:t>
-            </a:r>
-          </a:p>
-        </p:txBody>
-      </p:sp>
-    </p:spTree>
-  </p:cSld>
-  <p:clrMapOvr>
-    <a:masterClrMapping/>
-  </p:clrMapOvr>
-</p:sld>
-</file>
-
-<file path=ppt/slides/slide12.xml><?xml version="1.0" encoding="utf-8"?>
-<p:sld xmlns:a="http://schemas.openxmlformats.org/drawingml/2006/main" xmlns:p="http://schemas.openxmlformats.org/presentationml/2006/main" xmlns:r="http://schemas.openxmlformats.org/officeDocument/2006/relationships">
-  <p:cSld>
-    <p:bg>
-      <p:bgPr>
-        <a:solidFill>
-          <a:srgbClr val="FBFAF8"/>
-        </a:solidFill>
-        <a:effectLst/>
-      </p:bgPr>
-    </p:bg>
-    <p:spTree>
-      <p:nvGrpSpPr>
-        <p:cNvPr id="1" name=""/>
-        <p:cNvGrpSpPr/>
-        <p:nvPr/>
-      </p:nvGrpSpPr>
-      <p:grpSpPr/>
-      <p:sp>
-        <p:nvSpPr>
-          <p:cNvPr id="2" name="TextBox 1"/>
-          <p:cNvSpPr txBox="1"/>
-          <p:nvPr/>
-        </p:nvSpPr>
-        <p:spPr>
-          <a:xfrm>
-            <a:off x="10710367" y="274320"/>
-            <a:ext cx="914400" cy="274320"/>
-          </a:xfrm>
-          <a:prstGeom prst="rect">
-            <a:avLst/>
-          </a:prstGeom>
-          <a:noFill/>
-        </p:spPr>
-        <p:txBody>
-          <a:bodyPr wrap="square" lIns="0" rIns="0" tIns="0" bIns="0">
-            <a:spAutoFit/>
-          </a:bodyPr>
-          <a:lstStyle/>
-          <a:p>
-            <a:pPr algn="r">
-              <a:spcBef>
-                <a:spcPts val="0"/>
-              </a:spcBef>
-              <a:spcAft>
-                <a:spcPts val="0"/>
-              </a:spcAft>
-            </a:pPr>
-            <a:r>
-              <a:rPr sz="900" b="0" i="0">
-                <a:solidFill>
-                  <a:srgbClr val="838B93"/>
-                </a:solidFill>
-                <a:latin typeface="Menlo"/>
-              </a:rPr>
-              <a:t>11</a:t>
-            </a:r>
-          </a:p>
-        </p:txBody>
-      </p:sp>
-      <p:sp>
-        <p:nvSpPr>
-          <p:cNvPr id="3" name="TextBox 2"/>
-          <p:cNvSpPr txBox="1"/>
-          <p:nvPr/>
-        </p:nvSpPr>
-        <p:spPr>
-          <a:xfrm>
-            <a:off x="566928" y="566928"/>
-            <a:ext cx="11057839" cy="228600"/>
-          </a:xfrm>
-          <a:prstGeom prst="rect">
-            <a:avLst/>
-          </a:prstGeom>
-          <a:noFill/>
-        </p:spPr>
-        <p:txBody>
-          <a:bodyPr wrap="square" lIns="0" rIns="0" tIns="0" bIns="0">
-            <a:spAutoFit/>
-          </a:bodyPr>
-          <a:lstStyle/>
-          <a:p>
-            <a:pPr>
-              <a:spcBef>
-                <a:spcPts val="0"/>
-              </a:spcBef>
-              <a:spcAft>
-                <a:spcPts val="0"/>
-              </a:spcAft>
-            </a:pPr>
-            <a:r>
-              <a:rPr sz="900" b="0" i="0">
-                <a:solidFill>
-                  <a:srgbClr val="A6382C"/>
-                </a:solidFill>
-                <a:latin typeface="Menlo"/>
-              </a:rPr>
-              <a:t>THE SOLUTION · CANDOUR</a:t>
-            </a:r>
-          </a:p>
-        </p:txBody>
-      </p:sp>
-      <p:sp>
-        <p:nvSpPr>
-          <p:cNvPr id="4" name="TextBox 3"/>
-          <p:cNvSpPr txBox="1"/>
-          <p:nvPr/>
-        </p:nvSpPr>
-        <p:spPr>
-          <a:xfrm>
-            <a:off x="566928" y="841248"/>
-            <a:ext cx="11057839" cy="502920"/>
-          </a:xfrm>
-          <a:prstGeom prst="rect">
-            <a:avLst/>
-          </a:prstGeom>
-          <a:noFill/>
-        </p:spPr>
-        <p:txBody>
-          <a:bodyPr wrap="square" lIns="0" rIns="0" tIns="0" bIns="0">
-            <a:spAutoFit/>
-          </a:bodyPr>
-          <a:lstStyle/>
-          <a:p>
-            <a:pPr>
-              <a:spcBef>
-                <a:spcPts val="0"/>
-              </a:spcBef>
-              <a:spcAft>
-                <a:spcPts val="0"/>
-              </a:spcAft>
-            </a:pPr>
-            <a:r>
-              <a:rPr sz="2600" b="1" i="0">
-                <a:solidFill>
-                  <a:srgbClr val="14171B"/>
-                </a:solidFill>
-                <a:latin typeface="Georgia"/>
-              </a:rPr>
-              <a:t>Pitfalls learned along the way</a:t>
-            </a:r>
-          </a:p>
-        </p:txBody>
-      </p:sp>
-      <p:sp>
-        <p:nvSpPr>
-          <p:cNvPr id="5" name="Rectangle 4"/>
-          <p:cNvSpPr/>
-          <p:nvPr/>
-        </p:nvSpPr>
-        <p:spPr>
-          <a:xfrm>
-            <a:off x="566928" y="1417320"/>
-            <a:ext cx="11057839" cy="9525"/>
-          </a:xfrm>
-          <a:prstGeom prst="rect">
-            <a:avLst/>
-          </a:prstGeom>
-          <a:solidFill>
-            <a:srgbClr val="D8D5CD"/>
-          </a:solidFill>
-          <a:ln>
-            <a:noFill/>
-          </a:ln>
-          <a:effectLst/>
-        </p:spPr>
-        <p:style>
-          <a:lnRef idx="1">
-            <a:schemeClr val="accent1"/>
-          </a:lnRef>
-          <a:fillRef idx="3">
-            <a:schemeClr val="accent1"/>
-          </a:fillRef>
-          <a:effectRef idx="2">
-            <a:schemeClr val="accent1"/>
-          </a:effectRef>
-          <a:fontRef idx="minor">
-            <a:schemeClr val="lt1"/>
-          </a:fontRef>
-        </p:style>
-        <p:txBody>
-          <a:bodyPr rtlCol="0" anchor="ctr"/>
-          <a:lstStyle/>
-          <a:p>
-            <a:pPr algn="ctr"/>
-          </a:p>
-        </p:txBody>
-      </p:sp>
-      <p:sp>
-        <p:nvSpPr>
-          <p:cNvPr id="6" name="TextBox 5"/>
-          <p:cNvSpPr txBox="1"/>
-          <p:nvPr/>
-        </p:nvSpPr>
-        <p:spPr>
-          <a:xfrm>
-            <a:off x="566928" y="1600200"/>
-            <a:ext cx="11057839" cy="4700270"/>
-          </a:xfrm>
-          <a:prstGeom prst="rect">
-            <a:avLst/>
-          </a:prstGeom>
-          <a:noFill/>
-        </p:spPr>
-        <p:txBody>
-          <a:bodyPr wrap="square" lIns="0" rIns="0" tIns="0" bIns="0">
-            <a:spAutoFit/>
-          </a:bodyPr>
-          <a:lstStyle/>
-          <a:p>
-            <a:pPr>
-              <a:spcBef>
-                <a:spcPts val="0"/>
-              </a:spcBef>
-              <a:spcAft>
-                <a:spcPts val="400"/>
-              </a:spcAft>
-            </a:pPr>
-            <a:r>
-              <a:rPr sz="1400" b="0" i="0">
-                <a:solidFill>
-                  <a:srgbClr val="4A5158"/>
-                </a:solidFill>
-                <a:latin typeface="Helvetica Neue"/>
-              </a:rPr>
-              <a:t>Each one taught me something I now carry into the next build and related projects.</a:t>
-            </a:r>
-          </a:p>
-          <a:p>
-            <a:pPr>
-              <a:spcBef>
-                <a:spcPts val="1200"/>
-              </a:spcBef>
-              <a:spcAft>
-                <a:spcPts val="200"/>
-              </a:spcAft>
-            </a:pPr>
-            <a:r>
-              <a:rPr sz="1100" b="1" i="0">
-                <a:solidFill>
-                  <a:srgbClr val="4A5158"/>
-                </a:solidFill>
-                <a:latin typeface="Helvetica Neue"/>
-              </a:rPr>
-              <a:t>1 · A LIBRARY DEFAULT COST 9.6% OF THE GRAPH</a:t>
-            </a:r>
-          </a:p>
-          <a:p>
-            <a:pPr>
-              <a:spcBef>
-                <a:spcPts val="700"/>
-              </a:spcBef>
-              <a:spcAft>
-                <a:spcPts val="400"/>
-              </a:spcAft>
-            </a:pPr>
-            <a:r>
-              <a:rPr sz="1200" b="0" i="0">
-                <a:solidFill>
-                  <a:srgbClr val="14171B"/>
-                </a:solidFill>
-                <a:latin typeface="Helvetica Neue"/>
-              </a:rPr>
-              <a:t>The name-matching library (Jaro-Winkler) defaults to case-sensitive. In documents full of ALL-CAPS captions, that produced 38 separate "Mr. Barton" nodes.</a:t>
-            </a:r>
-          </a:p>
-          <a:p>
-            <a:pPr>
-              <a:spcBef>
-                <a:spcPts val="200"/>
-              </a:spcBef>
-              <a:spcAft>
-                <a:spcPts val="600"/>
-              </a:spcAft>
-            </a:pPr>
-            <a:r>
-              <a:rPr sz="1100" b="0" i="0">
-                <a:solidFill>
-                  <a:srgbClr val="1E3A5F"/>
-                </a:solidFill>
-                <a:latin typeface="Helvetica Neue"/>
-              </a:rPr>
-              <a:t>→  Fixed — compare both names in the same case, and sort the candidate list by score before cutting it to five. Then re-ran the pass over every document.</a:t>
-            </a:r>
-          </a:p>
-          <a:p>
-            <a:pPr>
-              <a:spcBef>
-                <a:spcPts val="1200"/>
-              </a:spcBef>
-              <a:spcAft>
-                <a:spcPts val="200"/>
-              </a:spcAft>
-            </a:pPr>
-            <a:r>
-              <a:rPr sz="1100" b="1" i="0">
-                <a:solidFill>
-                  <a:srgbClr val="4A5158"/>
-                </a:solidFill>
-                <a:latin typeface="Helvetica Neue"/>
-              </a:rPr>
-              <a:t>2 · TWO DIFFERENT MAXWELLS MERGED INTO ONE</a:t>
-            </a:r>
-          </a:p>
-          <a:p>
-            <a:pPr>
-              <a:spcBef>
-                <a:spcPts val="700"/>
-              </a:spcBef>
-              <a:spcAft>
-                <a:spcPts val="400"/>
-              </a:spcAft>
-            </a:pPr>
-            <a:r>
-              <a:rPr sz="1200" b="0" i="0">
-                <a:solidFill>
-                  <a:srgbClr val="14171B"/>
-                </a:solidFill>
-                <a:latin typeface="Helvetica Neue"/>
-              </a:rPr>
-              <a:t>Ghislaine and her father Robert. Comparing two names at a time cannot tell a fuller version of one name from a different person entirely.</a:t>
-            </a:r>
-          </a:p>
-          <a:p>
-            <a:pPr>
-              <a:spcBef>
-                <a:spcPts val="200"/>
-              </a:spcBef>
-              <a:spcAft>
-                <a:spcPts val="600"/>
-              </a:spcAft>
-            </a:pPr>
-            <a:r>
-              <a:rPr sz="1100" b="0" i="0">
-                <a:solidFill>
-                  <a:srgbClr val="1E3A5F"/>
-                </a:solidFill>
-                <a:latin typeface="Helvetica Neue"/>
-              </a:rPr>
-              <a:t>→  Fixed — judge the whole family of names at once instead of pair by pair, using how often each appears, how widely across documents, and in what role. Anything still uncertain is flagged, not merged.</a:t>
-            </a:r>
-          </a:p>
-          <a:p>
-            <a:pPr>
-              <a:spcBef>
-                <a:spcPts val="1200"/>
-              </a:spcBef>
-              <a:spcAft>
-                <a:spcPts val="200"/>
-              </a:spcAft>
-            </a:pPr>
-            <a:r>
-              <a:rPr sz="1100" b="1" i="0">
-                <a:solidFill>
-                  <a:srgbClr val="4A5158"/>
-                </a:solidFill>
-                <a:latin typeface="Helvetica Neue"/>
-              </a:rPr>
-              <a:t>3 · THE MODEL NEVER SAW THE TOP OF ITS OWN INSTRUCTIONS</a:t>
-            </a:r>
-          </a:p>
-          <a:p>
-            <a:pPr>
-              <a:spcBef>
-                <a:spcPts val="700"/>
-              </a:spcBef>
-              <a:spcAft>
-                <a:spcPts val="400"/>
-              </a:spcAft>
-            </a:pPr>
-            <a:r>
-              <a:rPr sz="1200" b="0" i="0">
-                <a:solidFill>
-                  <a:srgbClr val="14171B"/>
-                </a:solidFill>
-                <a:latin typeface="Helvetica Neue"/>
-              </a:rPr>
-              <a:t>Ollama silently cuts any prompt down to 4,096 tokens, without warning — and it cuts from the front. Mine were 4,235, so every test run lost the opening of its own system prompt, starting with "use only these sources".</a:t>
-            </a:r>
-          </a:p>
-          <a:p>
-            <a:pPr>
-              <a:spcBef>
-                <a:spcPts val="200"/>
-              </a:spcBef>
-              <a:spcAft>
-                <a:spcPts val="600"/>
-              </a:spcAft>
-            </a:pPr>
-            <a:r>
-              <a:rPr sz="1100" b="0" i="0">
-                <a:solidFill>
-                  <a:srgbClr val="1E3A5F"/>
-                </a:solidFill>
-                <a:latin typeface="Helvetica Neue"/>
-              </a:rPr>
-              <a:t>→  Fixed — set the context length explicitly to 8,192 in config rather than inheriting a default, and log the prompt length so the next cut is visible.</a:t>
-            </a:r>
-          </a:p>
-          <a:p>
-            <a:pPr>
-              <a:spcBef>
-                <a:spcPts val="1200"/>
-              </a:spcBef>
-              <a:spcAft>
-                <a:spcPts val="200"/>
-              </a:spcAft>
-            </a:pPr>
-            <a:r>
-              <a:rPr sz="1100" b="1" i="0">
-                <a:solidFill>
-                  <a:srgbClr val="4A5158"/>
-                </a:solidFill>
-                <a:latin typeface="Helvetica Neue"/>
-              </a:rPr>
-              <a:t>4 · BIGGER MODEL, WORSE RESULTS</a:t>
-            </a:r>
-          </a:p>
-          <a:p>
-            <a:pPr>
-              <a:spcBef>
-                <a:spcPts val="700"/>
-              </a:spcBef>
-              <a:spcAft>
-                <a:spcPts val="400"/>
-              </a:spcAft>
-            </a:pPr>
-            <a:r>
-              <a:rPr sz="1200" b="0" i="0">
-                <a:solidFill>
-                  <a:srgbClr val="14171B"/>
-                </a:solidFill>
-                <a:latin typeface="Helvetica Neue"/>
-              </a:rPr>
-              <a:t>A 30-billion-parameter model of the mixture-of-experts kind scored 11/16. A plain 8-billion model scored 15/16, at the same speed.</a:t>
-            </a:r>
-          </a:p>
-          <a:p>
-            <a:pPr>
-              <a:spcBef>
-                <a:spcPts val="200"/>
-              </a:spcBef>
-              <a:spcAft>
-                <a:spcPts val="600"/>
-              </a:spcAft>
-            </a:pPr>
-            <a:r>
-              <a:rPr sz="1100" b="0" i="0">
-                <a:solidFill>
-                  <a:srgbClr val="1E3A5F"/>
-                </a:solidFill>
-                <a:latin typeface="Helvetica Neue"/>
-              </a:rPr>
-              <a:t>→  Settled — kept the smaller model, on the evidence. I also abandoned a prompt change that made both models worse, rather than trying to rescue it.</a:t>
-            </a:r>
-          </a:p>
-          <a:p>
-            <a:pPr>
-              <a:spcBef>
-                <a:spcPts val="700"/>
-              </a:spcBef>
-              <a:spcAft>
-                <a:spcPts val="400"/>
-              </a:spcAft>
-            </a:pPr>
-            <a:r>
-              <a:rPr sz="1200" b="0" i="1">
-                <a:solidFill>
-                  <a:srgbClr val="1E3A5F"/>
-                </a:solidFill>
-                <a:latin typeface="Helvetica Neue"/>
-              </a:rPr>
-              <a:t>Every one was found by auditing real output — not by reading code, and not by a test. Every one is fixed and re-measured.</a:t>
-            </a:r>
-          </a:p>
-          <a:p>
-            <a:pPr>
-              <a:spcBef>
-                <a:spcPts val="700"/>
-              </a:spcBef>
-              <a:spcAft>
-                <a:spcPts val="400"/>
-              </a:spcAft>
-            </a:pPr>
-            <a:r>
-              <a:rPr sz="1200" b="0" i="1">
-                <a:solidFill>
-                  <a:srgbClr val="1E3A5F"/>
-                </a:solidFill>
-                <a:latin typeface="Helvetica Neue"/>
-              </a:rPr>
-              <a:t>A human stayed in the middle of every step. Claude Code wrote most of the code. Every data structure, threshold and algorithm choice was argued out before it went in. Working the problem with the model rather than delegating it to the model is where the experience compounded.</a:t>
-            </a:r>
-          </a:p>
-        </p:txBody>
-      </p:sp>
-    </p:spTree>
-  </p:cSld>
-  <p:clrMapOvr>
-    <a:masterClrMapping/>
-  </p:clrMapOvr>
-</p:sld>
-</file>
-
-<file path=ppt/slides/slide13.xml><?xml version="1.0" encoding="utf-8"?>
 <p:sld xmlns:a="http://schemas.openxmlformats.org/drawingml/2006/main" xmlns:p="http://schemas.openxmlformats.org/presentationml/2006/main" xmlns:r="http://schemas.openxmlformats.org/officeDocument/2006/relationships">
   <p:cSld>
     <p:bg>
@@ -7132,7 +6186,7 @@
 </p:sld>
 </file>
 
-<file path=ppt/slides/slide14.xml><?xml version="1.0" encoding="utf-8"?>
+<file path=ppt/slides/slide12.xml><?xml version="1.0" encoding="utf-8"?>
 <p:sld xmlns:a="http://schemas.openxmlformats.org/drawingml/2006/main" xmlns:p="http://schemas.openxmlformats.org/presentationml/2006/main" xmlns:r="http://schemas.openxmlformats.org/officeDocument/2006/relationships">
   <p:cSld>
     <p:bg>
@@ -7509,7 +6563,7 @@
                 </a:solidFill>
                 <a:latin typeface="Helvetica Neue"/>
               </a:rPr>
-              <a:t>→  Fixed — one passage per call, each call seeing exactly one passage. The set stops being a variable.</a:t>
+              <a:t>→  Fixed — one passage per call, each call seeing exactly one passage. The other seven can no longer affect the verdict on the first.</a:t>
             </a:r>
           </a:p>
           <a:p>
@@ -7634,7 +6688,7 @@
 </p:sld>
 </file>
 
-<file path=ppt/slides/slide15.xml><?xml version="1.0" encoding="utf-8"?>
+<file path=ppt/slides/slide13.xml><?xml version="1.0" encoding="utf-8"?>
 <p:sld xmlns:a="http://schemas.openxmlformats.org/drawingml/2006/main" xmlns:p="http://schemas.openxmlformats.org/presentationml/2006/main" xmlns:r="http://schemas.openxmlformats.org/officeDocument/2006/relationships">
   <p:cSld>
     <p:bg>
@@ -8024,7 +7078,7 @@
 </p:sld>
 </file>
 
-<file path=ppt/slides/slide16.xml><?xml version="1.0" encoding="utf-8"?>
+<file path=ppt/slides/slide14.xml><?xml version="1.0" encoding="utf-8"?>
 <p:sld xmlns:a="http://schemas.openxmlformats.org/drawingml/2006/main" xmlns:p="http://schemas.openxmlformats.org/presentationml/2006/main" xmlns:r="http://schemas.openxmlformats.org/officeDocument/2006/relationships">
   <p:cSld>
     <p:bg>
@@ -8848,7 +7902,7 @@
                 </a:solidFill>
                 <a:latin typeface="Georgia"/>
               </a:rPr>
-              <a:t>The same product, two audiences</a:t>
+              <a:t>What the suite actually does</a:t>
             </a:r>
           </a:p>
         </p:txBody>
@@ -8906,7 +7960,7 @@
         <p:spPr>
           <a:xfrm>
             <a:off x="566928" y="1600200"/>
-            <a:ext cx="11057839" cy="3402076"/>
+            <a:ext cx="11057839" cy="3017012"/>
           </a:xfrm>
           <a:prstGeom prst="rect">
             <a:avLst/>
@@ -8924,26 +7978,26 @@
                 <a:spcPts val="0"/>
               </a:spcBef>
               <a:spcAft>
-                <a:spcPts val="200"/>
-              </a:spcAft>
-            </a:pPr>
-            <a:r>
-              <a:rPr sz="1100" b="1" i="0">
+                <a:spcPts val="400"/>
+              </a:spcAft>
+            </a:pPr>
+            <a:r>
+              <a:rPr sz="1400" b="0" i="0">
                 <a:solidFill>
                   <a:srgbClr val="4A5158"/>
                 </a:solidFill>
                 <a:latin typeface="Helvetica Neue"/>
               </a:rPr>
-              <a:t>TO AN ENGINEER</a:t>
-            </a:r>
-          </a:p>
-          <a:p>
-            <a:pPr>
-              <a:spcBef>
-                <a:spcPts val="500"/>
-              </a:spcBef>
-              <a:spcAft>
+              <a:t>Two services. One draws the map, the other reads it.</a:t>
+            </a:r>
+          </a:p>
+          <a:p>
+            <a:pPr>
+              <a:spcBef>
                 <a:spcPts val="300"/>
+              </a:spcBef>
+              <a:spcAft>
+                <a:spcPts val="100"/>
               </a:spcAft>
             </a:pPr>
             <a:r>
@@ -8953,16 +8007,35 @@
                 </a:solidFill>
                 <a:latin typeface="Helvetica Neue"/>
               </a:rPr>
-              <a:t>01 Split — documents into passages; size, overlap and separators are all configurable</a:t>
-            </a:r>
-          </a:p>
-          <a:p>
-            <a:pPr>
-              <a:spcBef>
-                <a:spcPts val="500"/>
-              </a:spcBef>
-              <a:spcAft>
+              <a:t>•  The Importer builds, the Retriever answers. Raw files go in one end and come out as a knowledge graph; questions go to the other.</a:t>
+            </a:r>
+          </a:p>
+          <a:p>
+            <a:pPr lvl="1">
+              <a:spcBef>
+                <a:spcPts val="0"/>
+              </a:spcBef>
+              <a:spcAft>
+                <a:spcPts val="400"/>
+              </a:spcAft>
+            </a:pPr>
+            <a:r>
+              <a:rPr sz="1100" b="0" i="1">
+                <a:solidFill>
+                  <a:srgbClr val="4A5158"/>
+                </a:solidFill>
+                <a:latin typeface="Georgia"/>
+              </a:rPr>
+              <a:t>In other words: you can redraw the map without touching the thing your users talk to.</a:t>
+            </a:r>
+          </a:p>
+          <a:p>
+            <a:pPr>
+              <a:spcBef>
                 <a:spcPts val="300"/>
+              </a:spcBef>
+              <a:spcAft>
+                <a:spcPts val="100"/>
               </a:spcAft>
             </a:pPr>
             <a:r>
@@ -8972,16 +8045,35 @@
                 </a:solidFill>
                 <a:latin typeface="Helvetica Neue"/>
               </a:rPr>
-              <a:t>02 Extract — the model finds people, places and organisations, and how they relate. Each becomes a node in the graph.</a:t>
-            </a:r>
-          </a:p>
-          <a:p>
-            <a:pPr>
-              <a:spcBef>
-                <a:spcPts val="500"/>
-              </a:spcBef>
-              <a:spcAft>
+              <a:t>•  Four steps to build it. Split the documents into passages, have a model find the people, places and organisations, group related ones into topics, then have the model write a short report on each topic.</a:t>
+            </a:r>
+          </a:p>
+          <a:p>
+            <a:pPr lvl="1">
+              <a:spcBef>
+                <a:spcPts val="0"/>
+              </a:spcBef>
+              <a:spcAft>
+                <a:spcPts val="400"/>
+              </a:spcAft>
+            </a:pPr>
+            <a:r>
+              <a:rPr sz="1100" b="0" i="1">
+                <a:solidFill>
+                  <a:srgbClr val="4A5158"/>
+                </a:solidFill>
+                <a:latin typeface="Georgia"/>
+              </a:rPr>
+              <a:t>In other words: it reads everything once, so nobody on your team has to read it again.</a:t>
+            </a:r>
+          </a:p>
+          <a:p>
+            <a:pPr>
+              <a:spcBef>
                 <a:spcPts val="300"/>
+              </a:spcBef>
+              <a:spcAft>
+                <a:spcPts val="100"/>
               </a:spcAft>
             </a:pPr>
             <a:r>
@@ -8991,16 +8083,35 @@
                 </a:solidFill>
                 <a:latin typeface="Helvetica Neue"/>
               </a:rPr>
-              <a:t>03 Cluster — group related nodes into topics, then group small topics into larger ones</a:t>
-            </a:r>
-          </a:p>
-          <a:p>
-            <a:pPr>
-              <a:spcBef>
-                <a:spcPts val="500"/>
-              </a:spcBef>
-              <a:spcAft>
+              <a:t>•  Every answer cites the page it came from.</a:t>
+            </a:r>
+          </a:p>
+          <a:p>
+            <a:pPr lvl="1">
+              <a:spcBef>
+                <a:spcPts val="0"/>
+              </a:spcBef>
+              <a:spcAft>
+                <a:spcPts val="400"/>
+              </a:spcAft>
+            </a:pPr>
+            <a:r>
+              <a:rPr sz="1100" b="0" i="1">
+                <a:solidFill>
+                  <a:srgbClr val="4A5158"/>
+                </a:solidFill>
+                <a:latin typeface="Georgia"/>
+              </a:rPr>
+              <a:t>In other words: a person can check the work — which is the difference between a tool a regulated business can use and one it cannot.</a:t>
+            </a:r>
+          </a:p>
+          <a:p>
+            <a:pPr>
+              <a:spcBef>
                 <a:spcPts val="300"/>
+              </a:spcBef>
+              <a:spcAft>
+                <a:spcPts val="100"/>
               </a:spcAft>
             </a:pPr>
             <a:r>
@@ -9010,7 +8121,26 @@
                 </a:solidFill>
                 <a:latin typeface="Helvetica Neue"/>
               </a:rPr>
-              <a:t>04 Summarise — the model writes a short report on each topic</a:t>
+              <a:t>•  It runs where the data already lives, including air-gapped, against models on your own hardware.</a:t>
+            </a:r>
+          </a:p>
+          <a:p>
+            <a:pPr lvl="1">
+              <a:spcBef>
+                <a:spcPts val="0"/>
+              </a:spcBef>
+              <a:spcAft>
+                <a:spcPts val="400"/>
+              </a:spcAft>
+            </a:pPr>
+            <a:r>
+              <a:rPr sz="1100" b="0" i="1">
+                <a:solidFill>
+                  <a:srgbClr val="4A5158"/>
+                </a:solidFill>
+                <a:latin typeface="Georgia"/>
+              </a:rPr>
+              <a:t>In other words: nothing leaves the building, and one database replaces three to secure and staff.</a:t>
             </a:r>
           </a:p>
           <a:p>
@@ -9023,127 +8153,13 @@
               </a:spcAft>
             </a:pPr>
             <a:r>
-              <a:rPr sz="1200" b="0" i="0">
-                <a:solidFill>
-                  <a:srgbClr val="14171B"/>
+              <a:rPr sz="1200" b="0" i="1">
+                <a:solidFill>
+                  <a:srgbClr val="1E3A5F"/>
                 </a:solidFill>
                 <a:latin typeface="Helvetica Neue"/>
               </a:rPr>
-              <a:t>Two services: the Importer builds the graph, the Retriever answers questions against it.</a:t>
-            </a:r>
-          </a:p>
-          <a:p>
-            <a:pPr>
-              <a:spcBef>
-                <a:spcPts val="1200"/>
-              </a:spcBef>
-              <a:spcAft>
-                <a:spcPts val="200"/>
-              </a:spcAft>
-            </a:pPr>
-            <a:r>
-              <a:rPr sz="1100" b="1" i="0">
-                <a:solidFill>
-                  <a:srgbClr val="4A5158"/>
-                </a:solidFill>
-                <a:latin typeface="Helvetica Neue"/>
-              </a:rPr>
-              <a:t>TO AN EXECUTIVE</a:t>
-            </a:r>
-          </a:p>
-          <a:p>
-            <a:pPr>
-              <a:spcBef>
-                <a:spcPts val="300"/>
-              </a:spcBef>
-              <a:spcAft>
-                <a:spcPts val="300"/>
-              </a:spcAft>
-            </a:pPr>
-            <a:r>
-              <a:rPr sz="1200" b="0" i="0">
-                <a:solidFill>
-                  <a:srgbClr val="14171B"/>
-                </a:solidFill>
-                <a:latin typeface="Helvetica Neue"/>
-              </a:rPr>
-              <a:t>•  A queryable map of who and what across every document.</a:t>
-            </a:r>
-          </a:p>
-          <a:p>
-            <a:pPr>
-              <a:spcBef>
-                <a:spcPts val="300"/>
-              </a:spcBef>
-              <a:spcAft>
-                <a:spcPts val="300"/>
-              </a:spcAft>
-            </a:pPr>
-            <a:r>
-              <a:rPr sz="1200" b="0" i="0">
-                <a:solidFill>
-                  <a:srgbClr val="14171B"/>
-                </a:solidFill>
-                <a:latin typeface="Helvetica Neue"/>
-              </a:rPr>
-              <a:t>•  Answers with citations to the page — so a person can check them.</a:t>
-            </a:r>
-          </a:p>
-          <a:p>
-            <a:pPr>
-              <a:spcBef>
-                <a:spcPts val="300"/>
-              </a:spcBef>
-              <a:spcAft>
-                <a:spcPts val="300"/>
-              </a:spcAft>
-            </a:pPr>
-            <a:r>
-              <a:rPr sz="1200" b="0" i="0">
-                <a:solidFill>
-                  <a:srgbClr val="14171B"/>
-                </a:solidFill>
-                <a:latin typeface="Helvetica Neue"/>
-              </a:rPr>
-              <a:t>•  Runs where your data lives, including air-gapped.</a:t>
-            </a:r>
-          </a:p>
-          <a:p>
-            <a:pPr>
-              <a:spcBef>
-                <a:spcPts val="300"/>
-              </a:spcBef>
-              <a:spcAft>
-                <a:spcPts val="300"/>
-              </a:spcAft>
-            </a:pPr>
-            <a:r>
-              <a:rPr sz="1200" b="0" i="0">
-                <a:solidFill>
-                  <a:srgbClr val="14171B"/>
-                </a:solidFill>
-                <a:latin typeface="Helvetica Neue"/>
-              </a:rPr>
-              <a:t>•  One database instead of three to secure and staff.</a:t>
-            </a:r>
-          </a:p>
-          <a:p>
-            <a:pPr>
-              <a:spcBef>
-                <a:spcPts val="700"/>
-              </a:spcBef>
-              <a:spcAft>
-                <a:spcPts val="400"/>
-              </a:spcAft>
-            </a:pPr>
-            <a:r>
-              <a:rPr sz="1200" b="0" i="1">
-                <a:solidFill>
-                  <a:srgbClr val="1E3A5F"/>
-                </a:solidFill>
-                <a:latin typeface="Helvetica Neue"/>
-              </a:rPr>
-              <a:t>The executive question is never "how does the retriever work". It's what can my team ask on Monday that they couldn't ask on Friday — and can they trust the answer.</a:t>
+              <a:t>The executive question is never "how does the retriever work". It is what can my team ask on Monday that they could not ask on Friday — and can they trust the answer.</a:t>
             </a:r>
           </a:p>
         </p:txBody>
@@ -9295,7 +8311,7 @@
                 </a:solidFill>
                 <a:latin typeface="Georgia"/>
               </a:rPr>
-              <a:t>Five retrieval methods, five different questions</a:t>
+              <a:t>Five ways to ask a question</a:t>
             </a:r>
           </a:p>
         </p:txBody>
@@ -9344,16 +8360,58 @@
           </a:p>
         </p:txBody>
       </p:sp>
+      <p:sp>
+        <p:nvSpPr>
+          <p:cNvPr id="6" name="TextBox 5"/>
+          <p:cNvSpPr txBox="1"/>
+          <p:nvPr/>
+        </p:nvSpPr>
+        <p:spPr>
+          <a:xfrm>
+            <a:off x="566928" y="1600200"/>
+            <a:ext cx="11057839" cy="386588"/>
+          </a:xfrm>
+          <a:prstGeom prst="rect">
+            <a:avLst/>
+          </a:prstGeom>
+          <a:noFill/>
+        </p:spPr>
+        <p:txBody>
+          <a:bodyPr wrap="square" lIns="0" rIns="0" tIns="0" bIns="0">
+            <a:spAutoFit/>
+          </a:bodyPr>
+          <a:lstStyle/>
+          <a:p>
+            <a:pPr>
+              <a:spcBef>
+                <a:spcPts val="0"/>
+              </a:spcBef>
+              <a:spcAft>
+                <a:spcPts val="400"/>
+              </a:spcAft>
+            </a:pPr>
+            <a:r>
+              <a:rPr sz="1400" b="0" i="0">
+                <a:solidFill>
+                  <a:srgbClr val="4A5158"/>
+                </a:solidFill>
+                <a:latin typeface="Helvetica Neue"/>
+              </a:rPr>
+              <a:t>Different business questions need different retrieval. Most products ship one.</a:t>
+            </a:r>
+          </a:p>
+        </p:txBody>
+      </p:sp>
       <p:graphicFrame>
         <p:nvGraphicFramePr>
-          <p:cNvPr id="6" name="Table 5"/>
+          <p:cNvPr id="7" name="Table 6"/>
           <p:cNvGraphicFramePr>
             <a:graphicFrameLocks noGrp="1"/>
           </p:cNvGraphicFramePr>
           <p:nvPr/>
         </p:nvGraphicFramePr>
         <p:xfrm>
-          <a:off x="566928" y="1600200"/>
+          <a:off x="566928" y="1986788"/>
           <a:ext cx="11057838" cy="2089404"/>
         </p:xfrm>
         <a:graphic>
@@ -9781,14 +8839,14 @@
       </p:graphicFrame>
       <p:sp>
         <p:nvSpPr>
-          <p:cNvPr id="7" name="TextBox 6"/>
+          <p:cNvPr id="8" name="TextBox 7"/>
           <p:cNvSpPr txBox="1"/>
           <p:nvPr/>
         </p:nvSpPr>
         <p:spPr>
           <a:xfrm>
-            <a:off x="566928" y="3835908"/>
-            <a:ext cx="11057839" cy="749808"/>
+            <a:off x="566928" y="4222496"/>
+            <a:ext cx="11057839" cy="1572768"/>
           </a:xfrm>
           <a:prstGeom prst="rect">
             <a:avLst/>
@@ -9806,17 +8864,74 @@
                 <a:spcPts val="0"/>
               </a:spcBef>
               <a:spcAft>
+                <a:spcPts val="100"/>
+              </a:spcAft>
+            </a:pPr>
+            <a:r>
+              <a:rPr sz="1200" b="0" i="0">
+                <a:solidFill>
+                  <a:srgbClr val="14171B"/>
+                </a:solidFill>
+                <a:latin typeface="Helvetica Neue"/>
+              </a:rPr>
+              <a:t>•  Global Search is the one nobody else ships. It reads the pre-written topic reports instead of walking the graph, so it can answer a question about the collection as a whole.</a:t>
+            </a:r>
+          </a:p>
+          <a:p>
+            <a:pPr lvl="1">
+              <a:spcBef>
+                <a:spcPts val="0"/>
+              </a:spcBef>
+              <a:spcAft>
                 <a:spcPts val="400"/>
               </a:spcAft>
             </a:pPr>
             <a:r>
-              <a:rPr sz="1200" b="0" i="1">
-                <a:solidFill>
-                  <a:srgbClr val="1E3A5F"/>
+              <a:rPr sz="1100" b="0" i="1">
+                <a:solidFill>
+                  <a:srgbClr val="4A5158"/>
+                </a:solidFill>
+                <a:latin typeface="Georgia"/>
+              </a:rPr>
+              <a:t>In other words: "what is actually in here?" — the first thing anyone asks, and the one thing ordinary search cannot do.</a:t>
+            </a:r>
+          </a:p>
+          <a:p>
+            <a:pPr>
+              <a:spcBef>
+                <a:spcPts val="300"/>
+              </a:spcBef>
+              <a:spcAft>
+                <a:spcPts val="100"/>
+              </a:spcAft>
+            </a:pPr>
+            <a:r>
+              <a:rPr sz="1200" b="0" i="0">
+                <a:solidFill>
+                  <a:srgbClr val="14171B"/>
                 </a:solidFill>
                 <a:latin typeface="Helvetica Neue"/>
               </a:rPr>
-              <a:t>Global Search is the one nobody else ships, and it is available through the API only. Graph search needs a name to start from. A question like "which courts appear in these documents" gives it none. My own system falls back to plain similarity search on 11 of 35 questions for exactly that reason.</a:t>
+              <a:t>•  Graph search needs a name to start from. Ask "which courts appear in these documents" and there is nothing to anchor on. Mine falls back to plain similarity search on 11 of 35 test questions for exactly that reason.</a:t>
+            </a:r>
+          </a:p>
+          <a:p>
+            <a:pPr lvl="1">
+              <a:spcBef>
+                <a:spcPts val="0"/>
+              </a:spcBef>
+              <a:spcAft>
+                <a:spcPts val="400"/>
+              </a:spcAft>
+            </a:pPr>
+            <a:r>
+              <a:rPr sz="1100" b="0" i="1">
+                <a:solidFill>
+                  <a:srgbClr val="4A5158"/>
+                </a:solidFill>
+                <a:latin typeface="Georgia"/>
+              </a:rPr>
+              <a:t>In other words: this is where my design stops and theirs keeps going. I would rather show you the gap than hide it.</a:t>
             </a:r>
           </a:p>
         </p:txBody>
@@ -9968,7 +9083,7 @@
                 </a:solidFill>
                 <a:latin typeface="Georgia"/>
               </a:rPr>
-              <a:t>Where it fits — and where it doesn't</a:t>
+              <a:t>Ideal fit, and less than ideal fit</a:t>
             </a:r>
           </a:p>
         </p:txBody>
@@ -10026,7 +9141,7 @@
         <p:spPr>
           <a:xfrm>
             <a:off x="566928" y="1600200"/>
-            <a:ext cx="11057839" cy="2941828"/>
+            <a:ext cx="11057839" cy="2679700"/>
           </a:xfrm>
           <a:prstGeom prst="rect">
             <a:avLst/>
@@ -10054,7 +9169,7 @@
                 </a:solidFill>
                 <a:latin typeface="Helvetica Neue"/>
               </a:rPr>
-              <a:t>STRONG FIT</a:t>
+              <a:t>IDEAL FIT</a:t>
             </a:r>
           </a:p>
           <a:p>
@@ -10131,25 +9246,6 @@
                 <a:latin typeface="Helvetica Neue"/>
               </a:rPr>
               <a:t>•  Data that cannot leave — regulated, privileged, classified.</a:t>
-            </a:r>
-          </a:p>
-          <a:p>
-            <a:pPr>
-              <a:spcBef>
-                <a:spcPts val="300"/>
-              </a:spcBef>
-              <a:spcAft>
-                <a:spcPts val="300"/>
-              </a:spcAft>
-            </a:pPr>
-            <a:r>
-              <a:rPr sz="1200" b="0" i="0">
-                <a:solidFill>
-                  <a:srgbClr val="14171B"/>
-                </a:solidFill>
-                <a:latin typeface="Helvetica Neue"/>
-              </a:rPr>
-              <a:t>•  The same person or place appears under many names.</a:t>
             </a:r>
           </a:p>
           <a:p>
@@ -10396,7 +9492,7 @@
                 </a:solidFill>
                 <a:latin typeface="Georgia"/>
               </a:rPr>
-              <a:t>What a prospect is actually weighing</a:t>
+              <a:t>Solutions comparison at a glance</a:t>
             </a:r>
           </a:p>
         </p:txBody>
@@ -10959,7 +10055,7 @@
                 </a:solidFill>
                 <a:latin typeface="Menlo"/>
               </a:rPr>
-              <a:t>THE SOLUTION · PROBLEM</a:t>
+              <a:t>THE SOLUTION · WHERE IT SITS ALONGSIDE</a:t>
             </a:r>
           </a:p>
         </p:txBody>
@@ -11001,7 +10097,7 @@
                 </a:solidFill>
                 <a:latin typeface="Georgia"/>
               </a:rPr>
-              <a:t>The same person, written eight ways</a:t>
+              <a:t>What ArangoDB excels at — and where mine might complement</a:t>
             </a:r>
           </a:p>
         </p:txBody>
@@ -11059,7 +10155,7 @@
         <p:spPr>
           <a:xfrm>
             <a:off x="566928" y="1600200"/>
-            <a:ext cx="11057839" cy="2617724"/>
+            <a:ext cx="11057839" cy="5105400"/>
           </a:xfrm>
           <a:prstGeom prst="rect">
             <a:avLst/>
@@ -11087,7 +10183,7 @@
                 </a:solidFill>
                 <a:latin typeface="Helvetica Neue"/>
               </a:rPr>
-              <a:t>190 unsealed filings from Giuffre v. Maxwell. Depositions, exhibits and motions, written by opposing lawyers, across many authors and many years.</a:t>
+              <a:t>The kind of documents you have decides which approach works.</a:t>
             </a:r>
           </a:p>
           <a:p>
@@ -11106,7 +10202,216 @@
                 </a:solidFill>
                 <a:latin typeface="Helvetica Neue"/>
               </a:rPr>
-              <a:t>WHY THESE DOCUMENTS</a:t>
+              <a:t>WHAT ARANGODB EXCELS AT</a:t>
+            </a:r>
+          </a:p>
+          <a:p>
+            <a:pPr>
+              <a:spcBef>
+                <a:spcPts val="300"/>
+              </a:spcBef>
+              <a:spcAft>
+                <a:spcPts val="100"/>
+              </a:spcAft>
+            </a:pPr>
+            <a:r>
+              <a:rPr sz="1200" b="0" i="0">
+                <a:solidFill>
+                  <a:srgbClr val="14171B"/>
+                </a:solidFill>
+                <a:latin typeface="Helvetica Neue"/>
+              </a:rPr>
+              <a:t>•  It groups the graph into topics and writes a report on each one. Global Search reads those reports instead of walking the graph.</a:t>
+            </a:r>
+          </a:p>
+          <a:p>
+            <a:pPr lvl="1">
+              <a:spcBef>
+                <a:spcPts val="0"/>
+              </a:spcBef>
+              <a:spcAft>
+                <a:spcPts val="400"/>
+              </a:spcAft>
+            </a:pPr>
+            <a:r>
+              <a:rPr sz="1100" b="0" i="1">
+                <a:solidFill>
+                  <a:srgbClr val="4A5158"/>
+                </a:solidFill>
+                <a:latin typeface="Georgia"/>
+              </a:rPr>
+              <a:t>In other words: it can describe a whole collection, not just find a passage in it.</a:t>
+            </a:r>
+          </a:p>
+          <a:p>
+            <a:pPr>
+              <a:spcBef>
+                <a:spcPts val="300"/>
+              </a:spcBef>
+              <a:spcAft>
+                <a:spcPts val="100"/>
+              </a:spcAft>
+            </a:pPr>
+            <a:r>
+              <a:rPr sz="1200" b="0" i="0">
+                <a:solidFill>
+                  <a:srgbClr val="14171B"/>
+                </a:solidFill>
+                <a:latin typeface="Helvetica Neue"/>
+              </a:rPr>
+              <a:t>•  Those topic reports quietly absorb duplicate names. Two spellings of one person land in the same topic, so the report describes them as one person without anyone resolving anything.</a:t>
+            </a:r>
+          </a:p>
+          <a:p>
+            <a:pPr lvl="1">
+              <a:spcBef>
+                <a:spcPts val="0"/>
+              </a:spcBef>
+              <a:spcAft>
+                <a:spcPts val="400"/>
+              </a:spcAft>
+            </a:pPr>
+            <a:r>
+              <a:rPr sz="1100" b="0" i="1">
+                <a:solidFill>
+                  <a:srgbClr val="4A5158"/>
+                </a:solidFill>
+                <a:latin typeface="Georgia"/>
+              </a:rPr>
+              <a:t>In other words: on well-named documents, the duplicate problem largely solves itself.</a:t>
+            </a:r>
+          </a:p>
+          <a:p>
+            <a:pPr>
+              <a:spcBef>
+                <a:spcPts val="300"/>
+              </a:spcBef>
+              <a:spcAft>
+                <a:spcPts val="100"/>
+              </a:spcAft>
+            </a:pPr>
+            <a:r>
+              <a:rPr sz="1200" b="0" i="0">
+                <a:solidFill>
+                  <a:srgbClr val="14171B"/>
+                </a:solidFill>
+                <a:latin typeface="Helvetica Neue"/>
+              </a:rPr>
+              <a:t>•  That suits precise material — documentation, reports, structured filings, where a name is introduced once and then repeated exactly.</a:t>
+            </a:r>
+          </a:p>
+          <a:p>
+            <a:pPr lvl="1">
+              <a:spcBef>
+                <a:spcPts val="0"/>
+              </a:spcBef>
+              <a:spcAft>
+                <a:spcPts val="400"/>
+              </a:spcAft>
+            </a:pPr>
+            <a:r>
+              <a:rPr sz="1100" b="0" i="1">
+                <a:solidFill>
+                  <a:srgbClr val="4A5158"/>
+                </a:solidFill>
+                <a:latin typeface="Georgia"/>
+              </a:rPr>
+              <a:t>In other words: most business content is written this way, so it is a sensible thing to build for.</a:t>
+            </a:r>
+          </a:p>
+          <a:p>
+            <a:pPr>
+              <a:spcBef>
+                <a:spcPts val="1200"/>
+              </a:spcBef>
+              <a:spcAft>
+                <a:spcPts val="200"/>
+              </a:spcAft>
+            </a:pPr>
+            <a:r>
+              <a:rPr sz="1100" b="1" i="0">
+                <a:solidFill>
+                  <a:srgbClr val="4A5158"/>
+                </a:solidFill>
+                <a:latin typeface="Helvetica Neue"/>
+              </a:rPr>
+              <a:t>WHERE MINE MIGHT COMPLEMENT</a:t>
+            </a:r>
+          </a:p>
+          <a:p>
+            <a:pPr>
+              <a:spcBef>
+                <a:spcPts val="300"/>
+              </a:spcBef>
+              <a:spcAft>
+                <a:spcPts val="100"/>
+              </a:spcAft>
+            </a:pPr>
+            <a:r>
+              <a:rPr sz="1200" b="0" i="0">
+                <a:solidFill>
+                  <a:srgbClr val="14171B"/>
+                </a:solidFill>
+                <a:latin typeface="Helvetica Neue"/>
+              </a:rPr>
+              <a:t>•  That absorption stops at Local Search. Anchor on one of two nodes for the same person and you walk half their connections — with full confidence and no sign anything is missing.</a:t>
+            </a:r>
+          </a:p>
+          <a:p>
+            <a:pPr lvl="1">
+              <a:spcBef>
+                <a:spcPts val="0"/>
+              </a:spcBef>
+              <a:spcAft>
+                <a:spcPts val="400"/>
+              </a:spcAft>
+            </a:pPr>
+            <a:r>
+              <a:rPr sz="1100" b="0" i="1">
+                <a:solidFill>
+                  <a:srgbClr val="4A5158"/>
+                </a:solidFill>
+                <a:latin typeface="Georgia"/>
+              </a:rPr>
+              <a:t>In other words: the answer looks complete when it is not, and nothing tells you.</a:t>
+            </a:r>
+          </a:p>
+          <a:p>
+            <a:pPr>
+              <a:spcBef>
+                <a:spcPts val="300"/>
+              </a:spcBef>
+              <a:spcAft>
+                <a:spcPts val="100"/>
+              </a:spcAft>
+            </a:pPr>
+            <a:r>
+              <a:rPr sz="1200" b="0" i="0">
+                <a:solidFill>
+                  <a:srgbClr val="14171B"/>
+                </a:solidFill>
+                <a:latin typeface="Helvetica Neue"/>
+              </a:rPr>
+              <a:t>•  My documents name people loosely. The same man is RECAREY, JOSEPH in a caption, Det. Recarey in a transcript and Mr. Recarey in a brief — different spellings, mixed upper and lower case, honorifics, initials, maiden names, all inside one docket. So I added a step that works out which names refer to the same person: 19,009 mentions down to 2,014 people, 19.8 hours, the most expensive stage in the build.</a:t>
+            </a:r>
+          </a:p>
+          <a:p>
+            <a:pPr lvl="1">
+              <a:spcBef>
+                <a:spcPts val="0"/>
+              </a:spcBef>
+              <a:spcAft>
+                <a:spcPts val="400"/>
+              </a:spcAft>
+            </a:pPr>
+            <a:r>
+              <a:rPr sz="1100" b="0" i="1">
+                <a:solidFill>
+                  <a:srgbClr val="4A5158"/>
+                </a:solidFill>
+                <a:latin typeface="Georgia"/>
+              </a:rPr>
+              <a:t>In other words: documents that name things consistently never need this step.</a:t>
             </a:r>
           </a:p>
           <a:p>
@@ -11119,108 +10424,32 @@
               </a:spcAft>
             </a:pPr>
             <a:r>
+              <a:rPr sz="1200" b="0" i="1">
+                <a:solidFill>
+                  <a:srgbClr val="1E3A5F"/>
+                </a:solidFill>
+                <a:latin typeface="Helvetica Neue"/>
+              </a:rPr>
+              <a:t>Said carefully: I may well have missed something. I read their published documentation, not their source, and I did not test the product. Their docs do not describe an identity-resolution step, but that is an argument from silence — they may already handle this. The fair question is on their own ground, not mine: how does the Importer handle k8s versus Kubernetes, or AWS versus Amazon Web Services? Acronym expansion is the same problem.</a:t>
+            </a:r>
+          </a:p>
+          <a:p>
+            <a:pPr>
+              <a:spcBef>
+                <a:spcPts val="700"/>
+              </a:spcBef>
+              <a:spcAft>
+                <a:spcPts val="400"/>
+              </a:spcAft>
+            </a:pPr>
+            <a:r>
               <a:rPr sz="1200" b="0" i="0">
                 <a:solidFill>
                   <a:srgbClr val="14171B"/>
                 </a:solidFill>
                 <a:latin typeface="Helvetica Neue"/>
               </a:rPr>
-              <a:t>The same name is written differently depending on the document: RECAREY, JOSEPH in a case caption, Det. Recarey in a transcript, Mr. Recarey in a brief.</a:t>
-            </a:r>
-          </a:p>
-          <a:p>
-            <a:pPr>
-              <a:spcBef>
-                <a:spcPts val="700"/>
-              </a:spcBef>
-              <a:spcAft>
-                <a:spcPts val="400"/>
-              </a:spcAft>
-            </a:pPr>
-            <a:r>
-              <a:rPr sz="1200" b="0" i="0">
-                <a:solidFill>
-                  <a:srgbClr val="14171B"/>
-                </a:solidFill>
-                <a:latin typeface="Helvetica Neue"/>
-              </a:rPr>
-              <a:t>Search one spelling and you reach only the evidence that uses that spelling.</a:t>
-            </a:r>
-          </a:p>
-          <a:p>
-            <a:pPr>
-              <a:spcBef>
-                <a:spcPts val="1200"/>
-              </a:spcBef>
-              <a:spcAft>
-                <a:spcPts val="200"/>
-              </a:spcAft>
-            </a:pPr>
-            <a:r>
-              <a:rPr sz="1100" b="1" i="0">
-                <a:solidFill>
-                  <a:srgbClr val="4A5158"/>
-                </a:solidFill>
-                <a:latin typeface="Helvetica Neue"/>
-              </a:rPr>
-              <a:t>THE COUNTER-CASE</a:t>
-            </a:r>
-          </a:p>
-          <a:p>
-            <a:pPr>
-              <a:spcBef>
-                <a:spcPts val="700"/>
-              </a:spcBef>
-              <a:spcAft>
-                <a:spcPts val="400"/>
-              </a:spcAft>
-            </a:pPr>
-            <a:r>
-              <a:rPr sz="1200" b="0" i="0">
-                <a:solidFill>
-                  <a:srgbClr val="14171B"/>
-                </a:solidFill>
-                <a:latin typeface="Helvetica Neue"/>
-              </a:rPr>
-              <a:t>Jane Doe, Jane Doe 2, Jane Doe 3 — near-identical to any name-matching algorithm, but three different people.</a:t>
-            </a:r>
-          </a:p>
-          <a:p>
-            <a:pPr>
-              <a:spcBef>
-                <a:spcPts val="700"/>
-              </a:spcBef>
-              <a:spcAft>
-                <a:spcPts val="400"/>
-              </a:spcAft>
-            </a:pPr>
-            <a:r>
-              <a:rPr sz="1200" b="0" i="0">
-                <a:solidFill>
-                  <a:srgbClr val="14171B"/>
-                </a:solidFill>
-                <a:latin typeface="Helvetica Neue"/>
-              </a:rPr>
-              <a:t>A system that merges them is worse than one that merges nothing.</a:t>
-            </a:r>
-          </a:p>
-          <a:p>
-            <a:pPr>
-              <a:spcBef>
-                <a:spcPts val="700"/>
-              </a:spcBef>
-              <a:spcAft>
-                <a:spcPts val="400"/>
-              </a:spcAft>
-            </a:pPr>
-            <a:r>
-              <a:rPr sz="1200" b="0" i="1">
-                <a:solidFill>
-                  <a:srgbClr val="1E3A5F"/>
-                </a:solidFill>
-                <a:latin typeface="Helvetica Neue"/>
-              </a:rPr>
-              <a:t>Unsealed public record. Every model runs on my own machine. Nothing was sent to an outside service.</a:t>
+              <a:t>190 unsealed filings from a single civil docket, public record. Every model ran on my own machine; nothing was sent to an outside service.</a:t>
             </a:r>
           </a:p>
         </p:txBody>
@@ -11330,7 +10559,7 @@
                 </a:solidFill>
                 <a:latin typeface="Menlo"/>
               </a:rPr>
-              <a:t>THE SOLUTION · ARCHITECTURE</a:t>
+              <a:t>THE SOLUTION · LIVE</a:t>
             </a:r>
           </a:p>
         </p:txBody>
@@ -11372,7 +10601,7 @@
                 </a:solidFill>
                 <a:latin typeface="Georgia"/>
               </a:rPr>
-              <a:t>Data model</a:t>
+              <a:t>Demonstration</a:t>
             </a:r>
           </a:p>
         </p:txBody>
@@ -11421,674 +10650,16 @@
           </a:p>
         </p:txBody>
       </p:sp>
-      <p:graphicFrame>
-        <p:nvGraphicFramePr>
-          <p:cNvPr id="6" name="Table 5"/>
-          <p:cNvGraphicFramePr>
-            <a:graphicFrameLocks noGrp="1"/>
-          </p:cNvGraphicFramePr>
-          <p:nvPr/>
-        </p:nvGraphicFramePr>
-        <p:xfrm>
-          <a:off x="566928" y="1600200"/>
-          <a:ext cx="11057836" cy="2386584"/>
-        </p:xfrm>
-        <a:graphic>
-          <a:graphicData uri="http://schemas.openxmlformats.org/drawingml/2006/table">
-            <a:tbl>
-              <a:tblPr firstRow="1" bandRow="1">
-                <a:tableStyleId>{5C22544A-7EE6-4342-B048-85BDC9FD1C3A}</a:tableStyleId>
-              </a:tblPr>
-              <a:tblGrid>
-                <a:gridCol w="2764459"/>
-                <a:gridCol w="2764459"/>
-                <a:gridCol w="2764459"/>
-                <a:gridCol w="2764459"/>
-              </a:tblGrid>
-              <a:tr h="265176">
-                <a:tc>
-                  <a:txBody>
-                    <a:bodyPr wrap="square"/>
-                    <a:lstStyle/>
-                    <a:p>
-                      <a:r>
-                        <a:rPr sz="1000" b="1" i="0">
-                          <a:solidFill>
-                            <a:srgbClr val="4A5158"/>
-                          </a:solidFill>
-                          <a:latin typeface="Helvetica Neue"/>
-                        </a:rPr>
-                        <a:t>Collection</a:t>
-                      </a:r>
-                    </a:p>
-                  </a:txBody>
-                  <a:tcPr marL="64008" marR="64008" marT="27432" marB="27432" anchor="t">
-                    <a:solidFill>
-                      <a:srgbClr val="E7EBF1"/>
-                    </a:solidFill>
-                  </a:tcPr>
-                </a:tc>
-                <a:tc>
-                  <a:txBody>
-                    <a:bodyPr wrap="square"/>
-                    <a:lstStyle/>
-                    <a:p>
-                      <a:r>
-                        <a:rPr sz="1000" b="1" i="0">
-                          <a:solidFill>
-                            <a:srgbClr val="4A5158"/>
-                          </a:solidFill>
-                          <a:latin typeface="Helvetica Neue"/>
-                        </a:rPr>
-                        <a:t>Type</a:t>
-                      </a:r>
-                    </a:p>
-                  </a:txBody>
-                  <a:tcPr marL="64008" marR="64008" marT="27432" marB="27432" anchor="t">
-                    <a:solidFill>
-                      <a:srgbClr val="E7EBF1"/>
-                    </a:solidFill>
-                  </a:tcPr>
-                </a:tc>
-                <a:tc>
-                  <a:txBody>
-                    <a:bodyPr wrap="square"/>
-                    <a:lstStyle/>
-                    <a:p>
-                      <a:r>
-                        <a:rPr sz="1000" b="1" i="0">
-                          <a:solidFill>
-                            <a:srgbClr val="4A5158"/>
-                          </a:solidFill>
-                          <a:latin typeface="Helvetica Neue"/>
-                        </a:rPr>
-                        <a:t>Count</a:t>
-                      </a:r>
-                    </a:p>
-                  </a:txBody>
-                  <a:tcPr marL="64008" marR="64008" marT="27432" marB="27432" anchor="t">
-                    <a:solidFill>
-                      <a:srgbClr val="E7EBF1"/>
-                    </a:solidFill>
-                  </a:tcPr>
-                </a:tc>
-                <a:tc>
-                  <a:txBody>
-                    <a:bodyPr wrap="square"/>
-                    <a:lstStyle/>
-                    <a:p>
-                      <a:r>
-                        <a:rPr sz="1000" b="1" i="0">
-                          <a:solidFill>
-                            <a:srgbClr val="4A5158"/>
-                          </a:solidFill>
-                          <a:latin typeface="Helvetica Neue"/>
-                        </a:rPr>
-                        <a:t>Purpose</a:t>
-                      </a:r>
-                    </a:p>
-                  </a:txBody>
-                  <a:tcPr marL="64008" marR="64008" marT="27432" marB="27432" anchor="t">
-                    <a:solidFill>
-                      <a:srgbClr val="E7EBF1"/>
-                    </a:solidFill>
-                  </a:tcPr>
-                </a:tc>
-              </a:tr>
-              <a:tr h="297180">
-                <a:tc>
-                  <a:txBody>
-                    <a:bodyPr wrap="square"/>
-                    <a:lstStyle/>
-                    <a:p>
-                      <a:r>
-                        <a:rPr sz="1100" b="0" i="0">
-                          <a:solidFill>
-                            <a:srgbClr val="14171B"/>
-                          </a:solidFill>
-                          <a:latin typeface="Helvetica Neue"/>
-                        </a:rPr>
-                        <a:t>je_chunks</a:t>
-                      </a:r>
-                    </a:p>
-                  </a:txBody>
-                  <a:tcPr marL="64008" marR="64008" marT="27432" marB="27432" anchor="t">
-                    <a:solidFill>
-                      <a:srgbClr val="FBFAF8"/>
-                    </a:solidFill>
-                  </a:tcPr>
-                </a:tc>
-                <a:tc>
-                  <a:txBody>
-                    <a:bodyPr wrap="square"/>
-                    <a:lstStyle/>
-                    <a:p>
-                      <a:r>
-                        <a:rPr sz="1100" b="0" i="0">
-                          <a:solidFill>
-                            <a:srgbClr val="14171B"/>
-                          </a:solidFill>
-                          <a:latin typeface="Helvetica Neue"/>
-                        </a:rPr>
-                        <a:t>doc</a:t>
-                      </a:r>
-                    </a:p>
-                  </a:txBody>
-                  <a:tcPr marL="64008" marR="64008" marT="27432" marB="27432" anchor="t">
-                    <a:solidFill>
-                      <a:srgbClr val="FBFAF8"/>
-                    </a:solidFill>
-                  </a:tcPr>
-                </a:tc>
-                <a:tc>
-                  <a:txBody>
-                    <a:bodyPr wrap="square"/>
-                    <a:lstStyle/>
-                    <a:p>
-                      <a:r>
-                        <a:rPr sz="1100" b="0" i="0">
-                          <a:solidFill>
-                            <a:srgbClr val="14171B"/>
-                          </a:solidFill>
-                          <a:latin typeface="Helvetica Neue"/>
-                        </a:rPr>
-                        <a:t>3,338</a:t>
-                      </a:r>
-                    </a:p>
-                  </a:txBody>
-                  <a:tcPr marL="64008" marR="64008" marT="27432" marB="27432" anchor="t">
-                    <a:solidFill>
-                      <a:srgbClr val="FBFAF8"/>
-                    </a:solidFill>
-                  </a:tcPr>
-                </a:tc>
-                <a:tc>
-                  <a:txBody>
-                    <a:bodyPr wrap="square"/>
-                    <a:lstStyle/>
-                    <a:p>
-                      <a:r>
-                        <a:rPr sz="1100" b="0" i="0">
-                          <a:solidFill>
-                            <a:srgbClr val="14171B"/>
-                          </a:solidFill>
-                          <a:latin typeface="Helvetica Neue"/>
-                        </a:rPr>
-                        <a:t>One row per passage of text</a:t>
-                      </a:r>
-                    </a:p>
-                  </a:txBody>
-                  <a:tcPr marL="64008" marR="64008" marT="27432" marB="27432" anchor="t">
-                    <a:solidFill>
-                      <a:srgbClr val="FBFAF8"/>
-                    </a:solidFill>
-                  </a:tcPr>
-                </a:tc>
-              </a:tr>
-              <a:tr h="297180">
-                <a:tc>
-                  <a:txBody>
-                    <a:bodyPr wrap="square"/>
-                    <a:lstStyle/>
-                    <a:p>
-                      <a:r>
-                        <a:rPr sz="1100" b="0" i="0">
-                          <a:solidFill>
-                            <a:srgbClr val="14171B"/>
-                          </a:solidFill>
-                          <a:latin typeface="Helvetica Neue"/>
-                        </a:rPr>
-                        <a:t>je_raw_extractions</a:t>
-                      </a:r>
-                    </a:p>
-                  </a:txBody>
-                  <a:tcPr marL="64008" marR="64008" marT="27432" marB="27432" anchor="t">
-                    <a:solidFill>
-                      <a:srgbClr val="FBFAF8"/>
-                    </a:solidFill>
-                  </a:tcPr>
-                </a:tc>
-                <a:tc>
-                  <a:txBody>
-                    <a:bodyPr wrap="square"/>
-                    <a:lstStyle/>
-                    <a:p>
-                      <a:r>
-                        <a:rPr sz="1100" b="0" i="0">
-                          <a:solidFill>
-                            <a:srgbClr val="14171B"/>
-                          </a:solidFill>
-                          <a:latin typeface="Helvetica Neue"/>
-                        </a:rPr>
-                        <a:t>doc</a:t>
-                      </a:r>
-                    </a:p>
-                  </a:txBody>
-                  <a:tcPr marL="64008" marR="64008" marT="27432" marB="27432" anchor="t">
-                    <a:solidFill>
-                      <a:srgbClr val="FBFAF8"/>
-                    </a:solidFill>
-                  </a:tcPr>
-                </a:tc>
-                <a:tc>
-                  <a:txBody>
-                    <a:bodyPr wrap="square"/>
-                    <a:lstStyle/>
-                    <a:p>
-                      <a:r>
-                        <a:rPr sz="1100" b="0" i="0">
-                          <a:solidFill>
-                            <a:srgbClr val="14171B"/>
-                          </a:solidFill>
-                          <a:latin typeface="Helvetica Neue"/>
-                        </a:rPr>
-                        <a:t>3,338</a:t>
-                      </a:r>
-                    </a:p>
-                  </a:txBody>
-                  <a:tcPr marL="64008" marR="64008" marT="27432" marB="27432" anchor="t">
-                    <a:solidFill>
-                      <a:srgbClr val="FBFAF8"/>
-                    </a:solidFill>
-                  </a:tcPr>
-                </a:tc>
-                <a:tc>
-                  <a:txBody>
-                    <a:bodyPr wrap="square"/>
-                    <a:lstStyle/>
-                    <a:p>
-                      <a:r>
-                        <a:rPr sz="1100" b="0" i="0">
-                          <a:solidFill>
-                            <a:srgbClr val="14171B"/>
-                          </a:solidFill>
-                          <a:latin typeface="Helvetica Neue"/>
-                        </a:rPr>
-                        <a:t>The model's raw output, kept for audit</a:t>
-                      </a:r>
-                    </a:p>
-                  </a:txBody>
-                  <a:tcPr marL="64008" marR="64008" marT="27432" marB="27432" anchor="t">
-                    <a:solidFill>
-                      <a:srgbClr val="FBFAF8"/>
-                    </a:solidFill>
-                  </a:tcPr>
-                </a:tc>
-              </a:tr>
-              <a:tr h="466344">
-                <a:tc>
-                  <a:txBody>
-                    <a:bodyPr wrap="square"/>
-                    <a:lstStyle/>
-                    <a:p>
-                      <a:r>
-                        <a:rPr sz="1100" b="0" i="0">
-                          <a:solidFill>
-                            <a:srgbClr val="14171B"/>
-                          </a:solidFill>
-                          <a:latin typeface="Helvetica Neue"/>
-                        </a:rPr>
-                        <a:t>je_entities</a:t>
-                      </a:r>
-                    </a:p>
-                  </a:txBody>
-                  <a:tcPr marL="64008" marR="64008" marT="27432" marB="27432" anchor="t">
-                    <a:solidFill>
-                      <a:srgbClr val="FBFAF8"/>
-                    </a:solidFill>
-                  </a:tcPr>
-                </a:tc>
-                <a:tc>
-                  <a:txBody>
-                    <a:bodyPr wrap="square"/>
-                    <a:lstStyle/>
-                    <a:p>
-                      <a:r>
-                        <a:rPr sz="1100" b="0" i="0">
-                          <a:solidFill>
-                            <a:srgbClr val="14171B"/>
-                          </a:solidFill>
-                          <a:latin typeface="Helvetica Neue"/>
-                        </a:rPr>
-                        <a:t>doc</a:t>
-                      </a:r>
-                    </a:p>
-                  </a:txBody>
-                  <a:tcPr marL="64008" marR="64008" marT="27432" marB="27432" anchor="t">
-                    <a:solidFill>
-                      <a:srgbClr val="FBFAF8"/>
-                    </a:solidFill>
-                  </a:tcPr>
-                </a:tc>
-                <a:tc>
-                  <a:txBody>
-                    <a:bodyPr wrap="square"/>
-                    <a:lstStyle/>
-                    <a:p>
-                      <a:r>
-                        <a:rPr sz="1100" b="0" i="0">
-                          <a:solidFill>
-                            <a:srgbClr val="14171B"/>
-                          </a:solidFill>
-                          <a:latin typeface="Helvetica Neue"/>
-                        </a:rPr>
-                        <a:t>2,014</a:t>
-                      </a:r>
-                    </a:p>
-                  </a:txBody>
-                  <a:tcPr marL="64008" marR="64008" marT="27432" marB="27432" anchor="t">
-                    <a:solidFill>
-                      <a:srgbClr val="FBFAF8"/>
-                    </a:solidFill>
-                  </a:tcPr>
-                </a:tc>
-                <a:tc>
-                  <a:txBody>
-                    <a:bodyPr wrap="square"/>
-                    <a:lstStyle/>
-                    <a:p>
-                      <a:r>
-                        <a:rPr sz="1100" b="0" i="0">
-                          <a:solidFill>
-                            <a:srgbClr val="14171B"/>
-                          </a:solidFill>
-                          <a:latin typeface="Helvetica Neue"/>
-                        </a:rPr>
-                        <a:t>person · organization · location · facility · court</a:t>
-                      </a:r>
-                    </a:p>
-                  </a:txBody>
-                  <a:tcPr marL="64008" marR="64008" marT="27432" marB="27432" anchor="t">
-                    <a:solidFill>
-                      <a:srgbClr val="FBFAF8"/>
-                    </a:solidFill>
-                  </a:tcPr>
-                </a:tc>
-              </a:tr>
-              <a:tr h="297180">
-                <a:tc>
-                  <a:txBody>
-                    <a:bodyPr wrap="square"/>
-                    <a:lstStyle/>
-                    <a:p>
-                      <a:r>
-                        <a:rPr sz="1100" b="0" i="0">
-                          <a:solidFill>
-                            <a:srgbClr val="14171B"/>
-                          </a:solidFill>
-                          <a:latin typeface="Helvetica Neue"/>
-                        </a:rPr>
-                        <a:t>je_mentioned_in</a:t>
-                      </a:r>
-                    </a:p>
-                  </a:txBody>
-                  <a:tcPr marL="64008" marR="64008" marT="27432" marB="27432" anchor="t">
-                    <a:solidFill>
-                      <a:srgbClr val="FBFAF8"/>
-                    </a:solidFill>
-                  </a:tcPr>
-                </a:tc>
-                <a:tc>
-                  <a:txBody>
-                    <a:bodyPr wrap="square"/>
-                    <a:lstStyle/>
-                    <a:p>
-                      <a:r>
-                        <a:rPr sz="1100" b="0" i="0">
-                          <a:solidFill>
-                            <a:srgbClr val="14171B"/>
-                          </a:solidFill>
-                          <a:latin typeface="Helvetica Neue"/>
-                        </a:rPr>
-                        <a:t>edge</a:t>
-                      </a:r>
-                    </a:p>
-                  </a:txBody>
-                  <a:tcPr marL="64008" marR="64008" marT="27432" marB="27432" anchor="t">
-                    <a:solidFill>
-                      <a:srgbClr val="FBFAF8"/>
-                    </a:solidFill>
-                  </a:tcPr>
-                </a:tc>
-                <a:tc>
-                  <a:txBody>
-                    <a:bodyPr wrap="square"/>
-                    <a:lstStyle/>
-                    <a:p>
-                      <a:r>
-                        <a:rPr sz="1100" b="0" i="0">
-                          <a:solidFill>
-                            <a:srgbClr val="14171B"/>
-                          </a:solidFill>
-                          <a:latin typeface="Helvetica Neue"/>
-                        </a:rPr>
-                        <a:t>19,009</a:t>
-                      </a:r>
-                    </a:p>
-                  </a:txBody>
-                  <a:tcPr marL="64008" marR="64008" marT="27432" marB="27432" anchor="t">
-                    <a:solidFill>
-                      <a:srgbClr val="FBFAF8"/>
-                    </a:solidFill>
-                  </a:tcPr>
-                </a:tc>
-                <a:tc>
-                  <a:txBody>
-                    <a:bodyPr wrap="square"/>
-                    <a:lstStyle/>
-                    <a:p>
-                      <a:r>
-                        <a:rPr sz="1100" b="0" i="0">
-                          <a:solidFill>
-                            <a:srgbClr val="14171B"/>
-                          </a:solidFill>
-                          <a:latin typeface="Helvetica Neue"/>
-                        </a:rPr>
-                        <a:t>Which name appears in which passage</a:t>
-                      </a:r>
-                    </a:p>
-                  </a:txBody>
-                  <a:tcPr marL="64008" marR="64008" marT="27432" marB="27432" anchor="t">
-                    <a:solidFill>
-                      <a:srgbClr val="FBFAF8"/>
-                    </a:solidFill>
-                  </a:tcPr>
-                </a:tc>
-              </a:tr>
-              <a:tr h="297180">
-                <a:tc>
-                  <a:txBody>
-                    <a:bodyPr wrap="square"/>
-                    <a:lstStyle/>
-                    <a:p>
-                      <a:r>
-                        <a:rPr sz="1100" b="0" i="0">
-                          <a:solidFill>
-                            <a:srgbClr val="14171B"/>
-                          </a:solidFill>
-                          <a:latin typeface="Helvetica Neue"/>
-                        </a:rPr>
-                        <a:t>je_same_as</a:t>
-                      </a:r>
-                    </a:p>
-                  </a:txBody>
-                  <a:tcPr marL="64008" marR="64008" marT="27432" marB="27432" anchor="t">
-                    <a:solidFill>
-                      <a:srgbClr val="FBFAF8"/>
-                    </a:solidFill>
-                  </a:tcPr>
-                </a:tc>
-                <a:tc>
-                  <a:txBody>
-                    <a:bodyPr wrap="square"/>
-                    <a:lstStyle/>
-                    <a:p>
-                      <a:r>
-                        <a:rPr sz="1100" b="0" i="0">
-                          <a:solidFill>
-                            <a:srgbClr val="14171B"/>
-                          </a:solidFill>
-                          <a:latin typeface="Helvetica Neue"/>
-                        </a:rPr>
-                        <a:t>edge</a:t>
-                      </a:r>
-                    </a:p>
-                  </a:txBody>
-                  <a:tcPr marL="64008" marR="64008" marT="27432" marB="27432" anchor="t">
-                    <a:solidFill>
-                      <a:srgbClr val="FBFAF8"/>
-                    </a:solidFill>
-                  </a:tcPr>
-                </a:tc>
-                <a:tc>
-                  <a:txBody>
-                    <a:bodyPr wrap="square"/>
-                    <a:lstStyle/>
-                    <a:p>
-                      <a:r>
-                        <a:rPr sz="1100" b="0" i="0">
-                          <a:solidFill>
-                            <a:srgbClr val="14171B"/>
-                          </a:solidFill>
-                          <a:latin typeface="Helvetica Neue"/>
-                        </a:rPr>
-                        <a:t>488</a:t>
-                      </a:r>
-                    </a:p>
-                  </a:txBody>
-                  <a:tcPr marL="64008" marR="64008" marT="27432" marB="27432" anchor="t">
-                    <a:solidFill>
-                      <a:srgbClr val="FBFAF8"/>
-                    </a:solidFill>
-                  </a:tcPr>
-                </a:tc>
-                <a:tc>
-                  <a:txBody>
-                    <a:bodyPr wrap="square"/>
-                    <a:lstStyle/>
-                    <a:p>
-                      <a:r>
-                        <a:rPr sz="1100" b="0" i="0">
-                          <a:solidFill>
-                            <a:srgbClr val="14171B"/>
-                          </a:solidFill>
-                          <a:latin typeface="Helvetica Neue"/>
-                        </a:rPr>
-                        <a:t>Two names, same person</a:t>
-                      </a:r>
-                    </a:p>
-                  </a:txBody>
-                  <a:tcPr marL="64008" marR="64008" marT="27432" marB="27432" anchor="t">
-                    <a:solidFill>
-                      <a:srgbClr val="FBFAF8"/>
-                    </a:solidFill>
-                  </a:tcPr>
-                </a:tc>
-              </a:tr>
-              <a:tr h="466344">
-                <a:tc>
-                  <a:txBody>
-                    <a:bodyPr wrap="square"/>
-                    <a:lstStyle/>
-                    <a:p>
-                      <a:r>
-                        <a:rPr sz="1100" b="0" i="0">
-                          <a:solidFill>
-                            <a:srgbClr val="14171B"/>
-                          </a:solidFill>
-                          <a:latin typeface="Helvetica Neue"/>
-                        </a:rPr>
-                        <a:t>je_possible_duplicates</a:t>
-                      </a:r>
-                    </a:p>
-                  </a:txBody>
-                  <a:tcPr marL="64008" marR="64008" marT="27432" marB="27432" anchor="t">
-                    <a:solidFill>
-                      <a:srgbClr val="FBFAF8"/>
-                    </a:solidFill>
-                  </a:tcPr>
-                </a:tc>
-                <a:tc>
-                  <a:txBody>
-                    <a:bodyPr wrap="square"/>
-                    <a:lstStyle/>
-                    <a:p>
-                      <a:r>
-                        <a:rPr sz="1100" b="0" i="0">
-                          <a:solidFill>
-                            <a:srgbClr val="14171B"/>
-                          </a:solidFill>
-                          <a:latin typeface="Helvetica Neue"/>
-                        </a:rPr>
-                        <a:t>edge</a:t>
-                      </a:r>
-                    </a:p>
-                  </a:txBody>
-                  <a:tcPr marL="64008" marR="64008" marT="27432" marB="27432" anchor="t">
-                    <a:solidFill>
-                      <a:srgbClr val="FBFAF8"/>
-                    </a:solidFill>
-                  </a:tcPr>
-                </a:tc>
-                <a:tc>
-                  <a:txBody>
-                    <a:bodyPr wrap="square"/>
-                    <a:lstStyle/>
-                    <a:p>
-                      <a:r>
-                        <a:rPr sz="1100" b="0" i="0">
-                          <a:solidFill>
-                            <a:srgbClr val="14171B"/>
-                          </a:solidFill>
-                          <a:latin typeface="Helvetica Neue"/>
-                        </a:rPr>
-                        <a:t>413</a:t>
-                      </a:r>
-                    </a:p>
-                  </a:txBody>
-                  <a:tcPr marL="64008" marR="64008" marT="27432" marB="27432" anchor="t">
-                    <a:solidFill>
-                      <a:srgbClr val="FBFAF8"/>
-                    </a:solidFill>
-                  </a:tcPr>
-                </a:tc>
-                <a:tc>
-                  <a:txBody>
-                    <a:bodyPr wrap="square"/>
-                    <a:lstStyle/>
-                    <a:p>
-                      <a:r>
-                        <a:rPr sz="1100" b="0" i="0">
-                          <a:solidFill>
-                            <a:srgbClr val="14171B"/>
-                          </a:solidFill>
-                          <a:latin typeface="Helvetica Neue"/>
-                        </a:rPr>
-                        <a:t>Matches the system refused to make, queued for review</a:t>
-                      </a:r>
-                    </a:p>
-                  </a:txBody>
-                  <a:tcPr marL="64008" marR="64008" marT="27432" marB="27432" anchor="t">
-                    <a:solidFill>
-                      <a:srgbClr val="FBFAF8"/>
-                    </a:solidFill>
-                  </a:tcPr>
-                </a:tc>
-              </a:tr>
-            </a:tbl>
-          </a:graphicData>
-        </a:graphic>
-      </p:graphicFrame>
-      <p:sp>
-        <p:nvSpPr>
-          <p:cNvPr id="7" name="TextBox 6"/>
+      <p:sp>
+        <p:nvSpPr>
+          <p:cNvPr id="6" name="TextBox 5"/>
           <p:cNvSpPr txBox="1"/>
           <p:nvPr/>
         </p:nvSpPr>
         <p:spPr>
           <a:xfrm>
-            <a:off x="566928" y="4133088"/>
-            <a:ext cx="11057839" cy="1106932"/>
+            <a:off x="566928" y="1600200"/>
+            <a:ext cx="11057839" cy="1798320"/>
           </a:xfrm>
           <a:prstGeom prst="rect">
             <a:avLst/>
@@ -12106,17 +10677,74 @@
                 <a:spcPts val="0"/>
               </a:spcBef>
               <a:spcAft>
-                <a:spcPts val="200"/>
-              </a:spcAft>
-            </a:pPr>
-            <a:r>
-              <a:rPr sz="1100" b="1" i="0">
-                <a:solidFill>
-                  <a:srgbClr val="4A5158"/>
+                <a:spcPts val="300"/>
+              </a:spcAft>
+            </a:pPr>
+            <a:r>
+              <a:rPr sz="1200" b="0" i="0">
+                <a:solidFill>
+                  <a:srgbClr val="14171B"/>
                 </a:solidFill>
                 <a:latin typeface="Helvetica Neue"/>
               </a:rPr>
-              <a:t>EVIDENCE ATTACHES TO THE MENTION, NOT THE PERSON</a:t>
+              <a:t>01 A question about a person — watch the graph path. 1,770 passages reachable, eight returned.</a:t>
+            </a:r>
+          </a:p>
+          <a:p>
+            <a:pPr>
+              <a:spcBef>
+                <a:spcPts val="500"/>
+              </a:spcBef>
+              <a:spcAft>
+                <a:spcPts val="300"/>
+              </a:spcAft>
+            </a:pPr>
+            <a:r>
+              <a:rPr sz="1200" b="0" i="0">
+                <a:solidFill>
+                  <a:srgbClr val="14171B"/>
+                </a:solidFill>
+                <a:latin typeface="Helvetica Neue"/>
+              </a:rPr>
+              <a:t>02 A question the documents cannot answer — it reports that it found no name to start from, then declines: "no judicial opinions, only party filings."</a:t>
+            </a:r>
+          </a:p>
+          <a:p>
+            <a:pPr>
+              <a:spcBef>
+                <a:spcPts val="500"/>
+              </a:spcBef>
+              <a:spcAft>
+                <a:spcPts val="300"/>
+              </a:spcAft>
+            </a:pPr>
+            <a:r>
+              <a:rPr sz="1200" b="0" i="0">
+                <a:solidFill>
+                  <a:srgbClr val="14171B"/>
+                </a:solidFill>
+                <a:latin typeface="Helvetica Neue"/>
+              </a:rPr>
+              <a:t>03 The graph itself — Joseph Recarey's seven different spellings. Then Jane Doe 2, and fifteen matches the system refused to make.</a:t>
+            </a:r>
+          </a:p>
+          <a:p>
+            <a:pPr>
+              <a:spcBef>
+                <a:spcPts val="500"/>
+              </a:spcBef>
+              <a:spcAft>
+                <a:spcPts val="300"/>
+              </a:spcAft>
+            </a:pPr>
+            <a:r>
+              <a:rPr sz="1200" b="0" i="0">
+                <a:solidFill>
+                  <a:srgbClr val="14171B"/>
+                </a:solidFill>
+                <a:latin typeface="Helvetica Neue"/>
+              </a:rPr>
+              <a:t>04 AQL, ArangoDB's query language — the name family, the review queue, and how much more evidence a family reaches than a single spelling.</a:t>
             </a:r>
           </a:p>
           <a:p>
@@ -12129,51 +10757,13 @@
               </a:spcAft>
             </a:pPr>
             <a:r>
-              <a:rPr sz="1200" b="0" i="0">
-                <a:solidFill>
-                  <a:srgbClr val="14171B"/>
+              <a:rPr sz="1200" b="0" i="1">
+                <a:solidFill>
+                  <a:srgbClr val="1E3A5F"/>
                 </a:solidFill>
                 <a:latin typeface="Helvetica Neue"/>
               </a:rPr>
-              <a:t>A role and its supporting quote belong to one mention in one passage. Merging two names can never overwrite the trail.</a:t>
-            </a:r>
-          </a:p>
-          <a:p>
-            <a:pPr>
-              <a:spcBef>
-                <a:spcPts val="1200"/>
-              </a:spcBef>
-              <a:spcAft>
-                <a:spcPts val="200"/>
-              </a:spcAft>
-            </a:pPr>
-            <a:r>
-              <a:rPr sz="1100" b="1" i="0">
-                <a:solidFill>
-                  <a:srgbClr val="4A5158"/>
-                </a:solidFill>
-                <a:latin typeface="Helvetica Neue"/>
-              </a:rPr>
-              <a:t>LINKS ARE ADDED, NEVER MERGED AWAY</a:t>
-            </a:r>
-          </a:p>
-          <a:p>
-            <a:pPr>
-              <a:spcBef>
-                <a:spcPts val="700"/>
-              </a:spcBef>
-              <a:spcAft>
-                <a:spcPts val="400"/>
-              </a:spcAft>
-            </a:pPr>
-            <a:r>
-              <a:rPr sz="1200" b="0" i="0">
-                <a:solidFill>
-                  <a:srgbClr val="14171B"/>
-                </a:solidFill>
-                <a:latin typeface="Helvetica Neue"/>
-              </a:rPr>
-              <a:t>Nothing is deleted. Search follows a whole name family in one step, and a reviewer can undo any single link.</a:t>
+              <a:t>Watch the channel tags: vector#26 lexical#7 graph#11 means three independent methods each picked the same passage. When they agree, that is the strongest signal the system produces.</a:t>
             </a:r>
           </a:p>
         </p:txBody>
@@ -12283,7 +10873,7 @@
                 </a:solidFill>
                 <a:latin typeface="Menlo"/>
               </a:rPr>
-              <a:t>THE SOLUTION · LIVE</a:t>
+              <a:t>THE SOLUTION · PRODUCTION</a:t>
             </a:r>
           </a:p>
         </p:txBody>
@@ -12325,7 +10915,7 @@
                 </a:solidFill>
                 <a:latin typeface="Georgia"/>
               </a:rPr>
-              <a:t>Demonstration</a:t>
+              <a:t>What I'd change to run this at scale</a:t>
             </a:r>
           </a:p>
         </p:txBody>
@@ -12383,7 +10973,7 @@
         <p:spPr>
           <a:xfrm>
             <a:off x="566928" y="1600200"/>
-            <a:ext cx="11057839" cy="1798320"/>
+            <a:ext cx="11057839" cy="4352036"/>
           </a:xfrm>
           <a:prstGeom prst="rect">
             <a:avLst/>
@@ -12401,7 +10991,26 @@
                 <a:spcPts val="0"/>
               </a:spcBef>
               <a:spcAft>
+                <a:spcPts val="400"/>
+              </a:spcAft>
+            </a:pPr>
+            <a:r>
+              <a:rPr sz="1400" b="0" i="0">
+                <a:solidFill>
+                  <a:srgbClr val="4A5158"/>
+                </a:solidFill>
+                <a:latin typeface="Helvetica Neue"/>
+              </a:rPr>
+              <a:t>What I built proves the idea. It is not what I would deploy.</a:t>
+            </a:r>
+          </a:p>
+          <a:p>
+            <a:pPr>
+              <a:spcBef>
                 <a:spcPts val="300"/>
+              </a:spcBef>
+              <a:spcAft>
+                <a:spcPts val="100"/>
               </a:spcAft>
             </a:pPr>
             <a:r>
@@ -12411,16 +11020,35 @@
                 </a:solidFill>
                 <a:latin typeface="Helvetica Neue"/>
               </a:rPr>
-              <a:t>01 A question about a person — watch the graph path. 1,770 passages reachable, eight returned.</a:t>
-            </a:r>
-          </a:p>
-          <a:p>
-            <a:pPr>
-              <a:spcBef>
-                <a:spcPts val="500"/>
-              </a:spcBef>
-              <a:spcAft>
+              <a:t>•  I would delete the second database. The graph is in ArangoDB and the text and vectors are in LanceDB. ArangoDB 3.12 has a native vector index, so the two collapse into one.</a:t>
+            </a:r>
+          </a:p>
+          <a:p>
+            <a:pPr lvl="1">
+              <a:spcBef>
+                <a:spcPts val="0"/>
+              </a:spcBef>
+              <a:spcAft>
+                <a:spcPts val="400"/>
+              </a:spcAft>
+            </a:pPr>
+            <a:r>
+              <a:rPr sz="1100" b="0" i="1">
+                <a:solidFill>
+                  <a:srgbClr val="4A5158"/>
+                </a:solidFill>
+                <a:latin typeface="Georgia"/>
+              </a:rPr>
+              <a:t>In other words: a whole class of bug — the two stores quietly disagreeing — stops existing, and a join across two systems becomes one lookup.</a:t>
+            </a:r>
+          </a:p>
+          <a:p>
+            <a:pPr>
+              <a:spcBef>
                 <a:spcPts val="300"/>
+              </a:spcBef>
+              <a:spcAft>
+                <a:spcPts val="100"/>
               </a:spcAft>
             </a:pPr>
             <a:r>
@@ -12430,16 +11058,35 @@
                 </a:solidFill>
                 <a:latin typeface="Helvetica Neue"/>
               </a:rPr>
-              <a:t>02 A question the documents cannot answer — it reports that it found no name to start from, then declines: "no judicial opinions, only party filings."</a:t>
-            </a:r>
-          </a:p>
-          <a:p>
-            <a:pPr>
-              <a:spcBef>
-                <a:spcPts val="500"/>
-              </a:spcBef>
-              <a:spcAft>
+              <a:t>•  I would shard the graph by legal matter. A SmartGraph is split on an attribute you nominate; put every vertex of one matter on the same shard and a traversal never crosses the network. It is also the customer boundary.</a:t>
+            </a:r>
+          </a:p>
+          <a:p>
+            <a:pPr lvl="1">
+              <a:spcBef>
+                <a:spcPts val="0"/>
+              </a:spcBef>
+              <a:spcAft>
+                <a:spcPts val="400"/>
+              </a:spcAft>
+            </a:pPr>
+            <a:r>
+              <a:rPr sz="1100" b="0" i="1">
+                <a:solidFill>
+                  <a:srgbClr val="4A5158"/>
+                </a:solidFill>
+                <a:latin typeface="Georgia"/>
+              </a:rPr>
+              <a:t>In other words: one client's documents stay in one place — faster to query, and far easier to explain to their auditor.</a:t>
+            </a:r>
+          </a:p>
+          <a:p>
+            <a:pPr>
+              <a:spcBef>
                 <a:spcPts val="300"/>
+              </a:spcBef>
+              <a:spcAft>
+                <a:spcPts val="100"/>
               </a:spcAft>
             </a:pPr>
             <a:r>
@@ -12449,16 +11096,35 @@
                 </a:solidFill>
                 <a:latin typeface="Helvetica Neue"/>
               </a:rPr>
-              <a:t>03 The graph itself — Joseph Recarey's seven different spellings. Then Jane Doe 2, and fifteen matches the system refused to make.</a:t>
-            </a:r>
-          </a:p>
-          <a:p>
-            <a:pPr>
-              <a:spcBef>
-                <a:spcPts val="500"/>
-              </a:spcBef>
-              <a:spcAft>
+              <a:t>•  I would keep the entity index on every node as a satellite collection, because every single traversal touches it.</a:t>
+            </a:r>
+          </a:p>
+          <a:p>
+            <a:pPr lvl="1">
+              <a:spcBef>
+                <a:spcPts val="0"/>
+              </a:spcBef>
+              <a:spcAft>
+                <a:spcPts val="400"/>
+              </a:spcAft>
+            </a:pPr>
+            <a:r>
+              <a:rPr sz="1100" b="0" i="1">
+                <a:solidFill>
+                  <a:srgbClr val="4A5158"/>
+                </a:solidFill>
+                <a:latin typeface="Georgia"/>
+              </a:rPr>
+              <a:t>In other words: don't make the most-used lookup in the system take a network hop.</a:t>
+            </a:r>
+          </a:p>
+          <a:p>
+            <a:pPr>
+              <a:spcBef>
                 <a:spcPts val="300"/>
+              </a:spcBef>
+              <a:spcAft>
+                <a:spcPts val="100"/>
               </a:spcAft>
             </a:pPr>
             <a:r>
@@ -12468,7 +11134,64 @@
                 </a:solidFill>
                 <a:latin typeface="Helvetica Neue"/>
               </a:rPr>
-              <a:t>04 AQL, ArangoDB's query language — the name family, the review queue, and how much more evidence a family reaches than a single spelling.</a:t>
+              <a:t>•  I would budget and staff a human review step. 413 uncertain name matches are queued and nobody has looked at them. A wrong merge invents a connection between real people; a missed one only means we find less.</a:t>
+            </a:r>
+          </a:p>
+          <a:p>
+            <a:pPr lvl="1">
+              <a:spcBef>
+                <a:spcPts val="0"/>
+              </a:spcBef>
+              <a:spcAft>
+                <a:spcPts val="400"/>
+              </a:spcAft>
+            </a:pPr>
+            <a:r>
+              <a:rPr sz="1100" b="0" i="1">
+                <a:solidFill>
+                  <a:srgbClr val="4A5158"/>
+                </a:solidFill>
+                <a:latin typeface="Georgia"/>
+              </a:rPr>
+              <a:t>In other words: I would rather miss a link than invent one — and someone has to be paid to make that call.</a:t>
+            </a:r>
+          </a:p>
+          <a:p>
+            <a:pPr>
+              <a:spcBef>
+                <a:spcPts val="300"/>
+              </a:spcBef>
+              <a:spcAft>
+                <a:spcPts val="100"/>
+              </a:spcAft>
+            </a:pPr>
+            <a:r>
+              <a:rPr sz="1200" b="0" i="0">
+                <a:solidFill>
+                  <a:srgbClr val="14171B"/>
+                </a:solidFill>
+                <a:latin typeface="Helvetica Neue"/>
+              </a:rPr>
+              <a:t>•  Unsolved: adding documents without rebuilding. Matching names across all 190 filings took 19 hours, and that cost grows with the number of mentions, not the number of documents.</a:t>
+            </a:r>
+          </a:p>
+          <a:p>
+            <a:pPr lvl="1">
+              <a:spcBef>
+                <a:spcPts val="0"/>
+              </a:spcBef>
+              <a:spcAft>
+                <a:spcPts val="400"/>
+              </a:spcAft>
+            </a:pPr>
+            <a:r>
+              <a:rPr sz="1100" b="0" i="1">
+                <a:solidFill>
+                  <a:srgbClr val="4A5158"/>
+                </a:solidFill>
+                <a:latin typeface="Georgia"/>
+              </a:rPr>
+              <a:t>In other words: today, one new filing means redoing the whole graph. That is the hard problem, and I have not solved it.</a:t>
             </a:r>
           </a:p>
           <a:p>
@@ -12481,13 +11204,13 @@
               </a:spcAft>
             </a:pPr>
             <a:r>
-              <a:rPr sz="1200" b="0" i="1">
-                <a:solidFill>
-                  <a:srgbClr val="1E3A5F"/>
+              <a:rPr sz="1200" b="0" i="0">
+                <a:solidFill>
+                  <a:srgbClr val="A6382C"/>
                 </a:solidFill>
                 <a:latin typeface="Helvetica Neue"/>
               </a:rPr>
-              <a:t>Watch the channel tags: vector#26 lexical#7 graph#11 means three independent methods each picked the same passage. When they agree, that is the strongest signal the system produces.</a:t>
+              <a:t>A question for you, not a criticism: the Technical Overview says SmartGraph creation through the Importer currently accepts only shard_count: 1. So is the sharding above something I would have to build outside the Importer today?</a:t>
             </a:r>
           </a:p>
         </p:txBody>

--- a/presos/Graph_RAG_Interview_Deck.pptx
+++ b/presos/Graph_RAG_Interview_Deck.pptx
@@ -10155,7 +10155,7 @@
         <p:spPr>
           <a:xfrm>
             <a:off x="566928" y="1600200"/>
-            <a:ext cx="11057839" cy="5105400"/>
+            <a:ext cx="11057839" cy="4901183"/>
           </a:xfrm>
           <a:prstGeom prst="rect">
             <a:avLst/>
@@ -10221,7 +10221,7 @@
                 </a:solidFill>
                 <a:latin typeface="Helvetica Neue"/>
               </a:rPr>
-              <a:t>•  It groups the graph into topics and writes a report on each one. Global Search reads those reports instead of walking the graph.</a:t>
+              <a:t>•  Groups the graph into topics, and writes a report on each.</a:t>
             </a:r>
           </a:p>
           <a:p>
@@ -10259,7 +10259,7 @@
                 </a:solidFill>
                 <a:latin typeface="Helvetica Neue"/>
               </a:rPr>
-              <a:t>•  Those topic reports quietly absorb duplicate names. Two spellings of one person land in the same topic, so the report describes them as one person without anyone resolving anything.</a:t>
+              <a:t>•  Those reports absorb duplicate names on their own.</a:t>
             </a:r>
           </a:p>
           <a:p>
@@ -10278,7 +10278,7 @@
                 </a:solidFill>
                 <a:latin typeface="Georgia"/>
               </a:rPr>
-              <a:t>In other words: on well-named documents, the duplicate problem largely solves itself.</a:t>
+              <a:t>In other words: on well-named documents, the problem mostly solves itself.</a:t>
             </a:r>
           </a:p>
           <a:p>
@@ -10297,7 +10297,7 @@
                 </a:solidFill>
                 <a:latin typeface="Helvetica Neue"/>
               </a:rPr>
-              <a:t>•  That suits precise material — documentation, reports, structured filings, where a name is introduced once and then repeated exactly.</a:t>
+              <a:t>•  Best on precise material — documentation, reports, structured filings.</a:t>
             </a:r>
           </a:p>
           <a:p>
@@ -10316,7 +10316,7 @@
                 </a:solidFill>
                 <a:latin typeface="Georgia"/>
               </a:rPr>
-              <a:t>In other words: most business content is written this way, so it is a sensible thing to build for.</a:t>
+              <a:t>In other words: most business content is written this way.</a:t>
             </a:r>
           </a:p>
           <a:p>
@@ -10354,7 +10354,7 @@
                 </a:solidFill>
                 <a:latin typeface="Helvetica Neue"/>
               </a:rPr>
-              <a:t>•  That absorption stops at Local Search. Anchor on one of two nodes for the same person and you walk half their connections — with full confidence and no sign anything is missing.</a:t>
+              <a:t>•  That absorption stops at Local Search. Two nodes for one person, half the connections, no warning.</a:t>
             </a:r>
           </a:p>
           <a:p>
@@ -10373,7 +10373,7 @@
                 </a:solidFill>
                 <a:latin typeface="Georgia"/>
               </a:rPr>
-              <a:t>In other words: the answer looks complete when it is not, and nothing tells you.</a:t>
+              <a:t>In other words: the answer looks complete when it is not.</a:t>
             </a:r>
           </a:p>
           <a:p>
@@ -10392,7 +10392,7 @@
                 </a:solidFill>
                 <a:latin typeface="Helvetica Neue"/>
               </a:rPr>
-              <a:t>•  My documents name people loosely. The same man is RECAREY, JOSEPH in a caption, Det. Recarey in a transcript and Mr. Recarey in a brief — different spellings, mixed upper and lower case, honorifics, initials, maiden names, all inside one docket. So I added a step that works out which names refer to the same person: 19,009 mentions down to 2,014 people, 19.8 hours, the most expensive stage in the build.</a:t>
+              <a:t>•  My documents name people loosely. RECAREY, JOSEPH · Det. Recarey · Mr. Recarey — one man, one docket.</a:t>
             </a:r>
           </a:p>
           <a:p>
@@ -10417,6 +10417,90 @@
           <a:p>
             <a:pPr>
               <a:spcBef>
+                <a:spcPts val="600"/>
+              </a:spcBef>
+              <a:spcAft>
+                <a:spcPts val="200"/>
+              </a:spcAft>
+            </a:pPr>
+            <a:r>
+              <a:rPr sz="2000" b="1" i="0">
+                <a:solidFill>
+                  <a:srgbClr val="1E3A5F"/>
+                </a:solidFill>
+                <a:latin typeface="Georgia"/>
+              </a:rPr>
+              <a:t>19,009   </a:t>
+            </a:r>
+            <a:r>
+              <a:rPr sz="1000" b="0" i="0">
+                <a:solidFill>
+                  <a:srgbClr val="838B93"/>
+                </a:solidFill>
+                <a:latin typeface="Helvetica Neue"/>
+              </a:rPr>
+              <a:t>MENTIONS</a:t>
+            </a:r>
+          </a:p>
+          <a:p>
+            <a:pPr>
+              <a:spcBef>
+                <a:spcPts val="600"/>
+              </a:spcBef>
+              <a:spcAft>
+                <a:spcPts val="200"/>
+              </a:spcAft>
+            </a:pPr>
+            <a:r>
+              <a:rPr sz="2000" b="1" i="0">
+                <a:solidFill>
+                  <a:srgbClr val="1E3A5F"/>
+                </a:solidFill>
+                <a:latin typeface="Georgia"/>
+              </a:rPr>
+              <a:t>2,014   </a:t>
+            </a:r>
+            <a:r>
+              <a:rPr sz="1000" b="0" i="0">
+                <a:solidFill>
+                  <a:srgbClr val="838B93"/>
+                </a:solidFill>
+                <a:latin typeface="Helvetica Neue"/>
+              </a:rPr>
+              <a:t>ACTUAL PEOPLE</a:t>
+            </a:r>
+          </a:p>
+          <a:p>
+            <a:pPr>
+              <a:spcBef>
+                <a:spcPts val="600"/>
+              </a:spcBef>
+              <a:spcAft>
+                <a:spcPts val="200"/>
+              </a:spcAft>
+            </a:pPr>
+            <a:r>
+              <a:rPr sz="2000" b="1" i="0">
+                <a:solidFill>
+                  <a:srgbClr val="1E3A5F"/>
+                </a:solidFill>
+                <a:latin typeface="Georgia"/>
+              </a:rPr>
+              <a:t>19.8h   </a:t>
+            </a:r>
+            <a:r>
+              <a:rPr sz="1000" b="0" i="0">
+                <a:solidFill>
+                  <a:srgbClr val="838B93"/>
+                </a:solidFill>
+                <a:latin typeface="Helvetica Neue"/>
+              </a:rPr>
+              <a:t>THE MOST EXPENSIVE STAGE</a:t>
+            </a:r>
+          </a:p>
+          <a:p>
+            <a:pPr>
+              <a:spcBef>
                 <a:spcPts val="700"/>
               </a:spcBef>
               <a:spcAft>
@@ -10430,7 +10514,7 @@
                 </a:solidFill>
                 <a:latin typeface="Helvetica Neue"/>
               </a:rPr>
-              <a:t>Said carefully: I may well have missed something. I read their published documentation, not their source, and I did not test the product. Their docs do not describe an identity-resolution step, but that is an argument from silence — they may already handle this. The fair question is on their own ground, not mine: how does the Importer handle k8s versus Kubernetes, or AWS versus Amazon Web Services? Acronym expansion is the same problem.</a:t>
+              <a:t>Said carefully: I read their published documentation, not their source, and I did not test the product. Their docs describe no identity-resolution step, but that is an argument from silence. The fair question is on their ground, not mine: how does the Importer handle k8s versus Kubernetes?</a:t>
             </a:r>
           </a:p>
           <a:p>

--- a/presos/Graph_RAG_Interview_Deck.pptx
+++ b/presos/Graph_RAG_Interview_Deck.pptx
@@ -8026,7 +8026,7 @@
                 </a:solidFill>
                 <a:latin typeface="Georgia"/>
               </a:rPr>
-              <a:t>In other words: you can redraw the map without touching the thing your users talk to.</a:t>
+              <a:t>You can redraw the map without touching the thing your users talk to.</a:t>
             </a:r>
           </a:p>
           <a:p>
@@ -8064,7 +8064,7 @@
                 </a:solidFill>
                 <a:latin typeface="Georgia"/>
               </a:rPr>
-              <a:t>In other words: it reads everything once, so nobody on your team has to read it again.</a:t>
+              <a:t>It reads everything once, so nobody on your team has to read it again.</a:t>
             </a:r>
           </a:p>
           <a:p>
@@ -8102,7 +8102,7 @@
                 </a:solidFill>
                 <a:latin typeface="Georgia"/>
               </a:rPr>
-              <a:t>In other words: a person can check the work — which is the difference between a tool a regulated business can use and one it cannot.</a:t>
+              <a:t>A person can check the work — which is the difference between a tool a regulated business can use and one it cannot.</a:t>
             </a:r>
           </a:p>
           <a:p>
@@ -8140,7 +8140,7 @@
                 </a:solidFill>
                 <a:latin typeface="Georgia"/>
               </a:rPr>
-              <a:t>In other words: nothing leaves the building, and one database replaces three to secure and staff.</a:t>
+              <a:t>Nothing leaves the building, and one database replaces three to secure and staff.</a:t>
             </a:r>
           </a:p>
           <a:p>
@@ -8846,7 +8846,7 @@
         <p:spPr>
           <a:xfrm>
             <a:off x="566928" y="4222496"/>
-            <a:ext cx="11057839" cy="1572768"/>
+            <a:ext cx="11057839" cy="1374648"/>
           </a:xfrm>
           <a:prstGeom prst="rect">
             <a:avLst/>
@@ -8893,7 +8893,7 @@
                 </a:solidFill>
                 <a:latin typeface="Georgia"/>
               </a:rPr>
-              <a:t>In other words: "what is actually in here?" — the first thing anyone asks, and the one thing ordinary search cannot do.</a:t>
+              <a:t>"what is actually in here?" — the first thing anyone asks, and the one thing ordinary search cannot do.</a:t>
             </a:r>
           </a:p>
           <a:p>
@@ -8931,7 +8931,7 @@
                 </a:solidFill>
                 <a:latin typeface="Georgia"/>
               </a:rPr>
-              <a:t>In other words: this is where my design stops and theirs keeps going. I would rather show you the gap than hide it.</a:t>
+              <a:t>This is where my design stops and theirs keeps going. I would rather show you the gap than hide it.</a:t>
             </a:r>
           </a:p>
         </p:txBody>
@@ -10155,7 +10155,7 @@
         <p:spPr>
           <a:xfrm>
             <a:off x="566928" y="1600200"/>
-            <a:ext cx="11057839" cy="4901183"/>
+            <a:ext cx="11057839" cy="4703063"/>
           </a:xfrm>
           <a:prstGeom prst="rect">
             <a:avLst/>
@@ -10240,7 +10240,7 @@
                 </a:solidFill>
                 <a:latin typeface="Georgia"/>
               </a:rPr>
-              <a:t>In other words: it can describe a whole collection, not just find a passage in it.</a:t>
+              <a:t>It can describe a whole collection, not just find a passage in it.</a:t>
             </a:r>
           </a:p>
           <a:p>
@@ -10278,7 +10278,7 @@
                 </a:solidFill>
                 <a:latin typeface="Georgia"/>
               </a:rPr>
-              <a:t>In other words: on well-named documents, the problem mostly solves itself.</a:t>
+              <a:t>On well-named documents, the problem mostly solves itself.</a:t>
             </a:r>
           </a:p>
           <a:p>
@@ -10316,7 +10316,7 @@
                 </a:solidFill>
                 <a:latin typeface="Georgia"/>
               </a:rPr>
-              <a:t>In other words: most business content is written this way.</a:t>
+              <a:t>Most business content is written this way.</a:t>
             </a:r>
           </a:p>
           <a:p>
@@ -10373,7 +10373,7 @@
                 </a:solidFill>
                 <a:latin typeface="Georgia"/>
               </a:rPr>
-              <a:t>In other words: the answer looks complete when it is not.</a:t>
+              <a:t>The answer looks complete when it is not.</a:t>
             </a:r>
           </a:p>
           <a:p>
@@ -10411,7 +10411,7 @@
                 </a:solidFill>
                 <a:latin typeface="Georgia"/>
               </a:rPr>
-              <a:t>In other words: documents that name things consistently never need this step.</a:t>
+              <a:t>Documents that name things consistently never need this step.</a:t>
             </a:r>
           </a:p>
           <a:p>
@@ -11057,7 +11057,7 @@
         <p:spPr>
           <a:xfrm>
             <a:off x="566928" y="1600200"/>
-            <a:ext cx="11057839" cy="4352036"/>
+            <a:ext cx="11057839" cy="4153915"/>
           </a:xfrm>
           <a:prstGeom prst="rect">
             <a:avLst/>
@@ -11123,7 +11123,7 @@
                 </a:solidFill>
                 <a:latin typeface="Georgia"/>
               </a:rPr>
-              <a:t>In other words: a whole class of bug — the two stores quietly disagreeing — stops existing, and a join across two systems becomes one lookup.</a:t>
+              <a:t>A whole class of bug — the two stores quietly disagreeing — stops existing, and a join across two systems becomes one lookup.</a:t>
             </a:r>
           </a:p>
           <a:p>
@@ -11161,7 +11161,7 @@
                 </a:solidFill>
                 <a:latin typeface="Georgia"/>
               </a:rPr>
-              <a:t>In other words: one client's documents stay in one place — faster to query, and far easier to explain to their auditor.</a:t>
+              <a:t>One client's documents stay in one place — faster to query, and far easier to explain to their auditor.</a:t>
             </a:r>
           </a:p>
           <a:p>
@@ -11199,7 +11199,7 @@
                 </a:solidFill>
                 <a:latin typeface="Georgia"/>
               </a:rPr>
-              <a:t>In other words: don't make the most-used lookup in the system take a network hop.</a:t>
+              <a:t>Don't make the most-used lookup in the system take a network hop.</a:t>
             </a:r>
           </a:p>
           <a:p>
@@ -11237,7 +11237,7 @@
                 </a:solidFill>
                 <a:latin typeface="Georgia"/>
               </a:rPr>
-              <a:t>In other words: I would rather miss a link than invent one — and someone has to be paid to make that call.</a:t>
+              <a:t>I would rather miss a link than invent one — and someone has to be paid to make that call.</a:t>
             </a:r>
           </a:p>
           <a:p>
@@ -11275,7 +11275,7 @@
                 </a:solidFill>
                 <a:latin typeface="Georgia"/>
               </a:rPr>
-              <a:t>In other words: today, one new filing means redoing the whole graph. That is the hard problem, and I have not solved it.</a:t>
+              <a:t>Today, one new filing means redoing the whole graph. That is the hard problem, and I have not solved it.</a:t>
             </a:r>
           </a:p>
           <a:p>

--- a/presos/Graph_RAG_Interview_Deck.pptx
+++ b/presos/Graph_RAG_Interview_Deck.pptx
@@ -19,6 +19,8 @@
     <p:sldId id="267" r:id="rId19"/>
     <p:sldId id="268" r:id="rId20"/>
     <p:sldId id="269" r:id="rId21"/>
+    <p:sldId id="270" r:id="rId22"/>
+    <p:sldId id="271" r:id="rId23"/>
   </p:sldIdLst>
   <p:sldSz cx="12191695" cy="6858000" type="screen4x3"/>
   <p:notesSz cx="6858000" cy="9144000"/>
@@ -965,7 +967,167 @@
           </a:p>
           <a:p>
             <a:r>
-              <a:t>Keep this slide in reserve. If the panel asks "what's left", it is the answer. If they don't, do not volunteer all five — slide 11 has already established the candour.</a:t>
+              <a:t>Keep this slide in reserve. If the panel asks "what's left", it is the answer. If they don't, do not volunteer all five — slide 09 has already established the candour.</a:t>
+            </a:r>
+          </a:p>
+        </p:txBody>
+      </p:sp>
+      <p:sp>
+        <p:nvSpPr>
+          <p:cNvPr id="4" name="Slide Number Placeholder 3"/>
+          <p:cNvSpPr>
+            <a:spLocks noGrp="1"/>
+          </p:cNvSpPr>
+          <p:nvPr>
+            <p:ph type="sldNum" idx="5" sz="quarter"/>
+          </p:nvPr>
+        </p:nvSpPr>
+        <p:spPr/>
+      </p:sp>
+    </p:spTree>
+  </p:cSld>
+  <p:clrMapOvr>
+    <a:masterClrMapping/>
+  </p:clrMapOvr>
+</p:notes>
+</file>
+
+<file path=ppt/notesSlides/notesSlide15.xml><?xml version="1.0" encoding="utf-8"?>
+<p:notes xmlns:a="http://schemas.openxmlformats.org/drawingml/2006/main" xmlns:p="http://schemas.openxmlformats.org/presentationml/2006/main" xmlns:r="http://schemas.openxmlformats.org/officeDocument/2006/relationships">
+  <p:cSld>
+    <p:spTree>
+      <p:nvGrpSpPr>
+        <p:cNvPr id="1" name=""/>
+        <p:cNvGrpSpPr/>
+        <p:nvPr/>
+      </p:nvGrpSpPr>
+      <p:grpSpPr>
+        <a:xfrm>
+          <a:off x="0" y="0"/>
+          <a:ext cx="0" cy="0"/>
+          <a:chOff x="0" y="0"/>
+          <a:chExt cx="0" cy="0"/>
+        </a:xfrm>
+      </p:grpSpPr>
+      <p:sp>
+        <p:nvSpPr>
+          <p:cNvPr id="2" name="Slide Image Placeholder 1"/>
+          <p:cNvSpPr>
+            <a:spLocks noGrp="1"/>
+          </p:cNvSpPr>
+          <p:nvPr>
+            <p:ph type="sldImg" idx="2"/>
+          </p:nvPr>
+        </p:nvSpPr>
+        <p:spPr/>
+      </p:sp>
+      <p:sp>
+        <p:nvSpPr>
+          <p:cNvPr id="3" name="Notes Placeholder 2"/>
+          <p:cNvSpPr>
+            <a:spLocks noGrp="1"/>
+          </p:cNvSpPr>
+          <p:nvPr>
+            <p:ph type="body" idx="3" sz="quarter"/>
+          </p:nvPr>
+        </p:nvSpPr>
+        <p:spPr/>
+        <p:txBody>
+          <a:bodyPr/>
+          <a:lstStyle/>
+          <a:p>
+            <a:r>
+              <a:t>Why merge-as-an-edge matters more than it sounds. The alternative is to pick a winner, rewrite every edge pointing at the loser, and delete it. That is expensive, it destroys the record of what was originally decided, and it cannot be undone. Keeping identity as a link means a wrong merge is one delete away from being fixed, and every mention still points where it was first resolved — which is what lets you audit the decision later.</a:t>
+            </a:r>
+          </a:p>
+          <a:p>
+            <a:r>
+              <a:t>Three things that stay genuinely hard, if pressed. First, order dependence: whichever spelling loads first becomes the node's display name, so "Det. Recarey" can end up canonical by accident. Fixable by choosing the family's best name at query time instead of storing a winner. Second, non-determinism: the same documents loaded in a different order give a slightly different graph, which is uncomfortable for evidence. The answer is to log each resolution decision with its inputs, so a result can be explained rather than merely reproduced. Third, cascades: merging A with B can make the pair match C. I would do one pass and flag the rest rather than iterate — chasing a fixed point is how one node ends up swallowing the graph.</a:t>
+            </a:r>
+          </a:p>
+          <a:p>
+            <a:r>
+              <a:t>Operationally this wants a queue rather than a script: per-document jobs, retries, and one unreadable PDF that cannot stall the matter. Chunk-level resumability already exists, so a crashed job resumes instead of starting over. For court filings the RECAP/PACER API means you can watch a docket rather than wait for someone to drop files in a folder.</a:t>
+            </a:r>
+          </a:p>
+        </p:txBody>
+      </p:sp>
+      <p:sp>
+        <p:nvSpPr>
+          <p:cNvPr id="4" name="Slide Number Placeholder 3"/>
+          <p:cNvSpPr>
+            <a:spLocks noGrp="1"/>
+          </p:cNvSpPr>
+          <p:nvPr>
+            <p:ph type="sldNum" idx="5" sz="quarter"/>
+          </p:nvPr>
+        </p:nvSpPr>
+        <p:spPr/>
+      </p:sp>
+    </p:spTree>
+  </p:cSld>
+  <p:clrMapOvr>
+    <a:masterClrMapping/>
+  </p:clrMapOvr>
+</p:notes>
+</file>
+
+<file path=ppt/notesSlides/notesSlide16.xml><?xml version="1.0" encoding="utf-8"?>
+<p:notes xmlns:a="http://schemas.openxmlformats.org/drawingml/2006/main" xmlns:p="http://schemas.openxmlformats.org/presentationml/2006/main" xmlns:r="http://schemas.openxmlformats.org/officeDocument/2006/relationships">
+  <p:cSld>
+    <p:spTree>
+      <p:nvGrpSpPr>
+        <p:cNvPr id="1" name=""/>
+        <p:cNvGrpSpPr/>
+        <p:nvPr/>
+      </p:nvGrpSpPr>
+      <p:grpSpPr>
+        <a:xfrm>
+          <a:off x="0" y="0"/>
+          <a:ext cx="0" cy="0"/>
+          <a:chOff x="0" y="0"/>
+          <a:chExt cx="0" cy="0"/>
+        </a:xfrm>
+      </p:grpSpPr>
+      <p:sp>
+        <p:nvSpPr>
+          <p:cNvPr id="2" name="Slide Image Placeholder 1"/>
+          <p:cNvSpPr>
+            <a:spLocks noGrp="1"/>
+          </p:cNvSpPr>
+          <p:nvPr>
+            <p:ph type="sldImg" idx="2"/>
+          </p:nvPr>
+        </p:nvSpPr>
+        <p:spPr/>
+      </p:sp>
+      <p:sp>
+        <p:nvSpPr>
+          <p:cNvPr id="3" name="Notes Placeholder 2"/>
+          <p:cNvSpPr>
+            <a:spLocks noGrp="1"/>
+          </p:cNvSpPr>
+          <p:nvPr>
+            <p:ph type="body" idx="3" sz="quarter"/>
+          </p:nvPr>
+        </p:nvSpPr>
+        <p:spPr/>
+        <p:txBody>
+          <a:bodyPr/>
+          <a:lstStyle/>
+          <a:p>
+            <a:r>
+              <a:t>The tenancy choice is a real trade, so do not present it as obvious. A database per matter buys hard isolation and clean deletion, and costs you cross-matter queries plus a few hundred databases to administer. One database sharded on the matter keeps cross-matter questions available and turns deletion into a large filtered delete. I would take the database per matter, because the isolation requirement here is ethical rather than technical, and requirements of that kind should not rest on everyone remembering a WHERE clause.</a:t>
+            </a:r>
+          </a:p>
+          <a:p>
+            <a:r>
+              <a:t>The per-corpus settings point is this deck's own argument, turned into a config file. If the kind of documents you have decides the approach — slide 06 — then the pipeline should take the kind of documents as a parameter. Right now the thresholds are environment variables, which is fine for one corpus and wrong for many.</a:t>
+            </a:r>
+          </a:p>
+          <a:p>
+            <a:r>
+              <a:t>On the warning. Both of my worst defects were library defaults behaving reasonably: case-sensitive name comparison, and taking five candidates off an unsorted list. Neither was visible by reading the code, both were obvious in the output, and both scaled with entity count so a small test could not surface them. The practical step after a first full run is to sort the entities by name similarity and read the top few hundred clusters. It is an afternoon, and it catches the class of bug that only exists at scale.</a:t>
             </a:r>
           </a:p>
         </p:txBody>
@@ -7399,6 +7561,710 @@
                 <a:latin typeface="Helvetica Neue"/>
               </a:rPr>
               <a:t>•  Adding new documents without rebuilding. The hardest, and the one that matters most at scale.</a:t>
+            </a:r>
+          </a:p>
+        </p:txBody>
+      </p:sp>
+    </p:spTree>
+  </p:cSld>
+  <p:clrMapOvr>
+    <a:masterClrMapping/>
+  </p:clrMapOvr>
+</p:sld>
+</file>
+
+<file path=ppt/slides/slide15.xml><?xml version="1.0" encoding="utf-8"?>
+<p:sld xmlns:a="http://schemas.openxmlformats.org/drawingml/2006/main" xmlns:p="http://schemas.openxmlformats.org/presentationml/2006/main" xmlns:r="http://schemas.openxmlformats.org/officeDocument/2006/relationships">
+  <p:cSld>
+    <p:bg>
+      <p:bgPr>
+        <a:solidFill>
+          <a:srgbClr val="FBFAF8"/>
+        </a:solidFill>
+        <a:effectLst/>
+      </p:bgPr>
+    </p:bg>
+    <p:spTree>
+      <p:nvGrpSpPr>
+        <p:cNvPr id="1" name=""/>
+        <p:cNvGrpSpPr/>
+        <p:nvPr/>
+      </p:nvGrpSpPr>
+      <p:grpSpPr/>
+      <p:sp>
+        <p:nvSpPr>
+          <p:cNvPr id="2" name="TextBox 1"/>
+          <p:cNvSpPr txBox="1"/>
+          <p:nvPr/>
+        </p:nvSpPr>
+        <p:spPr>
+          <a:xfrm>
+            <a:off x="10710367" y="274320"/>
+            <a:ext cx="914400" cy="274320"/>
+          </a:xfrm>
+          <a:prstGeom prst="rect">
+            <a:avLst/>
+          </a:prstGeom>
+          <a:noFill/>
+        </p:spPr>
+        <p:txBody>
+          <a:bodyPr wrap="square" lIns="0" rIns="0" tIns="0" bIns="0">
+            <a:spAutoFit/>
+          </a:bodyPr>
+          <a:lstStyle/>
+          <a:p>
+            <a:pPr algn="r">
+              <a:spcBef>
+                <a:spcPts val="0"/>
+              </a:spcBef>
+              <a:spcAft>
+                <a:spcPts val="0"/>
+              </a:spcAft>
+            </a:pPr>
+            <a:r>
+              <a:rPr sz="900" b="0" i="0">
+                <a:solidFill>
+                  <a:srgbClr val="838B93"/>
+                </a:solidFill>
+                <a:latin typeface="Menlo"/>
+              </a:rPr>
+              <a:t>B5</a:t>
+            </a:r>
+          </a:p>
+        </p:txBody>
+      </p:sp>
+      <p:sp>
+        <p:nvSpPr>
+          <p:cNvPr id="3" name="TextBox 2"/>
+          <p:cNvSpPr txBox="1"/>
+          <p:nvPr/>
+        </p:nvSpPr>
+        <p:spPr>
+          <a:xfrm>
+            <a:off x="566928" y="566928"/>
+            <a:ext cx="11057839" cy="228600"/>
+          </a:xfrm>
+          <a:prstGeom prst="rect">
+            <a:avLst/>
+          </a:prstGeom>
+          <a:noFill/>
+        </p:spPr>
+        <p:txBody>
+          <a:bodyPr wrap="square" lIns="0" rIns="0" tIns="0" bIns="0">
+            <a:spAutoFit/>
+          </a:bodyPr>
+          <a:lstStyle/>
+          <a:p>
+            <a:pPr>
+              <a:spcBef>
+                <a:spcPts val="0"/>
+              </a:spcBef>
+              <a:spcAft>
+                <a:spcPts val="0"/>
+              </a:spcAft>
+            </a:pPr>
+            <a:r>
+              <a:rPr sz="900" b="0" i="0">
+                <a:solidFill>
+                  <a:srgbClr val="1E3A5F"/>
+                </a:solidFill>
+                <a:latin typeface="Menlo"/>
+              </a:rPr>
+              <a:t>BACKUP · ADDING DOCUMENTS TO A MATTER</a:t>
+            </a:r>
+          </a:p>
+        </p:txBody>
+      </p:sp>
+      <p:sp>
+        <p:nvSpPr>
+          <p:cNvPr id="4" name="TextBox 3"/>
+          <p:cNvSpPr txBox="1"/>
+          <p:nvPr/>
+        </p:nvSpPr>
+        <p:spPr>
+          <a:xfrm>
+            <a:off x="566928" y="841248"/>
+            <a:ext cx="11057839" cy="502920"/>
+          </a:xfrm>
+          <a:prstGeom prst="rect">
+            <a:avLst/>
+          </a:prstGeom>
+          <a:noFill/>
+        </p:spPr>
+        <p:txBody>
+          <a:bodyPr wrap="square" lIns="0" rIns="0" tIns="0" bIns="0">
+            <a:spAutoFit/>
+          </a:bodyPr>
+          <a:lstStyle/>
+          <a:p>
+            <a:pPr>
+              <a:spcBef>
+                <a:spcPts val="0"/>
+              </a:spcBef>
+              <a:spcAft>
+                <a:spcPts val="0"/>
+              </a:spcAft>
+            </a:pPr>
+            <a:r>
+              <a:rPr sz="2600" b="1" i="0">
+                <a:solidFill>
+                  <a:srgbClr val="14171B"/>
+                </a:solidFill>
+                <a:latin typeface="Georgia"/>
+              </a:rPr>
+              <a:t>Loading new filings into a graph that already exists</a:t>
+            </a:r>
+          </a:p>
+        </p:txBody>
+      </p:sp>
+      <p:sp>
+        <p:nvSpPr>
+          <p:cNvPr id="5" name="Rectangle 4"/>
+          <p:cNvSpPr/>
+          <p:nvPr/>
+        </p:nvSpPr>
+        <p:spPr>
+          <a:xfrm>
+            <a:off x="566928" y="1417320"/>
+            <a:ext cx="11057839" cy="9525"/>
+          </a:xfrm>
+          <a:prstGeom prst="rect">
+            <a:avLst/>
+          </a:prstGeom>
+          <a:solidFill>
+            <a:srgbClr val="D8D5CD"/>
+          </a:solidFill>
+          <a:ln>
+            <a:noFill/>
+          </a:ln>
+          <a:effectLst/>
+        </p:spPr>
+        <p:style>
+          <a:lnRef idx="1">
+            <a:schemeClr val="accent1"/>
+          </a:lnRef>
+          <a:fillRef idx="3">
+            <a:schemeClr val="accent1"/>
+          </a:fillRef>
+          <a:effectRef idx="2">
+            <a:schemeClr val="accent1"/>
+          </a:effectRef>
+          <a:fontRef idx="minor">
+            <a:schemeClr val="lt1"/>
+          </a:fontRef>
+        </p:style>
+        <p:txBody>
+          <a:bodyPr rtlCol="0" anchor="ctr"/>
+          <a:lstStyle/>
+          <a:p>
+            <a:pPr algn="ctr"/>
+          </a:p>
+        </p:txBody>
+      </p:sp>
+      <p:sp>
+        <p:nvSpPr>
+          <p:cNvPr id="6" name="TextBox 5"/>
+          <p:cNvSpPr txBox="1"/>
+          <p:nvPr/>
+        </p:nvSpPr>
+        <p:spPr>
+          <a:xfrm>
+            <a:off x="566928" y="1600200"/>
+            <a:ext cx="11057839" cy="2949956"/>
+          </a:xfrm>
+          <a:prstGeom prst="rect">
+            <a:avLst/>
+          </a:prstGeom>
+          <a:noFill/>
+        </p:spPr>
+        <p:txBody>
+          <a:bodyPr wrap="square" lIns="0" rIns="0" tIns="0" bIns="0">
+            <a:spAutoFit/>
+          </a:bodyPr>
+          <a:lstStyle/>
+          <a:p>
+            <a:pPr>
+              <a:spcBef>
+                <a:spcPts val="0"/>
+              </a:spcBef>
+              <a:spcAft>
+                <a:spcPts val="400"/>
+              </a:spcAft>
+            </a:pPr>
+            <a:r>
+              <a:rPr sz="1400" b="0" i="0">
+                <a:solidFill>
+                  <a:srgbClr val="4A5158"/>
+                </a:solidFill>
+                <a:latin typeface="Helvetica Neue"/>
+              </a:rPr>
+              <a:t>Cheaper than the first build, for a reason worth stating.</a:t>
+            </a:r>
+          </a:p>
+          <a:p>
+            <a:pPr>
+              <a:spcBef>
+                <a:spcPts val="300"/>
+              </a:spcBef>
+              <a:spcAft>
+                <a:spcPts val="300"/>
+              </a:spcAft>
+            </a:pPr>
+            <a:r>
+              <a:rPr sz="1200" b="0" i="0">
+                <a:solidFill>
+                  <a:srgbClr val="14171B"/>
+                </a:solidFill>
+                <a:latin typeface="Helvetica Neue"/>
+              </a:rPr>
+              <a:t>•  The 19.8 hours was a one-off. That built 2,014 people from nothing, so nearly every mention needed a judgment call. One new filing brings about a hundred mentions against a graph that already exists — minutes, not hours.</a:t>
+            </a:r>
+          </a:p>
+          <a:p>
+            <a:pPr>
+              <a:spcBef>
+                <a:spcPts val="300"/>
+              </a:spcBef>
+              <a:spcAft>
+                <a:spcPts val="300"/>
+              </a:spcAft>
+            </a:pPr>
+            <a:r>
+              <a:rPr sz="1200" b="0" i="0">
+                <a:solidFill>
+                  <a:srgbClr val="14171B"/>
+                </a:solidFill>
+                <a:latin typeface="Helvetica Neue"/>
+              </a:rPr>
+              <a:t>•  Extraction runs in parallel. Resolution cannot. Ten documents can be chunked and read at once, but two workers resolving names in the same matter would each create their own "Mr. Recarey".</a:t>
+            </a:r>
+          </a:p>
+          <a:p>
+            <a:pPr>
+              <a:spcBef>
+                <a:spcPts val="300"/>
+              </a:spcBef>
+              <a:spcAft>
+                <a:spcPts val="300"/>
+              </a:spcAft>
+            </a:pPr>
+            <a:r>
+              <a:rPr sz="1200" b="0" i="0">
+                <a:solidFill>
+                  <a:srgbClr val="14171B"/>
+                </a:solidFill>
+                <a:latin typeface="Helvetica Neue"/>
+              </a:rPr>
+              <a:t>•  Key documents on their contents, not their filename. Courts re-file corrected versions constantly, so the same bytes arriving twice has to be a no-op.</a:t>
+            </a:r>
+          </a:p>
+          <a:p>
+            <a:pPr>
+              <a:spcBef>
+                <a:spcPts val="300"/>
+              </a:spcBef>
+              <a:spcAft>
+                <a:spcPts val="300"/>
+              </a:spcAft>
+            </a:pPr>
+            <a:r>
+              <a:rPr sz="1200" b="0" i="0">
+                <a:solidFill>
+                  <a:srgbClr val="14171B"/>
+                </a:solidFill>
+                <a:latin typeface="Helvetica Neue"/>
+              </a:rPr>
+              <a:t>•  Sweep backwards after every batch. A new filing can reveal that two people already in the graph were always one person. Nothing in the pipeline looks back today.</a:t>
+            </a:r>
+          </a:p>
+          <a:p>
+            <a:pPr>
+              <a:spcBef>
+                <a:spcPts val="300"/>
+              </a:spcBef>
+              <a:spcAft>
+                <a:spcPts val="300"/>
+              </a:spcAft>
+            </a:pPr>
+            <a:r>
+              <a:rPr sz="1200" b="0" i="0">
+                <a:solidFill>
+                  <a:srgbClr val="14171B"/>
+                </a:solidFill>
+                <a:latin typeface="Helvetica Neue"/>
+              </a:rPr>
+              <a:t>•  A merge is one edge, not a rewrite. Identity is a link between nodes rather than a collapse of them, so joining two people is a single insert — and deleting that edge undoes it.</a:t>
+            </a:r>
+          </a:p>
+          <a:p>
+            <a:pPr>
+              <a:spcBef>
+                <a:spcPts val="700"/>
+              </a:spcBef>
+              <a:spcAft>
+                <a:spcPts val="400"/>
+              </a:spcAft>
+            </a:pPr>
+            <a:r>
+              <a:rPr sz="1200" b="0" i="1">
+                <a:solidFill>
+                  <a:srgbClr val="1E3A5F"/>
+                </a:solidFill>
+                <a:latin typeface="Helvetica Neue"/>
+              </a:rPr>
+              <a:t>The same sweep should re-examine the 413 flagged pairs. New evidence can settle an old "not sure", and right now nothing ever revisits them.</a:t>
+            </a:r>
+          </a:p>
+        </p:txBody>
+      </p:sp>
+    </p:spTree>
+  </p:cSld>
+  <p:clrMapOvr>
+    <a:masterClrMapping/>
+  </p:clrMapOvr>
+</p:sld>
+</file>
+
+<file path=ppt/slides/slide16.xml><?xml version="1.0" encoding="utf-8"?>
+<p:sld xmlns:a="http://schemas.openxmlformats.org/drawingml/2006/main" xmlns:p="http://schemas.openxmlformats.org/presentationml/2006/main" xmlns:r="http://schemas.openxmlformats.org/officeDocument/2006/relationships">
+  <p:cSld>
+    <p:bg>
+      <p:bgPr>
+        <a:solidFill>
+          <a:srgbClr val="FBFAF8"/>
+        </a:solidFill>
+        <a:effectLst/>
+      </p:bgPr>
+    </p:bg>
+    <p:spTree>
+      <p:nvGrpSpPr>
+        <p:cNvPr id="1" name=""/>
+        <p:cNvGrpSpPr/>
+        <p:nvPr/>
+      </p:nvGrpSpPr>
+      <p:grpSpPr/>
+      <p:sp>
+        <p:nvSpPr>
+          <p:cNvPr id="2" name="TextBox 1"/>
+          <p:cNvSpPr txBox="1"/>
+          <p:nvPr/>
+        </p:nvSpPr>
+        <p:spPr>
+          <a:xfrm>
+            <a:off x="10710367" y="274320"/>
+            <a:ext cx="914400" cy="274320"/>
+          </a:xfrm>
+          <a:prstGeom prst="rect">
+            <a:avLst/>
+          </a:prstGeom>
+          <a:noFill/>
+        </p:spPr>
+        <p:txBody>
+          <a:bodyPr wrap="square" lIns="0" rIns="0" tIns="0" bIns="0">
+            <a:spAutoFit/>
+          </a:bodyPr>
+          <a:lstStyle/>
+          <a:p>
+            <a:pPr algn="r">
+              <a:spcBef>
+                <a:spcPts val="0"/>
+              </a:spcBef>
+              <a:spcAft>
+                <a:spcPts val="0"/>
+              </a:spcAft>
+            </a:pPr>
+            <a:r>
+              <a:rPr sz="900" b="0" i="0">
+                <a:solidFill>
+                  <a:srgbClr val="838B93"/>
+                </a:solidFill>
+                <a:latin typeface="Menlo"/>
+              </a:rPr>
+              <a:t>B6</a:t>
+            </a:r>
+          </a:p>
+        </p:txBody>
+      </p:sp>
+      <p:sp>
+        <p:nvSpPr>
+          <p:cNvPr id="3" name="TextBox 2"/>
+          <p:cNvSpPr txBox="1"/>
+          <p:nvPr/>
+        </p:nvSpPr>
+        <p:spPr>
+          <a:xfrm>
+            <a:off x="566928" y="566928"/>
+            <a:ext cx="11057839" cy="228600"/>
+          </a:xfrm>
+          <a:prstGeom prst="rect">
+            <a:avLst/>
+          </a:prstGeom>
+          <a:noFill/>
+        </p:spPr>
+        <p:txBody>
+          <a:bodyPr wrap="square" lIns="0" rIns="0" tIns="0" bIns="0">
+            <a:spAutoFit/>
+          </a:bodyPr>
+          <a:lstStyle/>
+          <a:p>
+            <a:pPr>
+              <a:spcBef>
+                <a:spcPts val="0"/>
+              </a:spcBef>
+              <a:spcAft>
+                <a:spcPts val="0"/>
+              </a:spcAft>
+            </a:pPr>
+            <a:r>
+              <a:rPr sz="900" b="0" i="0">
+                <a:solidFill>
+                  <a:srgbClr val="1E3A5F"/>
+                </a:solidFill>
+                <a:latin typeface="Menlo"/>
+              </a:rPr>
+              <a:t>BACKUP · ADDING A NEW MATTER</a:t>
+            </a:r>
+          </a:p>
+        </p:txBody>
+      </p:sp>
+      <p:sp>
+        <p:nvSpPr>
+          <p:cNvPr id="4" name="TextBox 3"/>
+          <p:cNvSpPr txBox="1"/>
+          <p:nvPr/>
+        </p:nvSpPr>
+        <p:spPr>
+          <a:xfrm>
+            <a:off x="566928" y="841248"/>
+            <a:ext cx="11057839" cy="502920"/>
+          </a:xfrm>
+          <a:prstGeom prst="rect">
+            <a:avLst/>
+          </a:prstGeom>
+          <a:noFill/>
+        </p:spPr>
+        <p:txBody>
+          <a:bodyPr wrap="square" lIns="0" rIns="0" tIns="0" bIns="0">
+            <a:spAutoFit/>
+          </a:bodyPr>
+          <a:lstStyle/>
+          <a:p>
+            <a:pPr>
+              <a:spcBef>
+                <a:spcPts val="0"/>
+              </a:spcBef>
+              <a:spcAft>
+                <a:spcPts val="0"/>
+              </a:spcAft>
+            </a:pPr>
+            <a:r>
+              <a:rPr sz="2600" b="1" i="0">
+                <a:solidFill>
+                  <a:srgbClr val="14171B"/>
+                </a:solidFill>
+                <a:latin typeface="Georgia"/>
+              </a:rPr>
+              <a:t>Onboarding a matter, or a different kind of corpus</a:t>
+            </a:r>
+          </a:p>
+        </p:txBody>
+      </p:sp>
+      <p:sp>
+        <p:nvSpPr>
+          <p:cNvPr id="5" name="Rectangle 4"/>
+          <p:cNvSpPr/>
+          <p:nvPr/>
+        </p:nvSpPr>
+        <p:spPr>
+          <a:xfrm>
+            <a:off x="566928" y="1417320"/>
+            <a:ext cx="11057839" cy="9525"/>
+          </a:xfrm>
+          <a:prstGeom prst="rect">
+            <a:avLst/>
+          </a:prstGeom>
+          <a:solidFill>
+            <a:srgbClr val="D8D5CD"/>
+          </a:solidFill>
+          <a:ln>
+            <a:noFill/>
+          </a:ln>
+          <a:effectLst/>
+        </p:spPr>
+        <p:style>
+          <a:lnRef idx="1">
+            <a:schemeClr val="accent1"/>
+          </a:lnRef>
+          <a:fillRef idx="3">
+            <a:schemeClr val="accent1"/>
+          </a:fillRef>
+          <a:effectRef idx="2">
+            <a:schemeClr val="accent1"/>
+          </a:effectRef>
+          <a:fontRef idx="minor">
+            <a:schemeClr val="lt1"/>
+          </a:fontRef>
+        </p:style>
+        <p:txBody>
+          <a:bodyPr rtlCol="0" anchor="ctr"/>
+          <a:lstStyle/>
+          <a:p>
+            <a:pPr algn="ctr"/>
+          </a:p>
+        </p:txBody>
+      </p:sp>
+      <p:sp>
+        <p:nvSpPr>
+          <p:cNvPr id="6" name="TextBox 5"/>
+          <p:cNvSpPr txBox="1"/>
+          <p:nvPr/>
+        </p:nvSpPr>
+        <p:spPr>
+          <a:xfrm>
+            <a:off x="566928" y="1600200"/>
+            <a:ext cx="11057839" cy="2949956"/>
+          </a:xfrm>
+          <a:prstGeom prst="rect">
+            <a:avLst/>
+          </a:prstGeom>
+          <a:noFill/>
+        </p:spPr>
+        <p:txBody>
+          <a:bodyPr wrap="square" lIns="0" rIns="0" tIns="0" bIns="0">
+            <a:spAutoFit/>
+          </a:bodyPr>
+          <a:lstStyle/>
+          <a:p>
+            <a:pPr>
+              <a:spcBef>
+                <a:spcPts val="0"/>
+              </a:spcBef>
+              <a:spcAft>
+                <a:spcPts val="400"/>
+              </a:spcAft>
+            </a:pPr>
+            <a:r>
+              <a:rPr sz="1400" b="0" i="0">
+                <a:solidFill>
+                  <a:srgbClr val="4A5158"/>
+                </a:solidFill>
+                <a:latin typeface="Helvetica Neue"/>
+              </a:rPr>
+              <a:t>A different problem, and the hard part is not compute.</a:t>
+            </a:r>
+          </a:p>
+          <a:p>
+            <a:pPr>
+              <a:spcBef>
+                <a:spcPts val="300"/>
+              </a:spcBef>
+              <a:spcAft>
+                <a:spcPts val="300"/>
+              </a:spcAft>
+            </a:pPr>
+            <a:r>
+              <a:rPr sz="1200" b="0" i="0">
+                <a:solidFill>
+                  <a:srgbClr val="14171B"/>
+                </a:solidFill>
+                <a:latin typeface="Helvetica Neue"/>
+              </a:rPr>
+              <a:t>•  Isolation comes first. Two matters both have a John Smith and they are not the same man. Name resolution must never look across the boundary.</a:t>
+            </a:r>
+          </a:p>
+          <a:p>
+            <a:pPr>
+              <a:spcBef>
+                <a:spcPts val="300"/>
+              </a:spcBef>
+              <a:spcAft>
+                <a:spcPts val="300"/>
+              </a:spcAft>
+            </a:pPr>
+            <a:r>
+              <a:rPr sz="1200" b="0" i="0">
+                <a:solidFill>
+                  <a:srgbClr val="14171B"/>
+                </a:solidFill>
+                <a:latin typeface="Helvetica Neue"/>
+              </a:rPr>
+              <a:t>•  One database per matter. Isolation stops depending on every future query remembering a filter, and closing an engagement becomes a single delete rather than a careful one.</a:t>
+            </a:r>
+          </a:p>
+          <a:p>
+            <a:pPr>
+              <a:spcBef>
+                <a:spcPts val="300"/>
+              </a:spcBef>
+              <a:spcAft>
+                <a:spcPts val="300"/>
+              </a:spcAft>
+            </a:pPr>
+            <a:r>
+              <a:rPr sz="1200" b="0" i="0">
+                <a:solidFill>
+                  <a:srgbClr val="14171B"/>
+                </a:solidFill>
+                <a:latin typeface="Helvetica Neue"/>
+              </a:rPr>
+              <a:t>•  People who span matters are a separate, curated list. The same expert witness appears in thirty cases. That link is a decision someone makes, never an automatic merge.</a:t>
+            </a:r>
+          </a:p>
+          <a:p>
+            <a:pPr>
+              <a:spcBef>
+                <a:spcPts val="300"/>
+              </a:spcBef>
+              <a:spcAft>
+                <a:spcPts val="300"/>
+              </a:spcAft>
+            </a:pPr>
+            <a:r>
+              <a:rPr sz="1200" b="0" i="0">
+                <a:solidFill>
+                  <a:srgbClr val="14171B"/>
+                </a:solidFill>
+                <a:latin typeface="Helvetica Neue"/>
+              </a:rPr>
+              <a:t>•  Settings belong to the corpus, not the environment. Depositions and product documentation want different chunking and a different matching threshold. Today those are global.</a:t>
+            </a:r>
+          </a:p>
+          <a:p>
+            <a:pPr>
+              <a:spcBef>
+                <a:spcPts val="300"/>
+              </a:spcBef>
+              <a:spcAft>
+                <a:spcPts val="300"/>
+              </a:spcAft>
+            </a:pPr>
+            <a:r>
+              <a:rPr sz="1200" b="0" i="0">
+                <a:solidFill>
+                  <a:srgbClr val="14171B"/>
+                </a:solidFill>
+                <a:latin typeface="Helvetica Neue"/>
+              </a:rPr>
+              <a:t>•  Calibrate before committing. Load a sample, have someone label a hundred pairs by hand, then set the threshold and quote the cost — before anyone starts a nine-hour run.</a:t>
+            </a:r>
+          </a:p>
+          <a:p>
+            <a:pPr>
+              <a:spcBef>
+                <a:spcPts val="700"/>
+              </a:spcBef>
+              <a:spcAft>
+                <a:spcPts val="400"/>
+              </a:spcAft>
+            </a:pPr>
+            <a:r>
+              <a:rPr sz="1200" b="0" i="0">
+                <a:solidFill>
+                  <a:srgbClr val="A6382C"/>
+                </a:solidFill>
+                <a:latin typeface="Helvetica Neue"/>
+              </a:rPr>
+              <a:t>A sample predicts cost. It does not predict correctness. The bug that produced 38 duplicate "Mr. Barton" nodes could not appear in a 200-chunk test, because it only triggers once enough similar names exist to crowd out the right one. A new corpus needs an audit of the full first run.</a:t>
             </a:r>
           </a:p>
         </p:txBody>

--- a/presos/Graph_RAG_Interview_Deck.pptx
+++ b/presos/Graph_RAG_Interview_Deck.pptx
@@ -1293,6 +1293,11 @@
           <a:p>
             <a:r>
               <a:t>If someone pushes on cost, the honest line is that consolidating three systems into one saves licence and staffing money, and I have not measured it. Do not quote their TCO figures as if they were mine.</a:t>
+            </a:r>
+          </a:p>
+          <a:p>
+            <a:r>
+              <a:t>Say "document", not "page". Page-level citation is my system, which tracks a page number per passage. What their documentation supports is a citable_url per file and "document references" from Instant Search. Claiming page-level precision for their product, in front of their engineers, is exactly the kind of small overreach that costs credibility for nothing.</a:t>
             </a:r>
           </a:p>
         </p:txBody>
@@ -8949,7 +8954,7 @@
                 </a:solidFill>
                 <a:latin typeface="Helvetica Neue"/>
               </a:rPr>
-              <a:t>•  Every answer cites the page it came from.</a:t>
+              <a:t>•  Every answer carries a reference back to its source document.</a:t>
             </a:r>
           </a:p>
           <a:p>
@@ -9740,7 +9745,7 @@
                 </a:solidFill>
                 <a:latin typeface="Helvetica Neue"/>
               </a:rPr>
-              <a:t>•  Global Search is the one nobody else ships. It reads the pre-written topic reports instead of walking the graph, so it can answer a question about the collection as a whole.</a:t>
+              <a:t>•  Global Search answers about the collection as a whole. It reads the pre-written topic reports rather than walking the graph. Available through the API only — a prospect evaluating from the web interface never sees it.</a:t>
             </a:r>
           </a:p>
           <a:p>
@@ -9759,7 +9764,7 @@
                 </a:solidFill>
                 <a:latin typeface="Georgia"/>
               </a:rPr>
-              <a:t>"what is actually in here?" — the first thing anyone asks, and the one thing ordinary search cannot do.</a:t>
+              <a:t>"What is actually in here?" is the first thing anyone asks, and ordinary search cannot do it.</a:t>
             </a:r>
           </a:p>
           <a:p>
@@ -9778,7 +9783,7 @@
                 </a:solidFill>
                 <a:latin typeface="Helvetica Neue"/>
               </a:rPr>
-              <a:t>•  Graph search needs a name to start from. Ask "which courts appear in these documents" and there is nothing to anchor on. Mine falls back to plain similarity search on 11 of 35 test questions for exactly that reason.</a:t>
+              <a:t>•  Theirs is five methods you choose between. Mine runs four at once. Meaning, keywords, document density and graph traversal each search the whole corpus, and the results are merged by rank.</a:t>
             </a:r>
           </a:p>
           <a:p>
@@ -9797,7 +9802,7 @@
                 </a:solidFill>
                 <a:latin typeface="Georgia"/>
               </a:rPr>
-              <a:t>This is where my design stops and theirs keeps going. I would rather show you the gap than hide it.</a:t>
+              <a:t>No single method's blind spot gets to decide the answer.</a:t>
             </a:r>
           </a:p>
         </p:txBody>
@@ -10007,7 +10012,7 @@
         <p:spPr>
           <a:xfrm>
             <a:off x="566928" y="1600200"/>
-            <a:ext cx="11057839" cy="2679700"/>
+            <a:ext cx="11057839" cy="2877820"/>
           </a:xfrm>
           <a:prstGeom prst="rect">
             <a:avLst/>
@@ -10130,7 +10135,7 @@
                 </a:solidFill>
                 <a:latin typeface="Helvetica Neue"/>
               </a:rPr>
-              <a:t>NOT THE BEST FIT</a:t>
+              <a:t>LESS THAN IDEAL FIT</a:t>
             </a:r>
           </a:p>
           <a:p>
@@ -10149,7 +10154,7 @@
                 </a:solidFill>
                 <a:latin typeface="Helvetica Neue"/>
               </a:rPr>
-              <a:t>•  Purely conceptual questions. There is no name to start from, so plain meaning-based search (cosine) wins.</a:t>
+              <a:t>•  Answers that live in one passage rather than in a topic. Chunk embeddings are off by default, so a single sentence that does not characterise its topic has no surface to be found on until you switch them on.</a:t>
             </a:r>
           </a:p>
           <a:p>
@@ -10623,7 +10628,7 @@
                           </a:solidFill>
                           <a:latin typeface="Helvetica Neue"/>
                         </a:rPr>
-                        <a:t>You assemble the RAG layer yourself. Vectors live in a second database, and the join between the two is where bugs live.</a:t>
+                        <a:t>You assemble the RAG layer yourself. Vectors live in a second database, and that opens up the chances of discrepancies and problems.</a:t>
                       </a:r>
                     </a:p>
                   </a:txBody>
@@ -11021,7 +11026,7 @@
         <p:spPr>
           <a:xfrm>
             <a:off x="566928" y="1600200"/>
-            <a:ext cx="11057839" cy="4703063"/>
+            <a:ext cx="11057839" cy="4855464"/>
           </a:xfrm>
           <a:prstGeom prst="rect">
             <a:avLst/>
@@ -11087,7 +11092,7 @@
                 </a:solidFill>
                 <a:latin typeface="Helvetica Neue"/>
               </a:rPr>
-              <a:t>•  Groups the graph into topics, and writes a report on each.</a:t>
+              <a:t>•  Groups the graph into topics, and writes a report on each. Global Search reads the reports rather than walking the graph.</a:t>
             </a:r>
           </a:p>
           <a:p>
@@ -11125,7 +11130,7 @@
                 </a:solidFill>
                 <a:latin typeface="Helvetica Neue"/>
               </a:rPr>
-              <a:t>•  Those reports absorb duplicate names on their own.</a:t>
+              <a:t>•  Those reports should absorb duplicate names — two spellings land in one topic, described as one person. (my reading, not their docs)</a:t>
             </a:r>
           </a:p>
           <a:p>
@@ -11163,7 +11168,7 @@
                 </a:solidFill>
                 <a:latin typeface="Helvetica Neue"/>
               </a:rPr>
-              <a:t>•  Best on precise material — documentation, reports, structured filings.</a:t>
+              <a:t>•  Suits consistently-named material — documentation, reports, structured filings. (inferred; their stated target is broader)</a:t>
             </a:r>
           </a:p>
           <a:p>
@@ -11220,7 +11225,7 @@
                 </a:solidFill>
                 <a:latin typeface="Helvetica Neue"/>
               </a:rPr>
-              <a:t>•  That absorption stops at Local Search. Two nodes for one person, half the connections, no warning.</a:t>
+              <a:t>•  Their full parameter reference has no merge or resolution setting. A knob exists for entities the model missed. None asks whether it counted one twice.</a:t>
             </a:r>
           </a:p>
           <a:p>
@@ -11239,6 +11244,44 @@
                 </a:solidFill>
                 <a:latin typeface="Georgia"/>
               </a:rPr>
+              <a:t>Finding more is a setting. Not double-counting is not.</a:t>
+            </a:r>
+          </a:p>
+          <a:p>
+            <a:pPr>
+              <a:spcBef>
+                <a:spcPts val="300"/>
+              </a:spcBef>
+              <a:spcAft>
+                <a:spcPts val="100"/>
+              </a:spcAft>
+            </a:pPr>
+            <a:r>
+              <a:rPr sz="1200" b="0" i="0">
+                <a:solidFill>
+                  <a:srgbClr val="14171B"/>
+                </a:solidFill>
+                <a:latin typeface="Helvetica Neue"/>
+              </a:rPr>
+              <a:t>•  Two nodes for one person means half the connections, with no warning. (my reading)</a:t>
+            </a:r>
+          </a:p>
+          <a:p>
+            <a:pPr lvl="1">
+              <a:spcBef>
+                <a:spcPts val="0"/>
+              </a:spcBef>
+              <a:spcAft>
+                <a:spcPts val="400"/>
+              </a:spcAft>
+            </a:pPr>
+            <a:r>
+              <a:rPr sz="1100" b="0" i="1">
+                <a:solidFill>
+                  <a:srgbClr val="4A5158"/>
+                </a:solidFill>
+                <a:latin typeface="Georgia"/>
+              </a:rPr>
               <a:t>The answer looks complete when it is not.</a:t>
             </a:r>
           </a:p>
@@ -11258,7 +11301,7 @@
                 </a:solidFill>
                 <a:latin typeface="Helvetica Neue"/>
               </a:rPr>
-              <a:t>•  My documents name people loosely. RECAREY, JOSEPH · Det. Recarey · Mr. Recarey — one man, one docket.</a:t>
+              <a:t>•  My documents name people loosely. RECAREY, JOSEPH · Det. Recarey · Mr. Recarey — one man, one docket. Resolving 19,009 mentions into 2,014 people took 19.8 hours, the most expensive stage in the build.</a:t>
             </a:r>
           </a:p>
           <a:p>
@@ -11283,104 +11326,20 @@
           <a:p>
             <a:pPr>
               <a:spcBef>
-                <a:spcPts val="600"/>
-              </a:spcBef>
-              <a:spcAft>
-                <a:spcPts val="200"/>
-              </a:spcAft>
-            </a:pPr>
-            <a:r>
-              <a:rPr sz="2000" b="1" i="0">
+                <a:spcPts val="700"/>
+              </a:spcBef>
+              <a:spcAft>
+                <a:spcPts val="400"/>
+              </a:spcAft>
+            </a:pPr>
+            <a:r>
+              <a:rPr sz="1200" b="0" i="1">
                 <a:solidFill>
                   <a:srgbClr val="1E3A5F"/>
                 </a:solidFill>
-                <a:latin typeface="Georgia"/>
-              </a:rPr>
-              <a:t>19,009   </a:t>
-            </a:r>
-            <a:r>
-              <a:rPr sz="1000" b="0" i="0">
-                <a:solidFill>
-                  <a:srgbClr val="838B93"/>
-                </a:solidFill>
                 <a:latin typeface="Helvetica Neue"/>
               </a:rPr>
-              <a:t>MENTIONS</a:t>
-            </a:r>
-          </a:p>
-          <a:p>
-            <a:pPr>
-              <a:spcBef>
-                <a:spcPts val="600"/>
-              </a:spcBef>
-              <a:spcAft>
-                <a:spcPts val="200"/>
-              </a:spcAft>
-            </a:pPr>
-            <a:r>
-              <a:rPr sz="2000" b="1" i="0">
-                <a:solidFill>
-                  <a:srgbClr val="1E3A5F"/>
-                </a:solidFill>
-                <a:latin typeface="Georgia"/>
-              </a:rPr>
-              <a:t>2,014   </a:t>
-            </a:r>
-            <a:r>
-              <a:rPr sz="1000" b="0" i="0">
-                <a:solidFill>
-                  <a:srgbClr val="838B93"/>
-                </a:solidFill>
-                <a:latin typeface="Helvetica Neue"/>
-              </a:rPr>
-              <a:t>ACTUAL PEOPLE</a:t>
-            </a:r>
-          </a:p>
-          <a:p>
-            <a:pPr>
-              <a:spcBef>
-                <a:spcPts val="600"/>
-              </a:spcBef>
-              <a:spcAft>
-                <a:spcPts val="200"/>
-              </a:spcAft>
-            </a:pPr>
-            <a:r>
-              <a:rPr sz="2000" b="1" i="0">
-                <a:solidFill>
-                  <a:srgbClr val="1E3A5F"/>
-                </a:solidFill>
-                <a:latin typeface="Georgia"/>
-              </a:rPr>
-              <a:t>19.8h   </a:t>
-            </a:r>
-            <a:r>
-              <a:rPr sz="1000" b="0" i="0">
-                <a:solidFill>
-                  <a:srgbClr val="838B93"/>
-                </a:solidFill>
-                <a:latin typeface="Helvetica Neue"/>
-              </a:rPr>
-              <a:t>THE MOST EXPENSIVE STAGE</a:t>
-            </a:r>
-          </a:p>
-          <a:p>
-            <a:pPr>
-              <a:spcBef>
-                <a:spcPts val="700"/>
-              </a:spcBef>
-              <a:spcAft>
-                <a:spcPts val="400"/>
-              </a:spcAft>
-            </a:pPr>
-            <a:r>
-              <a:rPr sz="1200" b="0" i="1">
-                <a:solidFill>
-                  <a:srgbClr val="1E3A5F"/>
-                </a:solidFill>
-                <a:latin typeface="Helvetica Neue"/>
-              </a:rPr>
-              <a:t>Said carefully: I read their published documentation, not their source, and I did not test the product. Their docs describe no identity-resolution step, but that is an argument from silence. The fair question is on their ground, not mine: how does the Importer handle k8s versus Kubernetes?</a:t>
+              <a:t>Said carefully: I read their docs, not their source, and did not test the product. They do publish entity resolution — as an AQL pattern users write, matching structured attributes rather than names in prose. The fair question is on their ground: how does the Importer handle k8s versus Kubernetes?</a:t>
             </a:r>
           </a:p>
           <a:p>

--- a/presos/Graph_RAG_Interview_Deck.pptx
+++ b/presos/Graph_RAG_Interview_Deck.pptx
@@ -10321,7 +10321,7 @@
                 </a:solidFill>
                 <a:latin typeface="Menlo"/>
               </a:rPr>
-              <a:t>ARANGO AI SUITE · POSITIONING</a:t>
+              <a:t>THE LANDSCAPE · COMPARISON</a:t>
             </a:r>
           </a:p>
         </p:txBody>
